--- a/download/VoiceBridge-AI-Pitch.pptx
+++ b/download/VoiceBridge-AI-Pitch.pptx
@@ -511,7 +511,7 @@
           <a:lstStyle/>
           <a:p>
             <a:r>
-              <a:t>VoiceBridge AI. Voice-first accessibility companion built on AssemblyAI. 30 seconds: problem, live demo, why it wins.</a:t>
+              <a:t>Open with the one-liner. Emphasize accessibility companion, not chatbot.</a:t>
             </a:r>
           </a:p>
         </p:txBody>
@@ -581,7 +581,7 @@
           <a:lstStyle/>
           <a:p>
             <a:r>
-              <a:t>Close with the one-liner and the ask. Demo URL + repo + agent.</a:t>
+              <a:t>Close with purpose. Ask for the win and the credits to go to production.</a:t>
             </a:r>
           </a:p>
         </p:txBody>
@@ -651,7 +651,7 @@
           <a:lstStyle/>
           <a:p>
             <a:r>
-              <a:t>Accessibility users are locked out of mouse-first dashboards. Existing voice demos are chatbots that cannot operate real product state, and they die offline.</a:t>
+              <a:t>Frame the market as assistive tech + compliance, not a toy demo.</a:t>
             </a:r>
           </a:p>
         </p:txBody>
@@ -721,7 +721,7 @@
           <a:lstStyle/>
           <a:p>
             <a:r>
-              <a:t>One WebSocket. One tool. Offline ladder. This is an operable product surface, not a chat toy.</a:t>
+              <a:t>Walk the four-step loop. Stress tool calls write real product state.</a:t>
             </a:r>
           </a:p>
         </p:txBody>
@@ -791,7 +791,7 @@
           <a:lstStyle/>
           <a:p>
             <a:r>
-              <a:t>Show the real UI. Power on, open metrics, change speed, read metrics. All clickable.</a:t>
+              <a:t>If live mic is flaky, typed commands exercise the same intent pipeline.</a:t>
             </a:r>
           </a:p>
         </p:txBody>
@@ -861,7 +861,7 @@
           <a:lstStyle/>
           <a:p>
             <a:r>
-              <a:t>We use the recommended stored-agent path, not just a token mint. Tools are real.</a:t>
+              <a:t>Prove we used the real Voice Agent API surface, not speech-to-text alone.</a:t>
             </a:r>
           </a:p>
         </p:txBody>
@@ -931,7 +931,7 @@
           <a:lstStyle/>
           <a:p>
             <a:r>
-              <a:t>Four differentiators judges care about: real actions, offline, security, a11y.</a:t>
+              <a:t>Security stack is a differentiator vs typical hackathon demos.</a:t>
             </a:r>
           </a:p>
         </p:txBody>
@@ -1001,7 +1001,7 @@
           <a:lstStyle/>
           <a:p>
             <a:r>
-              <a:t>Not 'everyone'. Accessibility teams with legal pressure. Voice agents finally work in the browser.</a:t>
+              <a:t>Position against the common failure modes judges see all day.</a:t>
             </a:r>
           </a:p>
         </p:txBody>
@@ -1071,7 +1071,7 @@
           <a:lstStyle/>
           <a:p>
             <a:r>
-              <a:t>Three tiers. AssemblyAI is metered cost. Fallback reduces cloud spend.</a:t>
+              <a:t>Keep pricing simple. Mention metered AssemblyAI minutes; fallback cuts cost.</a:t>
             </a:r>
           </a:p>
         </p:txBody>
@@ -1141,7 +1141,7 @@
           <a:lstStyle/>
           <a:p>
             <a:r>
-              <a:t>Real repo, real tests, real agent. E2E flyover captured.</a:t>
+              <a:t>Judges score application of technology — show tests, E2E, security.</a:t>
             </a:r>
           </a:p>
         </p:txBody>
@@ -4198,11 +4198,13 @@
         </p:nvSpPr>
         <p:spPr>
           <a:xfrm>
-            <a:off x="548640" y="1645920"/>
-            <a:ext cx="128016" cy="1463040"/>
+            <a:off x="640080" y="1645920"/>
+            <a:ext cx="2011680" cy="2011680"/>
           </a:xfrm>
           <a:prstGeom prst="roundRect">
-            <a:avLst/>
+            <a:avLst>
+              <a:gd name="adj" fmla="val 15000"/>
+            </a:avLst>
           </a:prstGeom>
           <a:solidFill>
             <a:srgbClr val="00F0FF"/>
@@ -4235,52 +4237,34 @@
       </p:sp>
       <p:sp>
         <p:nvSpPr>
-          <p:cNvPr id="4" name="Rounded Rectangle 3"/>
-          <p:cNvSpPr/>
-          <p:nvPr/>
-        </p:nvSpPr>
-        <p:spPr>
-          <a:xfrm>
-            <a:off x="548640" y="914400"/>
-            <a:ext cx="2926080" cy="329184"/>
-          </a:xfrm>
-          <a:prstGeom prst="roundRect">
-            <a:avLst/>
-          </a:prstGeom>
-          <a:solidFill>
-            <a:srgbClr val="00F0FF"/>
-          </a:solidFill>
-          <a:ln>
-            <a:noFill/>
-          </a:ln>
-        </p:spPr>
-        <p:style>
-          <a:lnRef idx="1">
-            <a:schemeClr val="accent1"/>
-          </a:lnRef>
-          <a:fillRef idx="3">
-            <a:schemeClr val="accent1"/>
-          </a:fillRef>
-          <a:effectRef idx="2">
-            <a:schemeClr val="accent1"/>
-          </a:effectRef>
-          <a:fontRef idx="minor">
-            <a:schemeClr val="lt1"/>
-          </a:fontRef>
-        </p:style>
-        <p:txBody>
-          <a:bodyPr rtlCol="0" anchor="ctr" wrap="none"/>
+          <p:cNvPr id="4" name="TextBox 3"/>
+          <p:cNvSpPr txBox="1"/>
+          <p:nvPr/>
+        </p:nvSpPr>
+        <p:spPr>
+          <a:xfrm>
+            <a:off x="777240" y="2240280"/>
+            <a:ext cx="1828800" cy="914400"/>
+          </a:xfrm>
+          <a:prstGeom prst="rect">
+            <a:avLst/>
+          </a:prstGeom>
+          <a:noFill/>
+        </p:spPr>
+        <p:txBody>
+          <a:bodyPr wrap="square" anchor="t"/>
           <a:lstStyle/>
           <a:p>
             <a:pPr algn="ctr"/>
             <a:r>
-              <a:rPr sz="1200" b="1">
+              <a:rPr sz="6400" b="1">
                 <a:solidFill>
                   <a:srgbClr val="0A0E17"/>
                 </a:solidFill>
                 <a:latin typeface="Calibri"/>
-              </a:rPr>
-              <a:t>ASSEMBLYAI VOICE AGENT HACKATHON</a:t>
+                <a:ea typeface="Calibri"/>
+              </a:rPr>
+              <a:t>VB</a:t>
             </a:r>
           </a:p>
         </p:txBody>
@@ -4293,8 +4277,8 @@
         </p:nvSpPr>
         <p:spPr>
           <a:xfrm>
-            <a:off x="822960" y="1828800"/>
-            <a:ext cx="10058400" cy="914400"/>
+            <a:off x="3017520" y="1737360"/>
+            <a:ext cx="8229600" cy="365760"/>
           </a:xfrm>
           <a:prstGeom prst="rect">
             <a:avLst/>
@@ -4302,20 +4286,19 @@
           <a:noFill/>
         </p:spPr>
         <p:txBody>
-          <a:bodyPr wrap="square">
-            <a:spAutoFit/>
-          </a:bodyPr>
+          <a:bodyPr wrap="square" anchor="t"/>
           <a:lstStyle/>
           <a:p>
             <a:pPr algn="l"/>
             <a:r>
-              <a:rPr sz="5400" b="1">
-                <a:solidFill>
-                  <a:srgbClr val="FFFFFF"/>
-                </a:solidFill>
-                <a:latin typeface="Calibri"/>
-              </a:rPr>
-              <a:t>VoiceBridge AI</a:t>
+              <a:rPr sz="1400" b="1">
+                <a:solidFill>
+                  <a:srgbClr val="00F0FF"/>
+                </a:solidFill>
+                <a:latin typeface="Calibri"/>
+                <a:ea typeface="Calibri"/>
+              </a:rPr>
+              <a:t>ASSEMBLYAI VOICE AGENT HACKATHON</a:t>
             </a:r>
           </a:p>
         </p:txBody>
@@ -4328,8 +4311,8 @@
         </p:nvSpPr>
         <p:spPr>
           <a:xfrm>
-            <a:off x="822960" y="2834640"/>
-            <a:ext cx="10058400" cy="640080"/>
+            <a:off x="3017520" y="2148840"/>
+            <a:ext cx="8229600" cy="731520"/>
           </a:xfrm>
           <a:prstGeom prst="rect">
             <a:avLst/>
@@ -4337,20 +4320,19 @@
           <a:noFill/>
         </p:spPr>
         <p:txBody>
-          <a:bodyPr wrap="square">
-            <a:spAutoFit/>
-          </a:bodyPr>
+          <a:bodyPr wrap="square" anchor="t"/>
           <a:lstStyle/>
           <a:p>
             <a:pPr algn="l"/>
             <a:r>
-              <a:rPr sz="2800" b="0">
-                <a:solidFill>
-                  <a:srgbClr val="00F0FF"/>
-                </a:solidFill>
-                <a:latin typeface="Calibri"/>
-              </a:rPr>
-              <a:t>Voice-first accessibility companion</a:t>
+              <a:rPr sz="4800" b="1">
+                <a:solidFill>
+                  <a:srgbClr val="F5F7FA"/>
+                </a:solidFill>
+                <a:latin typeface="Calibri"/>
+                <a:ea typeface="Calibri"/>
+              </a:rPr>
+              <a:t>VoiceBridge AI</a:t>
             </a:r>
           </a:p>
         </p:txBody>
@@ -4363,8 +4345,8 @@
         </p:nvSpPr>
         <p:spPr>
           <a:xfrm>
-            <a:off x="822960" y="3657600"/>
-            <a:ext cx="9144000" cy="1097280"/>
+            <a:off x="3017520" y="2971800"/>
+            <a:ext cx="8229600" cy="1097280"/>
           </a:xfrm>
           <a:prstGeom prst="rect">
             <a:avLst/>
@@ -4372,28 +4354,20 @@
           <a:noFill/>
         </p:spPr>
         <p:txBody>
-          <a:bodyPr wrap="square">
-            <a:spAutoFit/>
-          </a:bodyPr>
+          <a:bodyPr wrap="square" anchor="t"/>
           <a:lstStyle/>
           <a:p>
             <a:pPr algn="l"/>
             <a:r>
-              <a:rPr sz="1800" b="0">
+              <a:rPr sz="2000" b="0">
                 <a:solidFill>
                   <a:srgbClr val="9AA4B2"/>
                 </a:solidFill>
                 <a:latin typeface="Calibri"/>
-              </a:rPr>
-              <a:t>Navigate a live web dashboard by voice.</a:t>
-            </a:r>
-            <a:br/>
-            <a:r>
-              <a:t>Change settings, read metrics, keep a full transcript —</a:t>
-            </a:r>
-            <a:br/>
-            <a:r>
-              <a:t>with offline fallback when the cloud is down.</a:t>
+                <a:ea typeface="Calibri"/>
+              </a:rPr>
+              <a:t>Operate the web with your voice.
+A voice-first accessibility companion — not a chat wrapper.</a:t>
             </a:r>
           </a:p>
         </p:txBody>
@@ -4406,8 +4380,8 @@
         </p:nvSpPr>
         <p:spPr>
           <a:xfrm>
-            <a:off x="822960" y="5852160"/>
-            <a:ext cx="9144000" cy="365760"/>
+            <a:off x="3017520" y="5029200"/>
+            <a:ext cx="8229600" cy="457200"/>
           </a:xfrm>
           <a:prstGeom prst="rect">
             <a:avLst/>
@@ -4415,20 +4389,87 @@
           <a:noFill/>
         </p:spPr>
         <p:txBody>
-          <a:bodyPr wrap="square">
-            <a:spAutoFit/>
-          </a:bodyPr>
+          <a:bodyPr wrap="square" anchor="t"/>
           <a:lstStyle/>
           <a:p>
             <a:pPr algn="l"/>
             <a:r>
               <a:rPr sz="1400" b="0">
                 <a:solidFill>
+                  <a:srgbClr val="5CE0D8"/>
+                </a:solidFill>
+                <a:latin typeface="Calibri"/>
+                <a:ea typeface="Calibri"/>
+              </a:rPr>
+              <a:t>Built on AssemblyAI Voice Agent API  ·  Multi-engine fallback  ·  Production security</a:t>
+            </a:r>
+          </a:p>
+        </p:txBody>
+      </p:sp>
+      <p:sp>
+        <p:nvSpPr>
+          <p:cNvPr id="9" name="TextBox 8"/>
+          <p:cNvSpPr txBox="1"/>
+          <p:nvPr/>
+        </p:nvSpPr>
+        <p:spPr>
+          <a:xfrm>
+            <a:off x="640080" y="6446520"/>
+            <a:ext cx="7315200" cy="274320"/>
+          </a:xfrm>
+          <a:prstGeom prst="rect">
+            <a:avLst/>
+          </a:prstGeom>
+          <a:noFill/>
+        </p:spPr>
+        <p:txBody>
+          <a:bodyPr wrap="square" anchor="t"/>
+          <a:lstStyle/>
+          <a:p>
+            <a:pPr algn="l"/>
+            <a:r>
+              <a:rPr sz="1100" b="0">
+                <a:solidFill>
                   <a:srgbClr val="9AA4B2"/>
                 </a:solidFill>
                 <a:latin typeface="Calibri"/>
-              </a:rPr>
-              <a:t>Built on the AssemblyAI Voice Agent API  ·  Sep 2026</a:t>
+                <a:ea typeface="Calibri"/>
+              </a:rPr>
+              <a:t>VoiceBridge AI  ·  AssemblyAI Voice Agent Hackathon 2026</a:t>
+            </a:r>
+          </a:p>
+        </p:txBody>
+      </p:sp>
+      <p:sp>
+        <p:nvSpPr>
+          <p:cNvPr id="10" name="TextBox 9"/>
+          <p:cNvSpPr txBox="1"/>
+          <p:nvPr/>
+        </p:nvSpPr>
+        <p:spPr>
+          <a:xfrm>
+            <a:off x="10515600" y="6446520"/>
+            <a:ext cx="1097280" cy="274320"/>
+          </a:xfrm>
+          <a:prstGeom prst="rect">
+            <a:avLst/>
+          </a:prstGeom>
+          <a:noFill/>
+        </p:spPr>
+        <p:txBody>
+          <a:bodyPr wrap="square" anchor="t"/>
+          <a:lstStyle/>
+          <a:p>
+            <a:pPr algn="r"/>
+            <a:r>
+              <a:rPr sz="1100" b="0">
+                <a:solidFill>
+                  <a:srgbClr val="9AA4B2"/>
+                </a:solidFill>
+                <a:latin typeface="Calibri"/>
+                <a:ea typeface="Calibri"/>
+              </a:rPr>
+              <a:t>1/10</a:t>
             </a:r>
           </a:p>
         </p:txBody>
@@ -4496,16 +4537,84 @@
       </p:sp>
       <p:sp>
         <p:nvSpPr>
-          <p:cNvPr id="3" name="Rounded Rectangle 2"/>
+          <p:cNvPr id="3" name="TextBox 2"/>
+          <p:cNvSpPr txBox="1"/>
+          <p:nvPr/>
+        </p:nvSpPr>
+        <p:spPr>
+          <a:xfrm>
+            <a:off x="640080" y="365760"/>
+            <a:ext cx="10972800" cy="320040"/>
+          </a:xfrm>
+          <a:prstGeom prst="rect">
+            <a:avLst/>
+          </a:prstGeom>
+          <a:noFill/>
+        </p:spPr>
+        <p:txBody>
+          <a:bodyPr wrap="square" anchor="t"/>
+          <a:lstStyle/>
+          <a:p>
+            <a:pPr algn="l"/>
+            <a:r>
+              <a:rPr sz="1200" b="1">
+                <a:solidFill>
+                  <a:srgbClr val="00F0FF"/>
+                </a:solidFill>
+                <a:latin typeface="Calibri"/>
+                <a:ea typeface="Calibri"/>
+              </a:rPr>
+              <a:t>NEXT</a:t>
+            </a:r>
+          </a:p>
+        </p:txBody>
+      </p:sp>
+      <p:sp>
+        <p:nvSpPr>
+          <p:cNvPr id="4" name="TextBox 3"/>
+          <p:cNvSpPr txBox="1"/>
+          <p:nvPr/>
+        </p:nvSpPr>
+        <p:spPr>
+          <a:xfrm>
+            <a:off x="640080" y="685800"/>
+            <a:ext cx="10972800" cy="640080"/>
+          </a:xfrm>
+          <a:prstGeom prst="rect">
+            <a:avLst/>
+          </a:prstGeom>
+          <a:noFill/>
+        </p:spPr>
+        <p:txBody>
+          <a:bodyPr wrap="square" anchor="t"/>
+          <a:lstStyle/>
+          <a:p>
+            <a:pPr algn="l"/>
+            <a:r>
+              <a:rPr sz="3200" b="1">
+                <a:solidFill>
+                  <a:srgbClr val="F5F7FA"/>
+                </a:solidFill>
+                <a:latin typeface="Calibri"/>
+                <a:ea typeface="Calibri"/>
+              </a:rPr>
+              <a:t>Roadmap and what we need</a:t>
+            </a:r>
+          </a:p>
+        </p:txBody>
+      </p:sp>
+      <p:sp>
+        <p:nvSpPr>
+          <p:cNvPr id="5" name="Rectangle 4"/>
           <p:cNvSpPr/>
           <p:nvPr/>
         </p:nvSpPr>
         <p:spPr>
           <a:xfrm>
-            <a:off x="548640" y="2011680"/>
-            <a:ext cx="128016" cy="1645920"/>
-          </a:xfrm>
-          <a:prstGeom prst="roundRect">
+            <a:off x="640080" y="1325880"/>
+            <a:ext cx="1097280" cy="45720"/>
+          </a:xfrm>
+          <a:prstGeom prst="rect">
             <a:avLst/>
           </a:prstGeom>
           <a:solidFill>
@@ -4539,14 +4648,14 @@
       </p:sp>
       <p:sp>
         <p:nvSpPr>
-          <p:cNvPr id="4" name="TextBox 3"/>
+          <p:cNvPr id="6" name="TextBox 5"/>
           <p:cNvSpPr txBox="1"/>
           <p:nvPr/>
         </p:nvSpPr>
         <p:spPr>
           <a:xfrm>
-            <a:off x="822960" y="1828800"/>
-            <a:ext cx="10058400" cy="731520"/>
+            <a:off x="640080" y="1645920"/>
+            <a:ext cx="5669280" cy="3657600"/>
           </a:xfrm>
           <a:prstGeom prst="rect">
             <a:avLst/>
@@ -4559,135 +4668,172 @@
           </a:bodyPr>
           <a:lstStyle/>
           <a:p>
-            <a:pPr algn="l"/>
-            <a:r>
-              <a:rPr sz="4800" b="1">
-                <a:solidFill>
-                  <a:srgbClr val="FFFFFF"/>
-                </a:solidFill>
-                <a:latin typeface="Calibri"/>
-              </a:rPr>
-              <a:t>VoiceBridge AI</a:t>
-            </a:r>
-          </a:p>
-        </p:txBody>
-      </p:sp>
-      <p:sp>
-        <p:nvSpPr>
-          <p:cNvPr id="5" name="TextBox 4"/>
-          <p:cNvSpPr txBox="1"/>
-          <p:nvPr/>
-        </p:nvSpPr>
-        <p:spPr>
-          <a:xfrm>
-            <a:off x="822960" y="2743200"/>
-            <a:ext cx="10058400" cy="548640"/>
-          </a:xfrm>
-          <a:prstGeom prst="rect">
-            <a:avLst/>
-          </a:prstGeom>
-          <a:noFill/>
-        </p:spPr>
-        <p:txBody>
-          <a:bodyPr wrap="square">
-            <a:spAutoFit/>
-          </a:bodyPr>
-          <a:lstStyle/>
-          <a:p>
-            <a:pPr algn="l"/>
-            <a:r>
-              <a:rPr sz="2400" b="0">
-                <a:solidFill>
-                  <a:srgbClr val="00F0FF"/>
-                </a:solidFill>
-                <a:latin typeface="Calibri"/>
-              </a:rPr>
-              <a:t>Navigate. Configure. Understand — by voice.</a:t>
-            </a:r>
-          </a:p>
-        </p:txBody>
-      </p:sp>
-      <p:sp>
-        <p:nvSpPr>
-          <p:cNvPr id="6" name="TextBox 5"/>
-          <p:cNvSpPr txBox="1"/>
-          <p:nvPr/>
-        </p:nvSpPr>
-        <p:spPr>
-          <a:xfrm>
-            <a:off x="822960" y="3657600"/>
-            <a:ext cx="10058400" cy="1828800"/>
-          </a:xfrm>
-          <a:prstGeom prst="rect">
-            <a:avLst/>
-          </a:prstGeom>
-          <a:noFill/>
-        </p:spPr>
-        <p:txBody>
-          <a:bodyPr wrap="square">
-            <a:spAutoFit/>
-          </a:bodyPr>
-          <a:lstStyle/>
-          <a:p>
-            <a:pPr>
+            <a:pPr algn="l">
               <a:spcAft>
-                <a:spcPts val="800"/>
+                <a:spcPts val="1000"/>
               </a:spcAft>
             </a:pPr>
             <a:r>
-              <a:rPr sz="1800" b="1">
-                <a:solidFill>
-                  <a:srgbClr val="FFFFFF"/>
-                </a:solidFill>
-                <a:latin typeface="Calibri"/>
-              </a:rPr>
-              <a:t>Try the live demo  ·  Read the repo  ·  Talk to the agent</a:t>
-            </a:r>
-          </a:p>
-          <a:p>
-            <a:pPr>
+              <a:rPr sz="1700" b="1">
+                <a:solidFill>
+                  <a:srgbClr val="00F0FF"/>
+                </a:solidFill>
+                <a:latin typeface="Calibri"/>
+                <a:ea typeface="Calibri"/>
+              </a:rPr>
+              <a:t>▸  </a:t>
+            </a:r>
+            <a:r>
+              <a:rPr sz="1700" b="0">
+                <a:solidFill>
+                  <a:srgbClr val="F5F7FA"/>
+                </a:solidFill>
+                <a:latin typeface="Calibri"/>
+                <a:ea typeface="Calibri"/>
+              </a:rPr>
+              <a:t>Phone channel via Twilio SIP (AssemblyAI telephony path)</a:t>
+            </a:r>
+          </a:p>
+          <a:p>
+            <a:pPr algn="l">
               <a:spcAft>
-                <a:spcPts val="800"/>
+                <a:spcPts val="1000"/>
               </a:spcAft>
             </a:pPr>
             <a:r>
-              <a:rPr sz="1800" b="0">
-                <a:solidFill>
-                  <a:srgbClr val="9AA4B2"/>
-                </a:solidFill>
-                <a:latin typeface="Calibri"/>
-              </a:rPr>
-              <a:t>Roadmap: Twilio phone, multi-user auth, richer vision tools, enterprise SSO</a:t>
-            </a:r>
-          </a:p>
-          <a:p>
-            <a:pPr>
+              <a:rPr sz="1700" b="1">
+                <a:solidFill>
+                  <a:srgbClr val="00F0FF"/>
+                </a:solidFill>
+                <a:latin typeface="Calibri"/>
+                <a:ea typeface="Calibri"/>
+              </a:rPr>
+              <a:t>▸  </a:t>
+            </a:r>
+            <a:r>
+              <a:rPr sz="1700" b="0">
+                <a:solidFill>
+                  <a:srgbClr val="F5F7FA"/>
+                </a:solidFill>
+                <a:latin typeface="Calibri"/>
+                <a:ea typeface="Calibri"/>
+              </a:rPr>
+              <a:t>Multi-user auth + enterprise SSO</a:t>
+            </a:r>
+          </a:p>
+          <a:p>
+            <a:pPr algn="l">
               <a:spcAft>
-                <a:spcPts val="800"/>
+                <a:spcPts val="1000"/>
               </a:spcAft>
             </a:pPr>
             <a:r>
-              <a:rPr sz="1800" b="1">
-                <a:solidFill>
-                  <a:srgbClr val="5CE0D8"/>
-                </a:solidFill>
-                <a:latin typeface="Calibri"/>
-              </a:rPr>
-              <a:t>Thank you.</a:t>
-            </a:r>
-          </a:p>
-        </p:txBody>
-      </p:sp>
-      <p:sp>
-        <p:nvSpPr>
-          <p:cNvPr id="7" name="TextBox 6"/>
+              <a:rPr sz="1700" b="1">
+                <a:solidFill>
+                  <a:srgbClr val="00F0FF"/>
+                </a:solidFill>
+                <a:latin typeface="Calibri"/>
+                <a:ea typeface="Calibri"/>
+              </a:rPr>
+              <a:t>▸  </a:t>
+            </a:r>
+            <a:r>
+              <a:rPr sz="1700" b="0">
+                <a:solidFill>
+                  <a:srgbClr val="F5F7FA"/>
+                </a:solidFill>
+                <a:latin typeface="Calibri"/>
+                <a:ea typeface="Calibri"/>
+              </a:rPr>
+              <a:t>Richer vision tools (element targeting, form fill)</a:t>
+            </a:r>
+          </a:p>
+          <a:p>
+            <a:pPr algn="l">
+              <a:spcAft>
+                <a:spcPts val="1000"/>
+              </a:spcAft>
+            </a:pPr>
+            <a:r>
+              <a:rPr sz="1700" b="1">
+                <a:solidFill>
+                  <a:srgbClr val="00F0FF"/>
+                </a:solidFill>
+                <a:latin typeface="Calibri"/>
+                <a:ea typeface="Calibri"/>
+              </a:rPr>
+              <a:t>▸  </a:t>
+            </a:r>
+            <a:r>
+              <a:rPr sz="1700" b="0">
+                <a:solidFill>
+                  <a:srgbClr val="F5F7FA"/>
+                </a:solidFill>
+                <a:latin typeface="Calibri"/>
+                <a:ea typeface="Calibri"/>
+              </a:rPr>
+              <a:t>Bluejay simulation scoring for agent quality</a:t>
+            </a:r>
+          </a:p>
+        </p:txBody>
+      </p:sp>
+      <p:sp>
+        <p:nvSpPr>
+          <p:cNvPr id="7" name="Rounded Rectangle 6"/>
+          <p:cNvSpPr/>
+          <p:nvPr/>
+        </p:nvSpPr>
+        <p:spPr>
+          <a:xfrm>
+            <a:off x="6675120" y="1645920"/>
+            <a:ext cx="4846320" cy="3840480"/>
+          </a:xfrm>
+          <a:prstGeom prst="roundRect">
+            <a:avLst>
+              <a:gd name="adj" fmla="val 8000"/>
+            </a:avLst>
+          </a:prstGeom>
+          <a:solidFill>
+            <a:srgbClr val="111827"/>
+          </a:solidFill>
+          <a:ln w="12700">
+            <a:solidFill>
+              <a:srgbClr val="00F0FF"/>
+            </a:solidFill>
+          </a:ln>
+        </p:spPr>
+        <p:style>
+          <a:lnRef idx="1">
+            <a:schemeClr val="accent1"/>
+          </a:lnRef>
+          <a:fillRef idx="3">
+            <a:schemeClr val="accent1"/>
+          </a:fillRef>
+          <a:effectRef idx="2">
+            <a:schemeClr val="accent1"/>
+          </a:effectRef>
+          <a:fontRef idx="minor">
+            <a:schemeClr val="lt1"/>
+          </a:fontRef>
+        </p:style>
+        <p:txBody>
+          <a:bodyPr rtlCol="0" anchor="ctr"/>
+          <a:lstStyle/>
+          <a:p>
+            <a:pPr algn="ctr"/>
+          </a:p>
+        </p:txBody>
+      </p:sp>
+      <p:sp>
+        <p:nvSpPr>
+          <p:cNvPr id="8" name="TextBox 7"/>
           <p:cNvSpPr txBox="1"/>
           <p:nvPr/>
         </p:nvSpPr>
         <p:spPr>
           <a:xfrm>
-            <a:off x="822960" y="5943600"/>
-            <a:ext cx="10058400" cy="365760"/>
+            <a:off x="6903720" y="1920240"/>
+            <a:ext cx="4389120" cy="365760"/>
           </a:xfrm>
           <a:prstGeom prst="rect">
             <a:avLst/>
@@ -4695,20 +4841,160 @@
           <a:noFill/>
         </p:spPr>
         <p:txBody>
-          <a:bodyPr wrap="square">
-            <a:spAutoFit/>
-          </a:bodyPr>
+          <a:bodyPr wrap="square" anchor="t"/>
           <a:lstStyle/>
           <a:p>
             <a:pPr algn="l"/>
             <a:r>
-              <a:rPr sz="1200" b="0">
+              <a:rPr sz="1400" b="1">
+                <a:solidFill>
+                  <a:srgbClr val="00F0FF"/>
+                </a:solidFill>
+                <a:latin typeface="Calibri"/>
+                <a:ea typeface="Calibri"/>
+              </a:rPr>
+              <a:t>THE ASK</a:t>
+            </a:r>
+          </a:p>
+        </p:txBody>
+      </p:sp>
+      <p:sp>
+        <p:nvSpPr>
+          <p:cNvPr id="9" name="TextBox 8"/>
+          <p:cNvSpPr txBox="1"/>
+          <p:nvPr/>
+        </p:nvSpPr>
+        <p:spPr>
+          <a:xfrm>
+            <a:off x="6903720" y="2423160"/>
+            <a:ext cx="4389120" cy="2560320"/>
+          </a:xfrm>
+          <a:prstGeom prst="rect">
+            <a:avLst/>
+          </a:prstGeom>
+          <a:noFill/>
+        </p:spPr>
+        <p:txBody>
+          <a:bodyPr wrap="square" anchor="t"/>
+          <a:lstStyle/>
+          <a:p>
+            <a:pPr algn="l"/>
+            <a:r>
+              <a:rPr sz="1600" b="0">
+                <a:solidFill>
+                  <a:srgbClr val="F5F7FA"/>
+                </a:solidFill>
+                <a:latin typeface="Calibri"/>
+                <a:ea typeface="Calibri"/>
+              </a:rPr>
+              <a:t>Ship VoiceBridge to users who
+cannot afford to wait for a
+mouse-first web to catch up.
+Prize credits → production
+AssemblyAI minutes + phone
+pilot with accessibility testers.</a:t>
+            </a:r>
+          </a:p>
+        </p:txBody>
+      </p:sp>
+      <p:sp>
+        <p:nvSpPr>
+          <p:cNvPr id="10" name="TextBox 9"/>
+          <p:cNvSpPr txBox="1"/>
+          <p:nvPr/>
+        </p:nvSpPr>
+        <p:spPr>
+          <a:xfrm>
+            <a:off x="640080" y="5760720"/>
+            <a:ext cx="10972800" cy="365760"/>
+          </a:xfrm>
+          <a:prstGeom prst="rect">
+            <a:avLst/>
+          </a:prstGeom>
+          <a:noFill/>
+        </p:spPr>
+        <p:txBody>
+          <a:bodyPr wrap="square" anchor="t"/>
+          <a:lstStyle/>
+          <a:p>
+            <a:pPr algn="l"/>
+            <a:r>
+              <a:rPr sz="1300" b="0">
                 <a:solidFill>
                   <a:srgbClr val="9AA4B2"/>
                 </a:solidFill>
                 <a:latin typeface="Calibri"/>
-              </a:rPr>
-              <a:t>lablab.ai  ·  AssemblyAI Voice Agent Hackathon  ·  Sep 2026</a:t>
+                <a:ea typeface="Calibri"/>
+              </a:rPr>
+              <a:t>github.com/BROCKUGANDA/voicebridge-ai  ·  AssemblyAI Voice Agent API</a:t>
+            </a:r>
+          </a:p>
+        </p:txBody>
+      </p:sp>
+      <p:sp>
+        <p:nvSpPr>
+          <p:cNvPr id="11" name="TextBox 10"/>
+          <p:cNvSpPr txBox="1"/>
+          <p:nvPr/>
+        </p:nvSpPr>
+        <p:spPr>
+          <a:xfrm>
+            <a:off x="640080" y="6446520"/>
+            <a:ext cx="7315200" cy="274320"/>
+          </a:xfrm>
+          <a:prstGeom prst="rect">
+            <a:avLst/>
+          </a:prstGeom>
+          <a:noFill/>
+        </p:spPr>
+        <p:txBody>
+          <a:bodyPr wrap="square" anchor="t"/>
+          <a:lstStyle/>
+          <a:p>
+            <a:pPr algn="l"/>
+            <a:r>
+              <a:rPr sz="1100" b="0">
+                <a:solidFill>
+                  <a:srgbClr val="9AA4B2"/>
+                </a:solidFill>
+                <a:latin typeface="Calibri"/>
+                <a:ea typeface="Calibri"/>
+              </a:rPr>
+              <a:t>VoiceBridge AI  ·  AssemblyAI Voice Agent Hackathon 2026</a:t>
+            </a:r>
+          </a:p>
+        </p:txBody>
+      </p:sp>
+      <p:sp>
+        <p:nvSpPr>
+          <p:cNvPr id="12" name="TextBox 11"/>
+          <p:cNvSpPr txBox="1"/>
+          <p:nvPr/>
+        </p:nvSpPr>
+        <p:spPr>
+          <a:xfrm>
+            <a:off x="10515600" y="6446520"/>
+            <a:ext cx="1097280" cy="274320"/>
+          </a:xfrm>
+          <a:prstGeom prst="rect">
+            <a:avLst/>
+          </a:prstGeom>
+          <a:noFill/>
+        </p:spPr>
+        <p:txBody>
+          <a:bodyPr wrap="square" anchor="t"/>
+          <a:lstStyle/>
+          <a:p>
+            <a:pPr algn="r"/>
+            <a:r>
+              <a:rPr sz="1100" b="0">
+                <a:solidFill>
+                  <a:srgbClr val="9AA4B2"/>
+                </a:solidFill>
+                <a:latin typeface="Calibri"/>
+                <a:ea typeface="Calibri"/>
+              </a:rPr>
+              <a:t>10/10</a:t>
             </a:r>
           </a:p>
         </p:txBody>
@@ -4776,16 +5062,84 @@
       </p:sp>
       <p:sp>
         <p:nvSpPr>
-          <p:cNvPr id="3" name="Rounded Rectangle 2"/>
+          <p:cNvPr id="3" name="TextBox 2"/>
+          <p:cNvSpPr txBox="1"/>
+          <p:nvPr/>
+        </p:nvSpPr>
+        <p:spPr>
+          <a:xfrm>
+            <a:off x="640080" y="365760"/>
+            <a:ext cx="10972800" cy="320040"/>
+          </a:xfrm>
+          <a:prstGeom prst="rect">
+            <a:avLst/>
+          </a:prstGeom>
+          <a:noFill/>
+        </p:spPr>
+        <p:txBody>
+          <a:bodyPr wrap="square" anchor="t"/>
+          <a:lstStyle/>
+          <a:p>
+            <a:pPr algn="l"/>
+            <a:r>
+              <a:rPr sz="1200" b="1">
+                <a:solidFill>
+                  <a:srgbClr val="00F0FF"/>
+                </a:solidFill>
+                <a:latin typeface="Calibri"/>
+                <a:ea typeface="Calibri"/>
+              </a:rPr>
+              <a:t>THE PROBLEM</a:t>
+            </a:r>
+          </a:p>
+        </p:txBody>
+      </p:sp>
+      <p:sp>
+        <p:nvSpPr>
+          <p:cNvPr id="4" name="TextBox 3"/>
+          <p:cNvSpPr txBox="1"/>
+          <p:nvPr/>
+        </p:nvSpPr>
+        <p:spPr>
+          <a:xfrm>
+            <a:off x="640080" y="685800"/>
+            <a:ext cx="10972800" cy="640080"/>
+          </a:xfrm>
+          <a:prstGeom prst="rect">
+            <a:avLst/>
+          </a:prstGeom>
+          <a:noFill/>
+        </p:spPr>
+        <p:txBody>
+          <a:bodyPr wrap="square" anchor="t"/>
+          <a:lstStyle/>
+          <a:p>
+            <a:pPr algn="l"/>
+            <a:r>
+              <a:rPr sz="3200" b="1">
+                <a:solidFill>
+                  <a:srgbClr val="F5F7FA"/>
+                </a:solidFill>
+                <a:latin typeface="Calibri"/>
+                <a:ea typeface="Calibri"/>
+              </a:rPr>
+              <a:t>Pixel-first UIs exclude people who need them most</a:t>
+            </a:r>
+          </a:p>
+        </p:txBody>
+      </p:sp>
+      <p:sp>
+        <p:nvSpPr>
+          <p:cNvPr id="5" name="Rectangle 4"/>
           <p:cNvSpPr/>
           <p:nvPr/>
         </p:nvSpPr>
         <p:spPr>
           <a:xfrm>
-            <a:off x="457200" y="320040"/>
-            <a:ext cx="109728" cy="640080"/>
-          </a:xfrm>
-          <a:prstGeom prst="roundRect">
+            <a:off x="640080" y="1325880"/>
+            <a:ext cx="1097280" cy="45720"/>
+          </a:xfrm>
+          <a:prstGeom prst="rect">
             <a:avLst/>
           </a:prstGeom>
           <a:solidFill>
@@ -4819,14 +5173,14 @@
       </p:sp>
       <p:sp>
         <p:nvSpPr>
-          <p:cNvPr id="4" name="TextBox 3"/>
+          <p:cNvPr id="6" name="TextBox 5"/>
           <p:cNvSpPr txBox="1"/>
           <p:nvPr/>
         </p:nvSpPr>
         <p:spPr>
           <a:xfrm>
-            <a:off x="822960" y="411480"/>
-            <a:ext cx="10058400" cy="640080"/>
+            <a:off x="640080" y="1645920"/>
+            <a:ext cx="5486400" cy="3657600"/>
           </a:xfrm>
           <a:prstGeom prst="rect">
             <a:avLst/>
@@ -4839,44 +5193,9 @@
           </a:bodyPr>
           <a:lstStyle/>
           <a:p>
-            <a:pPr algn="l"/>
-            <a:r>
-              <a:rPr sz="3600" b="1">
-                <a:solidFill>
-                  <a:srgbClr val="FFFFFF"/>
-                </a:solidFill>
-                <a:latin typeface="Calibri"/>
-              </a:rPr>
-              <a:t>Pixel-first UIs lock people out</a:t>
-            </a:r>
-          </a:p>
-        </p:txBody>
-      </p:sp>
-      <p:sp>
-        <p:nvSpPr>
-          <p:cNvPr id="5" name="TextBox 4"/>
-          <p:cNvSpPr txBox="1"/>
-          <p:nvPr/>
-        </p:nvSpPr>
-        <p:spPr>
-          <a:xfrm>
-            <a:off x="822960" y="1371600"/>
-            <a:ext cx="5303520" cy="4114800"/>
-          </a:xfrm>
-          <a:prstGeom prst="rect">
-            <a:avLst/>
-          </a:prstGeom>
-          <a:noFill/>
-        </p:spPr>
-        <p:txBody>
-          <a:bodyPr wrap="square">
-            <a:spAutoFit/>
-          </a:bodyPr>
-          <a:lstStyle/>
-          <a:p>
-            <a:pPr>
+            <a:pPr algn="l">
               <a:spcAft>
-                <a:spcPts val="800"/>
+                <a:spcPts val="1000"/>
               </a:spcAft>
             </a:pPr>
             <a:r>
@@ -4885,207 +5204,121 @@
                   <a:srgbClr val="00F0FF"/>
                 </a:solidFill>
                 <a:latin typeface="Calibri"/>
-              </a:rPr>
-              <a:t>Who hurts</a:t>
-            </a:r>
-          </a:p>
-          <a:p>
-            <a:pPr>
+                <a:ea typeface="Calibri"/>
+              </a:rPr>
+              <a:t>▸  </a:t>
+            </a:r>
+            <a:r>
+              <a:rPr sz="1800" b="0">
+                <a:solidFill>
+                  <a:srgbClr val="F5F7FA"/>
+                </a:solidFill>
+                <a:latin typeface="Calibri"/>
+                <a:ea typeface="Calibri"/>
+              </a:rPr>
+              <a:t>Blind, low-vision, and motor-impaired users fight mouse-first dashboards</a:t>
+            </a:r>
+          </a:p>
+          <a:p>
+            <a:pPr algn="l">
               <a:spcAft>
-                <a:spcPts val="800"/>
+                <a:spcPts val="1000"/>
               </a:spcAft>
             </a:pPr>
             <a:r>
+              <a:rPr sz="1800" b="1">
+                <a:solidFill>
+                  <a:srgbClr val="00F0FF"/>
+                </a:solidFill>
+                <a:latin typeface="Calibri"/>
+                <a:ea typeface="Calibri"/>
+              </a:rPr>
+              <a:t>▸  </a:t>
+            </a:r>
+            <a:r>
               <a:rPr sz="1800" b="0">
                 <a:solidFill>
-                  <a:srgbClr val="FFFFFF"/>
-                </a:solidFill>
-                <a:latin typeface="Calibri"/>
-              </a:rPr>
-              <a:t>Blind and low-vision users</a:t>
-            </a:r>
-          </a:p>
-          <a:p>
-            <a:pPr>
+                  <a:srgbClr val="F5F7FA"/>
+                </a:solidFill>
+                <a:latin typeface="Calibri"/>
+                <a:ea typeface="Calibri"/>
+              </a:rPr>
+              <a:t>Most “voice UIs” are chat wrappers — they talk, they do not operate a product</a:t>
+            </a:r>
+          </a:p>
+          <a:p>
+            <a:pPr algn="l">
               <a:spcAft>
-                <a:spcPts val="800"/>
+                <a:spcPts val="1000"/>
               </a:spcAft>
             </a:pPr>
             <a:r>
+              <a:rPr sz="1800" b="1">
+                <a:solidFill>
+                  <a:srgbClr val="00F0FF"/>
+                </a:solidFill>
+                <a:latin typeface="Calibri"/>
+                <a:ea typeface="Calibri"/>
+              </a:rPr>
+              <a:t>▸  </a:t>
+            </a:r>
+            <a:r>
               <a:rPr sz="1800" b="0">
                 <a:solidFill>
-                  <a:srgbClr val="FFFFFF"/>
-                </a:solidFill>
-                <a:latin typeface="Calibri"/>
-              </a:rPr>
-              <a:t>Motor-impaired users who cannot use a mouse</a:t>
-            </a:r>
-          </a:p>
-          <a:p>
-            <a:pPr>
-              <a:spcAft>
-                <a:spcPts val="800"/>
-              </a:spcAft>
-            </a:pPr>
-            <a:r>
-              <a:rPr sz="1800" b="0">
-                <a:solidFill>
-                  <a:srgbClr val="FFFFFF"/>
-                </a:solidFill>
-                <a:latin typeface="Calibri"/>
-              </a:rPr>
-              <a:t>Cognitively-diverse users overwhelmed by dense UIs</a:t>
-            </a:r>
-          </a:p>
-          <a:p>
-            <a:pPr>
-              <a:spcAft>
-                <a:spcPts val="800"/>
-              </a:spcAft>
-            </a:pPr>
-            <a:r>
-              <a:rPr sz="1800" b="0">
-                <a:solidFill>
-                  <a:srgbClr val="FFFFFF"/>
-                </a:solidFill>
-                <a:latin typeface="Calibri"/>
-              </a:rPr>
-              <a:t/>
-            </a:r>
-          </a:p>
-          <a:p>
-            <a:pPr>
-              <a:spcAft>
-                <a:spcPts val="800"/>
-              </a:spcAft>
-            </a:pPr>
-            <a:r>
-              <a:rPr sz="1800" b="1">
-                <a:solidFill>
-                  <a:srgbClr val="FFB627"/>
-                </a:solidFill>
-                <a:latin typeface="Calibri"/>
-              </a:rPr>
-              <a:t>Why current voice demos fail</a:t>
-            </a:r>
-          </a:p>
-          <a:p>
-            <a:pPr>
-              <a:spcAft>
-                <a:spcPts val="800"/>
-              </a:spcAft>
-            </a:pPr>
-            <a:r>
-              <a:rPr sz="1800" b="0">
-                <a:solidFill>
-                  <a:srgbClr val="9AA4B2"/>
-                </a:solidFill>
-                <a:latin typeface="Calibri"/>
-              </a:rPr>
-              <a:t>Chat wrappers that talk but do not operate a product</a:t>
-            </a:r>
-          </a:p>
-          <a:p>
-            <a:pPr>
-              <a:spcAft>
-                <a:spcPts val="800"/>
-              </a:spcAft>
-            </a:pPr>
-            <a:r>
-              <a:rPr sz="1800" b="0">
-                <a:solidFill>
-                  <a:srgbClr val="9AA4B2"/>
-                </a:solidFill>
-                <a:latin typeface="Calibri"/>
-              </a:rPr>
-              <a:t>Cloud-only — useless offline or during outages</a:t>
-            </a:r>
-          </a:p>
-          <a:p>
-            <a:pPr>
-              <a:spcAft>
-                <a:spcPts val="800"/>
-              </a:spcAft>
-            </a:pPr>
-            <a:r>
-              <a:rPr sz="1800" b="0">
-                <a:solidFill>
-                  <a:srgbClr val="9AA4B2"/>
-                </a:solidFill>
-                <a:latin typeface="Calibri"/>
-              </a:rPr>
-              <a:t>No tools: they cannot write prefs or read real metrics</a:t>
-            </a:r>
-          </a:p>
-        </p:txBody>
-      </p:sp>
-      <p:sp>
-        <p:nvSpPr>
-          <p:cNvPr id="6" name="TextBox 5"/>
-          <p:cNvSpPr txBox="1"/>
-          <p:nvPr/>
-        </p:nvSpPr>
-        <p:spPr>
-          <a:xfrm>
-            <a:off x="7315200" y="1645920"/>
-            <a:ext cx="3657600" cy="822960"/>
-          </a:xfrm>
-          <a:prstGeom prst="rect">
-            <a:avLst/>
-          </a:prstGeom>
-          <a:noFill/>
-        </p:spPr>
-        <p:txBody>
-          <a:bodyPr wrap="square">
-            <a:spAutoFit/>
-          </a:bodyPr>
-          <a:lstStyle/>
-          <a:p>
-            <a:pPr algn="l"/>
-            <a:r>
-              <a:rPr sz="4800" b="1">
-                <a:solidFill>
-                  <a:srgbClr val="00F0FF"/>
-                </a:solidFill>
-                <a:latin typeface="Calibri"/>
-              </a:rPr>
-              <a:t>1.3B</a:t>
-            </a:r>
-          </a:p>
-        </p:txBody>
-      </p:sp>
-      <p:sp>
-        <p:nvSpPr>
-          <p:cNvPr id="7" name="TextBox 6"/>
-          <p:cNvSpPr txBox="1"/>
-          <p:nvPr/>
-        </p:nvSpPr>
-        <p:spPr>
-          <a:xfrm>
-            <a:off x="7315200" y="2423160"/>
-            <a:ext cx="3657600" cy="457200"/>
-          </a:xfrm>
-          <a:prstGeom prst="rect">
-            <a:avLst/>
-          </a:prstGeom>
-          <a:noFill/>
-        </p:spPr>
-        <p:txBody>
-          <a:bodyPr wrap="square">
-            <a:spAutoFit/>
-          </a:bodyPr>
-          <a:lstStyle/>
-          <a:p>
-            <a:pPr algn="l"/>
-            <a:r>
-              <a:rPr sz="1400" b="0">
-                <a:solidFill>
-                  <a:srgbClr val="9AA4B2"/>
-                </a:solidFill>
-                <a:latin typeface="Calibri"/>
-              </a:rPr>
-              <a:t>people with significant disabilities (WHO)</a:t>
-            </a:r>
+                  <a:srgbClr val="F5F7FA"/>
+                </a:solidFill>
+                <a:latin typeface="Calibri"/>
+                <a:ea typeface="Calibri"/>
+              </a:rPr>
+              <a:t>When cloud STT fails, voice apps go dark for the people who need them most</a:t>
+            </a:r>
+          </a:p>
+        </p:txBody>
+      </p:sp>
+      <p:sp>
+        <p:nvSpPr>
+          <p:cNvPr id="7" name="Rounded Rectangle 6"/>
+          <p:cNvSpPr/>
+          <p:nvPr/>
+        </p:nvSpPr>
+        <p:spPr>
+          <a:xfrm>
+            <a:off x="6583680" y="1645920"/>
+            <a:ext cx="4846320" cy="1143000"/>
+          </a:xfrm>
+          <a:prstGeom prst="roundRect">
+            <a:avLst>
+              <a:gd name="adj" fmla="val 8000"/>
+            </a:avLst>
+          </a:prstGeom>
+          <a:solidFill>
+            <a:srgbClr val="111827"/>
+          </a:solidFill>
+          <a:ln w="12700">
+            <a:solidFill>
+              <a:srgbClr val="00F0FF"/>
+            </a:solidFill>
+          </a:ln>
+        </p:spPr>
+        <p:style>
+          <a:lnRef idx="1">
+            <a:schemeClr val="accent1"/>
+          </a:lnRef>
+          <a:fillRef idx="3">
+            <a:schemeClr val="accent1"/>
+          </a:fillRef>
+          <a:effectRef idx="2">
+            <a:schemeClr val="accent1"/>
+          </a:effectRef>
+          <a:fontRef idx="minor">
+            <a:schemeClr val="lt1"/>
+          </a:fontRef>
+        </p:style>
+        <p:txBody>
+          <a:bodyPr rtlCol="0" anchor="ctr"/>
+          <a:lstStyle/>
+          <a:p>
+            <a:pPr algn="ctr"/>
           </a:p>
         </p:txBody>
       </p:sp>
@@ -5097,8 +5330,8 @@
         </p:nvSpPr>
         <p:spPr>
           <a:xfrm>
-            <a:off x="7315200" y="3200400"/>
-            <a:ext cx="3657600" cy="822960"/>
+            <a:off x="6812280" y="1828800"/>
+            <a:ext cx="4389120" cy="457200"/>
           </a:xfrm>
           <a:prstGeom prst="rect">
             <a:avLst/>
@@ -5106,20 +5339,19 @@
           <a:noFill/>
         </p:spPr>
         <p:txBody>
-          <a:bodyPr wrap="square">
-            <a:spAutoFit/>
-          </a:bodyPr>
+          <a:bodyPr wrap="square" anchor="t"/>
           <a:lstStyle/>
           <a:p>
             <a:pPr algn="l"/>
             <a:r>
-              <a:rPr sz="4800" b="1">
-                <a:solidFill>
-                  <a:srgbClr val="5CE0D8"/>
-                </a:solidFill>
-                <a:latin typeface="Calibri"/>
-              </a:rPr>
-              <a:t>WCAG</a:t>
+              <a:rPr sz="2800" b="1">
+                <a:solidFill>
+                  <a:srgbClr val="00F0FF"/>
+                </a:solidFill>
+                <a:latin typeface="Calibri"/>
+                <a:ea typeface="Calibri"/>
+              </a:rPr>
+              <a:t>1B+</a:t>
             </a:r>
           </a:p>
         </p:txBody>
@@ -5132,8 +5364,8 @@
         </p:nvSpPr>
         <p:spPr>
           <a:xfrm>
-            <a:off x="7315200" y="3977639"/>
-            <a:ext cx="3657600" cy="457200"/>
+            <a:off x="6812280" y="2286000"/>
+            <a:ext cx="4389120" cy="365760"/>
           </a:xfrm>
           <a:prstGeom prst="rect">
             <a:avLst/>
@@ -5141,9 +5373,7 @@
           <a:noFill/>
         </p:spPr>
         <p:txBody>
-          <a:bodyPr wrap="square">
-            <a:spAutoFit/>
-          </a:bodyPr>
+          <a:bodyPr wrap="square" anchor="t"/>
           <a:lstStyle/>
           <a:p>
             <a:pPr algn="l"/>
@@ -5153,44 +5383,57 @@
                   <a:srgbClr val="9AA4B2"/>
                 </a:solidFill>
                 <a:latin typeface="Calibri"/>
-              </a:rPr>
-              <a:t>legal pressure via EN 301 549 / ADA</a:t>
-            </a:r>
-          </a:p>
-        </p:txBody>
-      </p:sp>
-      <p:sp>
-        <p:nvSpPr>
-          <p:cNvPr id="10" name="TextBox 9"/>
-          <p:cNvSpPr txBox="1"/>
-          <p:nvPr/>
-        </p:nvSpPr>
-        <p:spPr>
-          <a:xfrm>
-            <a:off x="7315200" y="4754880"/>
-            <a:ext cx="3657600" cy="822960"/>
-          </a:xfrm>
-          <a:prstGeom prst="rect">
-            <a:avLst/>
-          </a:prstGeom>
-          <a:noFill/>
-        </p:spPr>
-        <p:txBody>
-          <a:bodyPr wrap="square">
-            <a:spAutoFit/>
-          </a:bodyPr>
-          <a:lstStyle/>
-          <a:p>
-            <a:pPr algn="l"/>
-            <a:r>
-              <a:rPr sz="4800" b="1">
-                <a:solidFill>
-                  <a:srgbClr val="FFB627"/>
-                </a:solidFill>
-                <a:latin typeface="Calibri"/>
-              </a:rPr>
-              <a:t>0</a:t>
-            </a:r>
+                <a:ea typeface="Calibri"/>
+              </a:rPr>
+              <a:t>People with disabilities worldwide</a:t>
+            </a:r>
+          </a:p>
+        </p:txBody>
+      </p:sp>
+      <p:sp>
+        <p:nvSpPr>
+          <p:cNvPr id="10" name="Rounded Rectangle 9"/>
+          <p:cNvSpPr/>
+          <p:nvPr/>
+        </p:nvSpPr>
+        <p:spPr>
+          <a:xfrm>
+            <a:off x="6583680" y="3017520"/>
+            <a:ext cx="4846320" cy="1143000"/>
+          </a:xfrm>
+          <a:prstGeom prst="roundRect">
+            <a:avLst>
+              <a:gd name="adj" fmla="val 8000"/>
+            </a:avLst>
+          </a:prstGeom>
+          <a:solidFill>
+            <a:srgbClr val="111827"/>
+          </a:solidFill>
+          <a:ln w="12700">
+            <a:solidFill>
+              <a:srgbClr val="5CE0D8"/>
+            </a:solidFill>
+          </a:ln>
+        </p:spPr>
+        <p:style>
+          <a:lnRef idx="1">
+            <a:schemeClr val="accent1"/>
+          </a:lnRef>
+          <a:fillRef idx="3">
+            <a:schemeClr val="accent1"/>
+          </a:fillRef>
+          <a:effectRef idx="2">
+            <a:schemeClr val="accent1"/>
+          </a:effectRef>
+          <a:fontRef idx="minor">
+            <a:schemeClr val="lt1"/>
+          </a:fontRef>
+        </p:style>
+        <p:txBody>
+          <a:bodyPr rtlCol="0" anchor="ctr"/>
+          <a:lstStyle/>
+          <a:p>
+            <a:pPr algn="ctr"/>
           </a:p>
         </p:txBody>
       </p:sp>
@@ -5202,8 +5445,8 @@
         </p:nvSpPr>
         <p:spPr>
           <a:xfrm>
-            <a:off x="7315200" y="5532120"/>
-            <a:ext cx="3657600" cy="457200"/>
+            <a:off x="6812280" y="3200400"/>
+            <a:ext cx="4389120" cy="457200"/>
           </a:xfrm>
           <a:prstGeom prst="rect">
             <a:avLst/>
@@ -5211,20 +5454,236 @@
           <a:noFill/>
         </p:spPr>
         <p:txBody>
-          <a:bodyPr wrap="square">
-            <a:spAutoFit/>
-          </a:bodyPr>
+          <a:bodyPr wrap="square" anchor="t"/>
           <a:lstStyle/>
           <a:p>
             <a:pPr algn="l"/>
             <a:r>
+              <a:rPr sz="2800" b="1">
+                <a:solidFill>
+                  <a:srgbClr val="5CE0D8"/>
+                </a:solidFill>
+                <a:latin typeface="Calibri"/>
+                <a:ea typeface="Calibri"/>
+              </a:rPr>
+              <a:t>2.2B</a:t>
+            </a:r>
+          </a:p>
+        </p:txBody>
+      </p:sp>
+      <p:sp>
+        <p:nvSpPr>
+          <p:cNvPr id="12" name="TextBox 11"/>
+          <p:cNvSpPr txBox="1"/>
+          <p:nvPr/>
+        </p:nvSpPr>
+        <p:spPr>
+          <a:xfrm>
+            <a:off x="6812280" y="3657600"/>
+            <a:ext cx="4389120" cy="365760"/>
+          </a:xfrm>
+          <a:prstGeom prst="rect">
+            <a:avLst/>
+          </a:prstGeom>
+          <a:noFill/>
+        </p:spPr>
+        <p:txBody>
+          <a:bodyPr wrap="square" anchor="t"/>
+          <a:lstStyle/>
+          <a:p>
+            <a:pPr algn="l"/>
+            <a:r>
               <a:rPr sz="1400" b="0">
                 <a:solidFill>
                   <a:srgbClr val="9AA4B2"/>
                 </a:solidFill>
                 <a:latin typeface="Calibri"/>
-              </a:rPr>
-              <a:t>acceptable excuses for unusable dashboards</a:t>
+                <a:ea typeface="Calibri"/>
+              </a:rPr>
+              <a:t>People with vision impairment (WHO)</a:t>
+            </a:r>
+          </a:p>
+        </p:txBody>
+      </p:sp>
+      <p:sp>
+        <p:nvSpPr>
+          <p:cNvPr id="13" name="Rounded Rectangle 12"/>
+          <p:cNvSpPr/>
+          <p:nvPr/>
+        </p:nvSpPr>
+        <p:spPr>
+          <a:xfrm>
+            <a:off x="6583680" y="4389120"/>
+            <a:ext cx="4846320" cy="1143000"/>
+          </a:xfrm>
+          <a:prstGeom prst="roundRect">
+            <a:avLst>
+              <a:gd name="adj" fmla="val 8000"/>
+            </a:avLst>
+          </a:prstGeom>
+          <a:solidFill>
+            <a:srgbClr val="111827"/>
+          </a:solidFill>
+          <a:ln w="12700">
+            <a:solidFill>
+              <a:srgbClr val="FFB627"/>
+            </a:solidFill>
+          </a:ln>
+        </p:spPr>
+        <p:style>
+          <a:lnRef idx="1">
+            <a:schemeClr val="accent1"/>
+          </a:lnRef>
+          <a:fillRef idx="3">
+            <a:schemeClr val="accent1"/>
+          </a:fillRef>
+          <a:effectRef idx="2">
+            <a:schemeClr val="accent1"/>
+          </a:effectRef>
+          <a:fontRef idx="minor">
+            <a:schemeClr val="lt1"/>
+          </a:fontRef>
+        </p:style>
+        <p:txBody>
+          <a:bodyPr rtlCol="0" anchor="ctr"/>
+          <a:lstStyle/>
+          <a:p>
+            <a:pPr algn="ctr"/>
+          </a:p>
+        </p:txBody>
+      </p:sp>
+      <p:sp>
+        <p:nvSpPr>
+          <p:cNvPr id="14" name="TextBox 13"/>
+          <p:cNvSpPr txBox="1"/>
+          <p:nvPr/>
+        </p:nvSpPr>
+        <p:spPr>
+          <a:xfrm>
+            <a:off x="6812280" y="4572000"/>
+            <a:ext cx="4389120" cy="457200"/>
+          </a:xfrm>
+          <a:prstGeom prst="rect">
+            <a:avLst/>
+          </a:prstGeom>
+          <a:noFill/>
+        </p:spPr>
+        <p:txBody>
+          <a:bodyPr wrap="square" anchor="t"/>
+          <a:lstStyle/>
+          <a:p>
+            <a:pPr algn="l"/>
+            <a:r>
+              <a:rPr sz="2800" b="1">
+                <a:solidFill>
+                  <a:srgbClr val="FFB627"/>
+                </a:solidFill>
+                <a:latin typeface="Calibri"/>
+                <a:ea typeface="Calibri"/>
+              </a:rPr>
+              <a:t>WCAG</a:t>
+            </a:r>
+          </a:p>
+        </p:txBody>
+      </p:sp>
+      <p:sp>
+        <p:nvSpPr>
+          <p:cNvPr id="15" name="TextBox 14"/>
+          <p:cNvSpPr txBox="1"/>
+          <p:nvPr/>
+        </p:nvSpPr>
+        <p:spPr>
+          <a:xfrm>
+            <a:off x="6812280" y="5029200"/>
+            <a:ext cx="4389120" cy="365760"/>
+          </a:xfrm>
+          <a:prstGeom prst="rect">
+            <a:avLst/>
+          </a:prstGeom>
+          <a:noFill/>
+        </p:spPr>
+        <p:txBody>
+          <a:bodyPr wrap="square" anchor="t"/>
+          <a:lstStyle/>
+          <a:p>
+            <a:pPr algn="l"/>
+            <a:r>
+              <a:rPr sz="1400" b="0">
+                <a:solidFill>
+                  <a:srgbClr val="9AA4B2"/>
+                </a:solidFill>
+                <a:latin typeface="Calibri"/>
+                <a:ea typeface="Calibri"/>
+              </a:rPr>
+              <a:t>Legal mandates expanding globally</a:t>
+            </a:r>
+          </a:p>
+        </p:txBody>
+      </p:sp>
+      <p:sp>
+        <p:nvSpPr>
+          <p:cNvPr id="16" name="TextBox 15"/>
+          <p:cNvSpPr txBox="1"/>
+          <p:nvPr/>
+        </p:nvSpPr>
+        <p:spPr>
+          <a:xfrm>
+            <a:off x="640080" y="6446520"/>
+            <a:ext cx="7315200" cy="274320"/>
+          </a:xfrm>
+          <a:prstGeom prst="rect">
+            <a:avLst/>
+          </a:prstGeom>
+          <a:noFill/>
+        </p:spPr>
+        <p:txBody>
+          <a:bodyPr wrap="square" anchor="t"/>
+          <a:lstStyle/>
+          <a:p>
+            <a:pPr algn="l"/>
+            <a:r>
+              <a:rPr sz="1100" b="0">
+                <a:solidFill>
+                  <a:srgbClr val="9AA4B2"/>
+                </a:solidFill>
+                <a:latin typeface="Calibri"/>
+                <a:ea typeface="Calibri"/>
+              </a:rPr>
+              <a:t>VoiceBridge AI  ·  AssemblyAI Voice Agent Hackathon 2026</a:t>
+            </a:r>
+          </a:p>
+        </p:txBody>
+      </p:sp>
+      <p:sp>
+        <p:nvSpPr>
+          <p:cNvPr id="17" name="TextBox 16"/>
+          <p:cNvSpPr txBox="1"/>
+          <p:nvPr/>
+        </p:nvSpPr>
+        <p:spPr>
+          <a:xfrm>
+            <a:off x="10515600" y="6446520"/>
+            <a:ext cx="1097280" cy="274320"/>
+          </a:xfrm>
+          <a:prstGeom prst="rect">
+            <a:avLst/>
+          </a:prstGeom>
+          <a:noFill/>
+        </p:spPr>
+        <p:txBody>
+          <a:bodyPr wrap="square" anchor="t"/>
+          <a:lstStyle/>
+          <a:p>
+            <a:pPr algn="r"/>
+            <a:r>
+              <a:rPr sz="1100" b="0">
+                <a:solidFill>
+                  <a:srgbClr val="9AA4B2"/>
+                </a:solidFill>
+                <a:latin typeface="Calibri"/>
+                <a:ea typeface="Calibri"/>
+              </a:rPr>
+              <a:t>2/10</a:t>
             </a:r>
           </a:p>
         </p:txBody>
@@ -5292,16 +5751,84 @@
       </p:sp>
       <p:sp>
         <p:nvSpPr>
-          <p:cNvPr id="3" name="Rounded Rectangle 2"/>
+          <p:cNvPr id="3" name="TextBox 2"/>
+          <p:cNvSpPr txBox="1"/>
+          <p:nvPr/>
+        </p:nvSpPr>
+        <p:spPr>
+          <a:xfrm>
+            <a:off x="640080" y="365760"/>
+            <a:ext cx="10972800" cy="320040"/>
+          </a:xfrm>
+          <a:prstGeom prst="rect">
+            <a:avLst/>
+          </a:prstGeom>
+          <a:noFill/>
+        </p:spPr>
+        <p:txBody>
+          <a:bodyPr wrap="square" anchor="t"/>
+          <a:lstStyle/>
+          <a:p>
+            <a:pPr algn="l"/>
+            <a:r>
+              <a:rPr sz="1200" b="1">
+                <a:solidFill>
+                  <a:srgbClr val="00F0FF"/>
+                </a:solidFill>
+                <a:latin typeface="Calibri"/>
+                <a:ea typeface="Calibri"/>
+              </a:rPr>
+              <a:t>THE SOLUTION</a:t>
+            </a:r>
+          </a:p>
+        </p:txBody>
+      </p:sp>
+      <p:sp>
+        <p:nvSpPr>
+          <p:cNvPr id="4" name="TextBox 3"/>
+          <p:cNvSpPr txBox="1"/>
+          <p:nvPr/>
+        </p:nvSpPr>
+        <p:spPr>
+          <a:xfrm>
+            <a:off x="640080" y="685800"/>
+            <a:ext cx="10972800" cy="640080"/>
+          </a:xfrm>
+          <a:prstGeom prst="rect">
+            <a:avLst/>
+          </a:prstGeom>
+          <a:noFill/>
+        </p:spPr>
+        <p:txBody>
+          <a:bodyPr wrap="square" anchor="t"/>
+          <a:lstStyle/>
+          <a:p>
+            <a:pPr algn="l"/>
+            <a:r>
+              <a:rPr sz="3200" b="1">
+                <a:solidFill>
+                  <a:srgbClr val="F5F7FA"/>
+                </a:solidFill>
+                <a:latin typeface="Calibri"/>
+                <a:ea typeface="Calibri"/>
+              </a:rPr>
+              <a:t>A dashboard you can operate with speech</a:t>
+            </a:r>
+          </a:p>
+        </p:txBody>
+      </p:sp>
+      <p:sp>
+        <p:nvSpPr>
+          <p:cNvPr id="5" name="Rectangle 4"/>
           <p:cNvSpPr/>
           <p:nvPr/>
         </p:nvSpPr>
         <p:spPr>
           <a:xfrm>
-            <a:off x="457200" y="320040"/>
-            <a:ext cx="109728" cy="640080"/>
-          </a:xfrm>
-          <a:prstGeom prst="roundRect">
+            <a:off x="640080" y="1325880"/>
+            <a:ext cx="1097280" cy="45720"/>
+          </a:xfrm>
+          <a:prstGeom prst="rect">
             <a:avLst/>
           </a:prstGeom>
           <a:solidFill>
@@ -5335,60 +5862,25 @@
       </p:sp>
       <p:sp>
         <p:nvSpPr>
-          <p:cNvPr id="4" name="TextBox 3"/>
-          <p:cNvSpPr txBox="1"/>
-          <p:nvPr/>
-        </p:nvSpPr>
-        <p:spPr>
-          <a:xfrm>
-            <a:off x="822960" y="411480"/>
-            <a:ext cx="10972800" cy="640080"/>
-          </a:xfrm>
-          <a:prstGeom prst="rect">
-            <a:avLst/>
-          </a:prstGeom>
-          <a:noFill/>
-        </p:spPr>
-        <p:txBody>
-          <a:bodyPr wrap="square">
-            <a:spAutoFit/>
-          </a:bodyPr>
-          <a:lstStyle/>
-          <a:p>
-            <a:pPr algn="l"/>
-            <a:r>
-              <a:rPr sz="3600" b="1">
-                <a:solidFill>
-                  <a:srgbClr val="FFFFFF"/>
-                </a:solidFill>
-                <a:latin typeface="Calibri"/>
-              </a:rPr>
-              <a:t>Speak. The product acts. It talks back.</a:t>
-            </a:r>
-          </a:p>
-        </p:txBody>
-      </p:sp>
-      <p:sp>
-        <p:nvSpPr>
-          <p:cNvPr id="5" name="Rounded Rectangle 4"/>
+          <p:cNvPr id="6" name="Rounded Rectangle 5"/>
           <p:cNvSpPr/>
           <p:nvPr/>
         </p:nvSpPr>
         <p:spPr>
           <a:xfrm>
-            <a:off x="822960" y="1463040"/>
-            <a:ext cx="3200400" cy="2926080"/>
+            <a:off x="640080" y="1645920"/>
+            <a:ext cx="10972800" cy="914400"/>
           </a:xfrm>
           <a:prstGeom prst="roundRect">
-            <a:avLst/>
+            <a:avLst>
+              <a:gd name="adj" fmla="val 8000"/>
+            </a:avLst>
           </a:prstGeom>
           <a:solidFill>
-            <a:srgbClr val="0D1117"/>
+            <a:srgbClr val="111827"/>
           </a:solidFill>
           <a:ln>
-            <a:solidFill>
-              <a:srgbClr val="00F0FF"/>
-            </a:solidFill>
+            <a:noFill/>
           </a:ln>
         </p:spPr>
         <p:style>
@@ -5415,49 +5907,14 @@
       </p:sp>
       <p:sp>
         <p:nvSpPr>
-          <p:cNvPr id="6" name="TextBox 5"/>
-          <p:cNvSpPr txBox="1"/>
-          <p:nvPr/>
-        </p:nvSpPr>
-        <p:spPr>
-          <a:xfrm>
-            <a:off x="1051560" y="1691640"/>
-            <a:ext cx="2743200" cy="457200"/>
-          </a:xfrm>
-          <a:prstGeom prst="rect">
-            <a:avLst/>
-          </a:prstGeom>
-          <a:noFill/>
-        </p:spPr>
-        <p:txBody>
-          <a:bodyPr wrap="square">
-            <a:spAutoFit/>
-          </a:bodyPr>
-          <a:lstStyle/>
-          <a:p>
-            <a:pPr algn="l"/>
-            <a:r>
-              <a:rPr sz="2000" b="1">
-                <a:solidFill>
-                  <a:srgbClr val="00F0FF"/>
-                </a:solidFill>
-                <a:latin typeface="Calibri"/>
-              </a:rPr>
-              <a:t>1 · Listen</a:t>
-            </a:r>
-          </a:p>
-        </p:txBody>
-      </p:sp>
-      <p:sp>
-        <p:nvSpPr>
           <p:cNvPr id="7" name="TextBox 6"/>
           <p:cNvSpPr txBox="1"/>
           <p:nvPr/>
         </p:nvSpPr>
         <p:spPr>
           <a:xfrm>
-            <a:off x="1051560" y="2286000"/>
-            <a:ext cx="2743200" cy="1828800"/>
+            <a:off x="868680" y="1874520"/>
+            <a:ext cx="548640" cy="457200"/>
           </a:xfrm>
           <a:prstGeom prst="rect">
             <a:avLst/>
@@ -5465,53 +5922,112 @@
           <a:noFill/>
         </p:spPr>
         <p:txBody>
-          <a:bodyPr wrap="square">
-            <a:spAutoFit/>
-          </a:bodyPr>
+          <a:bodyPr wrap="square" anchor="t"/>
           <a:lstStyle/>
           <a:p>
             <a:pPr algn="l"/>
             <a:r>
-              <a:rPr sz="1600" b="0">
+              <a:rPr sz="2400" b="1">
+                <a:solidFill>
+                  <a:srgbClr val="00F0FF"/>
+                </a:solidFill>
+                <a:latin typeface="Calibri"/>
+                <a:ea typeface="Calibri"/>
+              </a:rPr>
+              <a:t>1</a:t>
+            </a:r>
+          </a:p>
+        </p:txBody>
+      </p:sp>
+      <p:sp>
+        <p:nvSpPr>
+          <p:cNvPr id="8" name="TextBox 7"/>
+          <p:cNvSpPr txBox="1"/>
+          <p:nvPr/>
+        </p:nvSpPr>
+        <p:spPr>
+          <a:xfrm>
+            <a:off x="1554480" y="1810512"/>
+            <a:ext cx="2011680" cy="457200"/>
+          </a:xfrm>
+          <a:prstGeom prst="rect">
+            <a:avLst/>
+          </a:prstGeom>
+          <a:noFill/>
+        </p:spPr>
+        <p:txBody>
+          <a:bodyPr wrap="square" anchor="t"/>
+          <a:lstStyle/>
+          <a:p>
+            <a:pPr algn="l"/>
+            <a:r>
+              <a:rPr sz="2000" b="1">
+                <a:solidFill>
+                  <a:srgbClr val="F5F7FA"/>
+                </a:solidFill>
+                <a:latin typeface="Calibri"/>
+                <a:ea typeface="Calibri"/>
+              </a:rPr>
+              <a:t>Talk</a:t>
+            </a:r>
+          </a:p>
+        </p:txBody>
+      </p:sp>
+      <p:sp>
+        <p:nvSpPr>
+          <p:cNvPr id="9" name="TextBox 8"/>
+          <p:cNvSpPr txBox="1"/>
+          <p:nvPr/>
+        </p:nvSpPr>
+        <p:spPr>
+          <a:xfrm>
+            <a:off x="3657600" y="1901952"/>
+            <a:ext cx="7680960" cy="457200"/>
+          </a:xfrm>
+          <a:prstGeom prst="rect">
+            <a:avLst/>
+          </a:prstGeom>
+          <a:noFill/>
+        </p:spPr>
+        <p:txBody>
+          <a:bodyPr wrap="square" anchor="t"/>
+          <a:lstStyle/>
+          <a:p>
+            <a:pPr algn="l"/>
+            <a:r>
+              <a:rPr sz="1500" b="0">
                 <a:solidFill>
                   <a:srgbClr val="9AA4B2"/>
                 </a:solidFill>
                 <a:latin typeface="Calibri"/>
-              </a:rPr>
-              <a:t>PCM16 24 kHz mic</a:t>
-            </a:r>
-            <a:br/>
-            <a:r>
-              <a:t>→ AssemblyAI Voice Agent</a:t>
-            </a:r>
-            <a:br/>
-            <a:r>
-              <a:t>single-use token WS</a:t>
-            </a:r>
-          </a:p>
-        </p:txBody>
-      </p:sp>
-      <p:sp>
-        <p:nvSpPr>
-          <p:cNvPr id="8" name="Rounded Rectangle 7"/>
+                <a:ea typeface="Calibri"/>
+              </a:rPr>
+              <a:t>PCM16 24 kHz mic → single-use token WSS to agents.assemblyai.com</a:t>
+            </a:r>
+          </a:p>
+        </p:txBody>
+      </p:sp>
+      <p:sp>
+        <p:nvSpPr>
+          <p:cNvPr id="10" name="Rounded Rectangle 9"/>
           <p:cNvSpPr/>
           <p:nvPr/>
         </p:nvSpPr>
         <p:spPr>
           <a:xfrm>
-            <a:off x="4297680" y="1463040"/>
-            <a:ext cx="3200400" cy="2926080"/>
+            <a:off x="640080" y="2697480"/>
+            <a:ext cx="10972800" cy="914400"/>
           </a:xfrm>
           <a:prstGeom prst="roundRect">
-            <a:avLst/>
+            <a:avLst>
+              <a:gd name="adj" fmla="val 8000"/>
+            </a:avLst>
           </a:prstGeom>
           <a:solidFill>
-            <a:srgbClr val="0D1117"/>
+            <a:srgbClr val="111827"/>
           </a:solidFill>
           <a:ln>
-            <a:solidFill>
-              <a:srgbClr val="5CE0D8"/>
-            </a:solidFill>
+            <a:noFill/>
           </a:ln>
         </p:spPr>
         <p:style>
@@ -5538,14 +6054,14 @@
       </p:sp>
       <p:sp>
         <p:nvSpPr>
-          <p:cNvPr id="9" name="TextBox 8"/>
+          <p:cNvPr id="11" name="TextBox 10"/>
           <p:cNvSpPr txBox="1"/>
           <p:nvPr/>
         </p:nvSpPr>
         <p:spPr>
           <a:xfrm>
-            <a:off x="4526280" y="1691640"/>
-            <a:ext cx="2743200" cy="457200"/>
+            <a:off x="868680" y="2926080"/>
+            <a:ext cx="548640" cy="457200"/>
           </a:xfrm>
           <a:prstGeom prst="rect">
             <a:avLst/>
@@ -5553,34 +6069,67 @@
           <a:noFill/>
         </p:spPr>
         <p:txBody>
-          <a:bodyPr wrap="square">
-            <a:spAutoFit/>
-          </a:bodyPr>
+          <a:bodyPr wrap="square" anchor="t"/>
           <a:lstStyle/>
           <a:p>
             <a:pPr algn="l"/>
             <a:r>
+              <a:rPr sz="2400" b="1">
+                <a:solidFill>
+                  <a:srgbClr val="00F0FF"/>
+                </a:solidFill>
+                <a:latin typeface="Calibri"/>
+                <a:ea typeface="Calibri"/>
+              </a:rPr>
+              <a:t>2</a:t>
+            </a:r>
+          </a:p>
+        </p:txBody>
+      </p:sp>
+      <p:sp>
+        <p:nvSpPr>
+          <p:cNvPr id="12" name="TextBox 11"/>
+          <p:cNvSpPr txBox="1"/>
+          <p:nvPr/>
+        </p:nvSpPr>
+        <p:spPr>
+          <a:xfrm>
+            <a:off x="1554480" y="2862072"/>
+            <a:ext cx="2011680" cy="457200"/>
+          </a:xfrm>
+          <a:prstGeom prst="rect">
+            <a:avLst/>
+          </a:prstGeom>
+          <a:noFill/>
+        </p:spPr>
+        <p:txBody>
+          <a:bodyPr wrap="square" anchor="t"/>
+          <a:lstStyle/>
+          <a:p>
+            <a:pPr algn="l"/>
+            <a:r>
               <a:rPr sz="2000" b="1">
                 <a:solidFill>
-                  <a:srgbClr val="5CE0D8"/>
-                </a:solidFill>
-                <a:latin typeface="Calibri"/>
-              </a:rPr>
-              <a:t>2 · Act</a:t>
-            </a:r>
-          </a:p>
-        </p:txBody>
-      </p:sp>
-      <p:sp>
-        <p:nvSpPr>
-          <p:cNvPr id="10" name="TextBox 9"/>
+                  <a:srgbClr val="F5F7FA"/>
+                </a:solidFill>
+                <a:latin typeface="Calibri"/>
+                <a:ea typeface="Calibri"/>
+              </a:rPr>
+              <a:t>Act</a:t>
+            </a:r>
+          </a:p>
+        </p:txBody>
+      </p:sp>
+      <p:sp>
+        <p:nvSpPr>
+          <p:cNvPr id="13" name="TextBox 12"/>
           <p:cNvSpPr txBox="1"/>
           <p:nvPr/>
         </p:nvSpPr>
         <p:spPr>
           <a:xfrm>
-            <a:off x="4526280" y="2286000"/>
-            <a:ext cx="2743200" cy="1828800"/>
+            <a:off x="3657600" y="2953512"/>
+            <a:ext cx="7680960" cy="457200"/>
           </a:xfrm>
           <a:prstGeom prst="rect">
             <a:avLst/>
@@ -5588,53 +6137,44 @@
           <a:noFill/>
         </p:spPr>
         <p:txBody>
-          <a:bodyPr wrap="square">
-            <a:spAutoFit/>
-          </a:bodyPr>
+          <a:bodyPr wrap="square" anchor="t"/>
           <a:lstStyle/>
           <a:p>
             <a:pPr algn="l"/>
             <a:r>
-              <a:rPr sz="1600" b="0">
+              <a:rPr sz="1500" b="0">
                 <a:solidFill>
                   <a:srgbClr val="9AA4B2"/>
                 </a:solidFill>
                 <a:latin typeface="Calibri"/>
-              </a:rPr>
-              <a:t>Agent calls dispatch_tool</a:t>
-            </a:r>
-            <a:br/>
-            <a:r>
-              <a:t>→ preferences, metrics,</a:t>
-            </a:r>
-            <a:br/>
-            <a:r>
-              <a:t>conversation, session</a:t>
-            </a:r>
-          </a:p>
-        </p:txBody>
-      </p:sp>
-      <p:sp>
-        <p:nvSpPr>
-          <p:cNvPr id="11" name="Rounded Rectangle 10"/>
+                <a:ea typeface="Calibri"/>
+              </a:rPr>
+              <a:t>Agent calls dispatch_tool → prefs, conversation, metrics, session</a:t>
+            </a:r>
+          </a:p>
+        </p:txBody>
+      </p:sp>
+      <p:sp>
+        <p:nvSpPr>
+          <p:cNvPr id="14" name="Rounded Rectangle 13"/>
           <p:cNvSpPr/>
           <p:nvPr/>
         </p:nvSpPr>
         <p:spPr>
           <a:xfrm>
-            <a:off x="7772400" y="1463040"/>
-            <a:ext cx="3200400" cy="2926080"/>
+            <a:off x="640080" y="3749039"/>
+            <a:ext cx="10972800" cy="914400"/>
           </a:xfrm>
           <a:prstGeom prst="roundRect">
-            <a:avLst/>
+            <a:avLst>
+              <a:gd name="adj" fmla="val 8000"/>
+            </a:avLst>
           </a:prstGeom>
           <a:solidFill>
-            <a:srgbClr val="0D1117"/>
+            <a:srgbClr val="111827"/>
           </a:solidFill>
           <a:ln>
-            <a:solidFill>
-              <a:srgbClr val="FFB627"/>
-            </a:solidFill>
+            <a:noFill/>
           </a:ln>
         </p:spPr>
         <p:style>
@@ -5661,14 +6201,14 @@
       </p:sp>
       <p:sp>
         <p:nvSpPr>
-          <p:cNvPr id="12" name="TextBox 11"/>
+          <p:cNvPr id="15" name="TextBox 14"/>
           <p:cNvSpPr txBox="1"/>
           <p:nvPr/>
         </p:nvSpPr>
         <p:spPr>
           <a:xfrm>
-            <a:off x="8001000" y="1691640"/>
-            <a:ext cx="2743200" cy="457200"/>
+            <a:off x="868680" y="3977639"/>
+            <a:ext cx="548640" cy="457200"/>
           </a:xfrm>
           <a:prstGeom prst="rect">
             <a:avLst/>
@@ -5676,34 +6216,67 @@
           <a:noFill/>
         </p:spPr>
         <p:txBody>
-          <a:bodyPr wrap="square">
-            <a:spAutoFit/>
-          </a:bodyPr>
+          <a:bodyPr wrap="square" anchor="t"/>
           <a:lstStyle/>
           <a:p>
             <a:pPr algn="l"/>
             <a:r>
+              <a:rPr sz="2400" b="1">
+                <a:solidFill>
+                  <a:srgbClr val="00F0FF"/>
+                </a:solidFill>
+                <a:latin typeface="Calibri"/>
+                <a:ea typeface="Calibri"/>
+              </a:rPr>
+              <a:t>3</a:t>
+            </a:r>
+          </a:p>
+        </p:txBody>
+      </p:sp>
+      <p:sp>
+        <p:nvSpPr>
+          <p:cNvPr id="16" name="TextBox 15"/>
+          <p:cNvSpPr txBox="1"/>
+          <p:nvPr/>
+        </p:nvSpPr>
+        <p:spPr>
+          <a:xfrm>
+            <a:off x="1554480" y="3913631"/>
+            <a:ext cx="2011680" cy="457200"/>
+          </a:xfrm>
+          <a:prstGeom prst="rect">
+            <a:avLst/>
+          </a:prstGeom>
+          <a:noFill/>
+        </p:spPr>
+        <p:txBody>
+          <a:bodyPr wrap="square" anchor="t"/>
+          <a:lstStyle/>
+          <a:p>
+            <a:pPr algn="l"/>
+            <a:r>
               <a:rPr sz="2000" b="1">
                 <a:solidFill>
-                  <a:srgbClr val="FFB627"/>
-                </a:solidFill>
-                <a:latin typeface="Calibri"/>
-              </a:rPr>
-              <a:t>3 · Confirm</a:t>
-            </a:r>
-          </a:p>
-        </p:txBody>
-      </p:sp>
-      <p:sp>
-        <p:nvSpPr>
-          <p:cNvPr id="13" name="TextBox 12"/>
+                  <a:srgbClr val="F5F7FA"/>
+                </a:solidFill>
+                <a:latin typeface="Calibri"/>
+                <a:ea typeface="Calibri"/>
+              </a:rPr>
+              <a:t>Hear</a:t>
+            </a:r>
+          </a:p>
+        </p:txBody>
+      </p:sp>
+      <p:sp>
+        <p:nvSpPr>
+          <p:cNvPr id="17" name="TextBox 16"/>
           <p:cNvSpPr txBox="1"/>
           <p:nvPr/>
         </p:nvSpPr>
         <p:spPr>
           <a:xfrm>
-            <a:off x="8001000" y="2286000"/>
-            <a:ext cx="2743200" cy="1828800"/>
+            <a:off x="3657600" y="4005071"/>
+            <a:ext cx="7680960" cy="457200"/>
           </a:xfrm>
           <a:prstGeom prst="rect">
             <a:avLst/>
@@ -5711,42 +6284,78 @@
           <a:noFill/>
         </p:spPr>
         <p:txBody>
-          <a:bodyPr wrap="square">
-            <a:spAutoFit/>
-          </a:bodyPr>
+          <a:bodyPr wrap="square" anchor="t"/>
           <a:lstStyle/>
           <a:p>
             <a:pPr algn="l"/>
             <a:r>
-              <a:rPr sz="1600" b="0">
+              <a:rPr sz="1500" b="0">
                 <a:solidFill>
                   <a:srgbClr val="9AA4B2"/>
                 </a:solidFill>
                 <a:latin typeface="Calibri"/>
-              </a:rPr>
-              <a:t>Short spoken reply</a:t>
-            </a:r>
-            <a:br/>
-            <a:r>
-              <a:t>+ live transcript</a:t>
-            </a:r>
-            <a:br/>
-            <a:r>
-              <a:t>+ screen-reader announce</a:t>
-            </a:r>
-          </a:p>
-        </p:txBody>
-      </p:sp>
-      <p:sp>
-        <p:nvSpPr>
-          <p:cNvPr id="14" name="TextBox 13"/>
+                <a:ea typeface="Calibri"/>
+              </a:rPr>
+              <a:t>Short spoken reply + live transcript + screen-reader announcements</a:t>
+            </a:r>
+          </a:p>
+        </p:txBody>
+      </p:sp>
+      <p:sp>
+        <p:nvSpPr>
+          <p:cNvPr id="18" name="Rounded Rectangle 17"/>
+          <p:cNvSpPr/>
+          <p:nvPr/>
+        </p:nvSpPr>
+        <p:spPr>
+          <a:xfrm>
+            <a:off x="640080" y="4800600"/>
+            <a:ext cx="10972800" cy="914400"/>
+          </a:xfrm>
+          <a:prstGeom prst="roundRect">
+            <a:avLst>
+              <a:gd name="adj" fmla="val 8000"/>
+            </a:avLst>
+          </a:prstGeom>
+          <a:solidFill>
+            <a:srgbClr val="111827"/>
+          </a:solidFill>
+          <a:ln>
+            <a:noFill/>
+          </a:ln>
+        </p:spPr>
+        <p:style>
+          <a:lnRef idx="1">
+            <a:schemeClr val="accent1"/>
+          </a:lnRef>
+          <a:fillRef idx="3">
+            <a:schemeClr val="accent1"/>
+          </a:fillRef>
+          <a:effectRef idx="2">
+            <a:schemeClr val="accent1"/>
+          </a:effectRef>
+          <a:fontRef idx="minor">
+            <a:schemeClr val="lt1"/>
+          </a:fontRef>
+        </p:style>
+        <p:txBody>
+          <a:bodyPr rtlCol="0" anchor="ctr"/>
+          <a:lstStyle/>
+          <a:p>
+            <a:pPr algn="ctr"/>
+          </a:p>
+        </p:txBody>
+      </p:sp>
+      <p:sp>
+        <p:nvSpPr>
+          <p:cNvPr id="19" name="TextBox 18"/>
           <p:cNvSpPr txBox="1"/>
           <p:nvPr/>
         </p:nvSpPr>
         <p:spPr>
           <a:xfrm>
-            <a:off x="822960" y="4754880"/>
-            <a:ext cx="10515600" cy="1097280"/>
+            <a:off x="868680" y="5029200"/>
+            <a:ext cx="548640" cy="457200"/>
           </a:xfrm>
           <a:prstGeom prst="rect">
             <a:avLst/>
@@ -5754,24 +6363,155 @@
           <a:noFill/>
         </p:spPr>
         <p:txBody>
-          <a:bodyPr wrap="square">
-            <a:spAutoFit/>
-          </a:bodyPr>
+          <a:bodyPr wrap="square" anchor="t"/>
           <a:lstStyle/>
           <a:p>
             <a:pPr algn="l"/>
             <a:r>
-              <a:rPr sz="1800" b="0">
-                <a:solidFill>
-                  <a:srgbClr val="FFFFFF"/>
-                </a:solidFill>
-                <a:latin typeface="Calibri"/>
-              </a:rPr>
-              <a:t>Offline ladder when AssemblyAI is down:  on-device Vosk  →  browser Web Speech  →  typed commands.</a:t>
-            </a:r>
-            <a:br/>
-            <a:r>
-              <a:t>The product never goes dark.</a:t>
+              <a:rPr sz="2400" b="1">
+                <a:solidFill>
+                  <a:srgbClr val="00F0FF"/>
+                </a:solidFill>
+                <a:latin typeface="Calibri"/>
+                <a:ea typeface="Calibri"/>
+              </a:rPr>
+              <a:t>4</a:t>
+            </a:r>
+          </a:p>
+        </p:txBody>
+      </p:sp>
+      <p:sp>
+        <p:nvSpPr>
+          <p:cNvPr id="20" name="TextBox 19"/>
+          <p:cNvSpPr txBox="1"/>
+          <p:nvPr/>
+        </p:nvSpPr>
+        <p:spPr>
+          <a:xfrm>
+            <a:off x="1554480" y="4965192"/>
+            <a:ext cx="2011680" cy="457200"/>
+          </a:xfrm>
+          <a:prstGeom prst="rect">
+            <a:avLst/>
+          </a:prstGeom>
+          <a:noFill/>
+        </p:spPr>
+        <p:txBody>
+          <a:bodyPr wrap="square" anchor="t"/>
+          <a:lstStyle/>
+          <a:p>
+            <a:pPr algn="l"/>
+            <a:r>
+              <a:rPr sz="2000" b="1">
+                <a:solidFill>
+                  <a:srgbClr val="F5F7FA"/>
+                </a:solidFill>
+                <a:latin typeface="Calibri"/>
+                <a:ea typeface="Calibri"/>
+              </a:rPr>
+              <a:t>Keep working</a:t>
+            </a:r>
+          </a:p>
+        </p:txBody>
+      </p:sp>
+      <p:sp>
+        <p:nvSpPr>
+          <p:cNvPr id="21" name="TextBox 20"/>
+          <p:cNvSpPr txBox="1"/>
+          <p:nvPr/>
+        </p:nvSpPr>
+        <p:spPr>
+          <a:xfrm>
+            <a:off x="3657600" y="5056632"/>
+            <a:ext cx="7680960" cy="457200"/>
+          </a:xfrm>
+          <a:prstGeom prst="rect">
+            <a:avLst/>
+          </a:prstGeom>
+          <a:noFill/>
+        </p:spPr>
+        <p:txBody>
+          <a:bodyPr wrap="square" anchor="t"/>
+          <a:lstStyle/>
+          <a:p>
+            <a:pPr algn="l"/>
+            <a:r>
+              <a:rPr sz="1500" b="0">
+                <a:solidFill>
+                  <a:srgbClr val="9AA4B2"/>
+                </a:solidFill>
+                <a:latin typeface="Calibri"/>
+                <a:ea typeface="Calibri"/>
+              </a:rPr>
+              <a:t>Fallback ladder: AssemblyAI → Vosk → Web Speech → typed input</a:t>
+            </a:r>
+          </a:p>
+        </p:txBody>
+      </p:sp>
+      <p:sp>
+        <p:nvSpPr>
+          <p:cNvPr id="22" name="TextBox 21"/>
+          <p:cNvSpPr txBox="1"/>
+          <p:nvPr/>
+        </p:nvSpPr>
+        <p:spPr>
+          <a:xfrm>
+            <a:off x="640080" y="6446520"/>
+            <a:ext cx="7315200" cy="274320"/>
+          </a:xfrm>
+          <a:prstGeom prst="rect">
+            <a:avLst/>
+          </a:prstGeom>
+          <a:noFill/>
+        </p:spPr>
+        <p:txBody>
+          <a:bodyPr wrap="square" anchor="t"/>
+          <a:lstStyle/>
+          <a:p>
+            <a:pPr algn="l"/>
+            <a:r>
+              <a:rPr sz="1100" b="0">
+                <a:solidFill>
+                  <a:srgbClr val="9AA4B2"/>
+                </a:solidFill>
+                <a:latin typeface="Calibri"/>
+                <a:ea typeface="Calibri"/>
+              </a:rPr>
+              <a:t>VoiceBridge AI  ·  AssemblyAI Voice Agent Hackathon 2026</a:t>
+            </a:r>
+          </a:p>
+        </p:txBody>
+      </p:sp>
+      <p:sp>
+        <p:nvSpPr>
+          <p:cNvPr id="23" name="TextBox 22"/>
+          <p:cNvSpPr txBox="1"/>
+          <p:nvPr/>
+        </p:nvSpPr>
+        <p:spPr>
+          <a:xfrm>
+            <a:off x="10515600" y="6446520"/>
+            <a:ext cx="1097280" cy="274320"/>
+          </a:xfrm>
+          <a:prstGeom prst="rect">
+            <a:avLst/>
+          </a:prstGeom>
+          <a:noFill/>
+        </p:spPr>
+        <p:txBody>
+          <a:bodyPr wrap="square" anchor="t"/>
+          <a:lstStyle/>
+          <a:p>
+            <a:pPr algn="r"/>
+            <a:r>
+              <a:rPr sz="1100" b="0">
+                <a:solidFill>
+                  <a:srgbClr val="9AA4B2"/>
+                </a:solidFill>
+                <a:latin typeface="Calibri"/>
+                <a:ea typeface="Calibri"/>
+              </a:rPr>
+              <a:t>3/10</a:t>
             </a:r>
           </a:p>
         </p:txBody>
@@ -5839,16 +6579,84 @@
       </p:sp>
       <p:sp>
         <p:nvSpPr>
-          <p:cNvPr id="3" name="Rounded Rectangle 2"/>
+          <p:cNvPr id="3" name="TextBox 2"/>
+          <p:cNvSpPr txBox="1"/>
+          <p:nvPr/>
+        </p:nvSpPr>
+        <p:spPr>
+          <a:xfrm>
+            <a:off x="640080" y="365760"/>
+            <a:ext cx="10972800" cy="320040"/>
+          </a:xfrm>
+          <a:prstGeom prst="rect">
+            <a:avLst/>
+          </a:prstGeom>
+          <a:noFill/>
+        </p:spPr>
+        <p:txBody>
+          <a:bodyPr wrap="square" anchor="t"/>
+          <a:lstStyle/>
+          <a:p>
+            <a:pPr algn="l"/>
+            <a:r>
+              <a:rPr sz="1200" b="1">
+                <a:solidFill>
+                  <a:srgbClr val="00F0FF"/>
+                </a:solidFill>
+                <a:latin typeface="Calibri"/>
+                <a:ea typeface="Calibri"/>
+              </a:rPr>
+              <a:t>LIVE DEMO</a:t>
+            </a:r>
+          </a:p>
+        </p:txBody>
+      </p:sp>
+      <p:sp>
+        <p:nvSpPr>
+          <p:cNvPr id="4" name="TextBox 3"/>
+          <p:cNvSpPr txBox="1"/>
+          <p:nvPr/>
+        </p:nvSpPr>
+        <p:spPr>
+          <a:xfrm>
+            <a:off x="640080" y="685800"/>
+            <a:ext cx="10972800" cy="640080"/>
+          </a:xfrm>
+          <a:prstGeom prst="rect">
+            <a:avLst/>
+          </a:prstGeom>
+          <a:noFill/>
+        </p:spPr>
+        <p:txBody>
+          <a:bodyPr wrap="square" anchor="t"/>
+          <a:lstStyle/>
+          <a:p>
+            <a:pPr algn="l"/>
+            <a:r>
+              <a:rPr sz="3200" b="1">
+                <a:solidFill>
+                  <a:srgbClr val="F5F7FA"/>
+                </a:solidFill>
+                <a:latin typeface="Calibri"/>
+                <a:ea typeface="Calibri"/>
+              </a:rPr>
+              <a:t>Golden path judges can click in under two minutes</a:t>
+            </a:r>
+          </a:p>
+        </p:txBody>
+      </p:sp>
+      <p:sp>
+        <p:nvSpPr>
+          <p:cNvPr id="5" name="Rectangle 4"/>
           <p:cNvSpPr/>
           <p:nvPr/>
         </p:nvSpPr>
         <p:spPr>
           <a:xfrm>
-            <a:off x="457200" y="320040"/>
-            <a:ext cx="109728" cy="640080"/>
-          </a:xfrm>
-          <a:prstGeom prst="roundRect">
+            <a:off x="640080" y="1325880"/>
+            <a:ext cx="1097280" cy="45720"/>
+          </a:xfrm>
+          <a:prstGeom prst="rect">
             <a:avLst/>
           </a:prstGeom>
           <a:solidFill>
@@ -5882,14 +6690,14 @@
       </p:sp>
       <p:sp>
         <p:nvSpPr>
-          <p:cNvPr id="4" name="TextBox 3"/>
+          <p:cNvPr id="6" name="TextBox 5"/>
           <p:cNvSpPr txBox="1"/>
           <p:nvPr/>
         </p:nvSpPr>
         <p:spPr>
           <a:xfrm>
-            <a:off x="822960" y="411480"/>
-            <a:ext cx="10972800" cy="640080"/>
+            <a:off x="640080" y="1645920"/>
+            <a:ext cx="6858000" cy="4114800"/>
           </a:xfrm>
           <a:prstGeom prst="rect">
             <a:avLst/>
@@ -5902,53 +6710,260 @@
           </a:bodyPr>
           <a:lstStyle/>
           <a:p>
+            <a:pPr algn="l">
+              <a:spcAft>
+                <a:spcPts val="1000"/>
+              </a:spcAft>
+            </a:pPr>
+            <a:r>
+              <a:rPr sz="1700" b="1">
+                <a:solidFill>
+                  <a:srgbClr val="00F0FF"/>
+                </a:solidFill>
+                <a:latin typeface="Calibri"/>
+                <a:ea typeface="Calibri"/>
+              </a:rPr>
+              <a:t>▸  </a:t>
+            </a:r>
+            <a:r>
+              <a:rPr sz="1700" b="0">
+                <a:solidFill>
+                  <a:srgbClr val="F5F7FA"/>
+                </a:solidFill>
+                <a:latin typeface="Calibri"/>
+                <a:ea typeface="Calibri"/>
+              </a:rPr>
+              <a:t>Sign in → tap Power (or Space) → engine chip: AssemblyAI · healthy</a:t>
+            </a:r>
+          </a:p>
+          <a:p>
+            <a:pPr algn="l">
+              <a:spcAft>
+                <a:spcPts val="1000"/>
+              </a:spcAft>
+            </a:pPr>
+            <a:r>
+              <a:rPr sz="1700" b="1">
+                <a:solidFill>
+                  <a:srgbClr val="00F0FF"/>
+                </a:solidFill>
+                <a:latin typeface="Calibri"/>
+                <a:ea typeface="Calibri"/>
+              </a:rPr>
+              <a:t>▸  </a:t>
+            </a:r>
+            <a:r>
+              <a:rPr sz="1700" b="0">
+                <a:solidFill>
+                  <a:srgbClr val="F5F7FA"/>
+                </a:solidFill>
+                <a:latin typeface="Calibri"/>
+                <a:ea typeface="Calibri"/>
+              </a:rPr>
+              <a:t>“Open metrics” — panel navigation with spoken confirmation</a:t>
+            </a:r>
+          </a:p>
+          <a:p>
+            <a:pPr algn="l">
+              <a:spcAft>
+                <a:spcPts val="1000"/>
+              </a:spcAft>
+            </a:pPr>
+            <a:r>
+              <a:rPr sz="1700" b="1">
+                <a:solidFill>
+                  <a:srgbClr val="00F0FF"/>
+                </a:solidFill>
+                <a:latin typeface="Calibri"/>
+                <a:ea typeface="Calibri"/>
+              </a:rPr>
+              <a:t>▸  </a:t>
+            </a:r>
+            <a:r>
+              <a:rPr sz="1700" b="0">
+                <a:solidFill>
+                  <a:srgbClr val="F5F7FA"/>
+                </a:solidFill>
+                <a:latin typeface="Calibri"/>
+                <a:ea typeface="Calibri"/>
+              </a:rPr>
+              <a:t>“Speak faster” — agent writes preferences via dispatch_tool</a:t>
+            </a:r>
+          </a:p>
+          <a:p>
+            <a:pPr algn="l">
+              <a:spcAft>
+                <a:spcPts val="1000"/>
+              </a:spcAft>
+            </a:pPr>
+            <a:r>
+              <a:rPr sz="1700" b="1">
+                <a:solidFill>
+                  <a:srgbClr val="00F0FF"/>
+                </a:solidFill>
+                <a:latin typeface="Calibri"/>
+                <a:ea typeface="Calibri"/>
+              </a:rPr>
+              <a:t>▸  </a:t>
+            </a:r>
+            <a:r>
+              <a:rPr sz="1700" b="0">
+                <a:solidFill>
+                  <a:srgbClr val="F5F7FA"/>
+                </a:solidFill>
+                <a:latin typeface="Calibri"/>
+                <a:ea typeface="Calibri"/>
+              </a:rPr>
+              <a:t>“Describe the page” — audible DOM/visual summary</a:t>
+            </a:r>
+          </a:p>
+          <a:p>
+            <a:pPr algn="l">
+              <a:spcAft>
+                <a:spcPts val="1000"/>
+              </a:spcAft>
+            </a:pPr>
+            <a:r>
+              <a:rPr sz="1700" b="1">
+                <a:solidFill>
+                  <a:srgbClr val="00F0FF"/>
+                </a:solidFill>
+                <a:latin typeface="Calibri"/>
+                <a:ea typeface="Calibri"/>
+              </a:rPr>
+              <a:t>▸  </a:t>
+            </a:r>
+            <a:r>
+              <a:rPr sz="1700" b="0">
+                <a:solidFill>
+                  <a:srgbClr val="F5F7FA"/>
+                </a:solidFill>
+                <a:latin typeface="Calibri"/>
+                <a:ea typeface="Calibri"/>
+              </a:rPr>
+              <a:t>“How did I do today?” — spoken session metrics from the DB</a:t>
+            </a:r>
+          </a:p>
+          <a:p>
+            <a:pPr algn="l">
+              <a:spcAft>
+                <a:spcPts val="1000"/>
+              </a:spcAft>
+            </a:pPr>
+            <a:r>
+              <a:rPr sz="1700" b="1">
+                <a:solidFill>
+                  <a:srgbClr val="00F0FF"/>
+                </a:solidFill>
+                <a:latin typeface="Calibri"/>
+                <a:ea typeface="Calibri"/>
+              </a:rPr>
+              <a:t>▸  </a:t>
+            </a:r>
+            <a:r>
+              <a:rPr sz="1700" b="0">
+                <a:solidFill>
+                  <a:srgbClr val="F5F7FA"/>
+                </a:solidFill>
+                <a:latin typeface="Calibri"/>
+                <a:ea typeface="Calibri"/>
+              </a:rPr>
+              <a:t>Kill the network → typed commands still work (fallback ladder)</a:t>
+            </a:r>
+          </a:p>
+        </p:txBody>
+      </p:sp>
+      <p:sp>
+        <p:nvSpPr>
+          <p:cNvPr id="7" name="Rounded Rectangle 6"/>
+          <p:cNvSpPr/>
+          <p:nvPr/>
+        </p:nvSpPr>
+        <p:spPr>
+          <a:xfrm>
+            <a:off x="7772400" y="1645920"/>
+            <a:ext cx="3840480" cy="4114800"/>
+          </a:xfrm>
+          <a:prstGeom prst="roundRect">
+            <a:avLst>
+              <a:gd name="adj" fmla="val 8000"/>
+            </a:avLst>
+          </a:prstGeom>
+          <a:solidFill>
+            <a:srgbClr val="111827"/>
+          </a:solidFill>
+          <a:ln w="12700">
+            <a:solidFill>
+              <a:srgbClr val="00F0FF"/>
+            </a:solidFill>
+          </a:ln>
+        </p:spPr>
+        <p:style>
+          <a:lnRef idx="1">
+            <a:schemeClr val="accent1"/>
+          </a:lnRef>
+          <a:fillRef idx="3">
+            <a:schemeClr val="accent1"/>
+          </a:fillRef>
+          <a:effectRef idx="2">
+            <a:schemeClr val="accent1"/>
+          </a:effectRef>
+          <a:fontRef idx="minor">
+            <a:schemeClr val="lt1"/>
+          </a:fontRef>
+        </p:style>
+        <p:txBody>
+          <a:bodyPr rtlCol="0" anchor="ctr"/>
+          <a:lstStyle/>
+          <a:p>
+            <a:pPr algn="ctr"/>
+          </a:p>
+        </p:txBody>
+      </p:sp>
+      <p:sp>
+        <p:nvSpPr>
+          <p:cNvPr id="8" name="TextBox 7"/>
+          <p:cNvSpPr txBox="1"/>
+          <p:nvPr/>
+        </p:nvSpPr>
+        <p:spPr>
+          <a:xfrm>
+            <a:off x="8001000" y="1920240"/>
+            <a:ext cx="3383280" cy="365760"/>
+          </a:xfrm>
+          <a:prstGeom prst="rect">
+            <a:avLst/>
+          </a:prstGeom>
+          <a:noFill/>
+        </p:spPr>
+        <p:txBody>
+          <a:bodyPr wrap="square" anchor="t"/>
+          <a:lstStyle/>
+          <a:p>
             <a:pPr algn="l"/>
             <a:r>
-              <a:rPr sz="3600" b="1">
-                <a:solidFill>
-                  <a:srgbClr val="FFFFFF"/>
-                </a:solidFill>
-                <a:latin typeface="Calibri"/>
-              </a:rPr>
-              <a:t>Live product — not a mock</a:t>
-            </a:r>
-          </a:p>
-        </p:txBody>
-      </p:sp>
-      <p:pic>
-        <p:nvPicPr>
-          <p:cNvPr id="5" name="Picture 4" descr="10-home-final.png"/>
-          <p:cNvPicPr>
-            <a:picLocks noChangeAspect="1"/>
-          </p:cNvPicPr>
-          <p:nvPr/>
-        </p:nvPicPr>
-        <p:blipFill>
-          <a:blip r:embed="rId2"/>
-          <a:stretch>
-            <a:fillRect/>
-          </a:stretch>
-        </p:blipFill>
-        <p:spPr>
-          <a:xfrm>
-            <a:off x="1371600" y="1280160"/>
-            <a:ext cx="9418320" cy="5886450"/>
-          </a:xfrm>
-          <a:prstGeom prst="rect">
-            <a:avLst/>
-          </a:prstGeom>
-        </p:spPr>
-      </p:pic>
-      <p:sp>
-        <p:nvSpPr>
-          <p:cNvPr id="6" name="TextBox 5"/>
+              <a:rPr sz="1200" b="1">
+                <a:solidFill>
+                  <a:srgbClr val="00F0FF"/>
+                </a:solidFill>
+                <a:latin typeface="Calibri"/>
+                <a:ea typeface="Calibri"/>
+              </a:rPr>
+              <a:t>DEMO CHECKLIST</a:t>
+            </a:r>
+          </a:p>
+        </p:txBody>
+      </p:sp>
+      <p:sp>
+        <p:nvSpPr>
+          <p:cNvPr id="9" name="TextBox 8"/>
           <p:cNvSpPr txBox="1"/>
           <p:nvPr/>
         </p:nvSpPr>
         <p:spPr>
           <a:xfrm>
-            <a:off x="822960" y="6126480"/>
-            <a:ext cx="10058400" cy="365760"/>
+            <a:off x="8001000" y="2377440"/>
+            <a:ext cx="3383280" cy="3200400"/>
           </a:xfrm>
           <a:prstGeom prst="rect">
             <a:avLst/>
@@ -5961,15 +6976,233 @@
           </a:bodyPr>
           <a:lstStyle/>
           <a:p>
+            <a:pPr algn="l">
+              <a:spcAft>
+                <a:spcPts val="1000"/>
+              </a:spcAft>
+            </a:pPr>
+            <a:r>
+              <a:rPr sz="1400" b="1">
+                <a:solidFill>
+                  <a:srgbClr val="51CF66"/>
+                </a:solidFill>
+                <a:latin typeface="Calibri"/>
+                <a:ea typeface="Calibri"/>
+              </a:rPr>
+              <a:t>▸  </a:t>
+            </a:r>
+            <a:r>
+              <a:rPr sz="1400" b="0">
+                <a:solidFill>
+                  <a:srgbClr val="F5F7FA"/>
+                </a:solidFill>
+                <a:latin typeface="Calibri"/>
+                <a:ea typeface="Calibri"/>
+              </a:rPr>
+              <a:t>Power connects</a:t>
+            </a:r>
+          </a:p>
+          <a:p>
+            <a:pPr algn="l">
+              <a:spcAft>
+                <a:spcPts val="1000"/>
+              </a:spcAft>
+            </a:pPr>
+            <a:r>
+              <a:rPr sz="1400" b="1">
+                <a:solidFill>
+                  <a:srgbClr val="51CF66"/>
+                </a:solidFill>
+                <a:latin typeface="Calibri"/>
+                <a:ea typeface="Calibri"/>
+              </a:rPr>
+              <a:t>▸  </a:t>
+            </a:r>
+            <a:r>
+              <a:rPr sz="1400" b="0">
+                <a:solidFill>
+                  <a:srgbClr val="F5F7FA"/>
+                </a:solidFill>
+                <a:latin typeface="Calibri"/>
+                <a:ea typeface="Calibri"/>
+              </a:rPr>
+              <a:t>Voice intent navigates</a:t>
+            </a:r>
+          </a:p>
+          <a:p>
+            <a:pPr algn="l">
+              <a:spcAft>
+                <a:spcPts val="1000"/>
+              </a:spcAft>
+            </a:pPr>
+            <a:r>
+              <a:rPr sz="1400" b="1">
+                <a:solidFill>
+                  <a:srgbClr val="51CF66"/>
+                </a:solidFill>
+                <a:latin typeface="Calibri"/>
+                <a:ea typeface="Calibri"/>
+              </a:rPr>
+              <a:t>▸  </a:t>
+            </a:r>
+            <a:r>
+              <a:rPr sz="1400" b="0">
+                <a:solidFill>
+                  <a:srgbClr val="F5F7FA"/>
+                </a:solidFill>
+                <a:latin typeface="Calibri"/>
+                <a:ea typeface="Calibri"/>
+              </a:rPr>
+              <a:t>Tool writes prefs</a:t>
+            </a:r>
+          </a:p>
+          <a:p>
+            <a:pPr algn="l">
+              <a:spcAft>
+                <a:spcPts val="1000"/>
+              </a:spcAft>
+            </a:pPr>
+            <a:r>
+              <a:rPr sz="1400" b="1">
+                <a:solidFill>
+                  <a:srgbClr val="51CF66"/>
+                </a:solidFill>
+                <a:latin typeface="Calibri"/>
+                <a:ea typeface="Calibri"/>
+              </a:rPr>
+              <a:t>▸  </a:t>
+            </a:r>
+            <a:r>
+              <a:rPr sz="1400" b="0">
+                <a:solidFill>
+                  <a:srgbClr val="F5F7FA"/>
+                </a:solidFill>
+                <a:latin typeface="Calibri"/>
+                <a:ea typeface="Calibri"/>
+              </a:rPr>
+              <a:t>Metrics speak</a:t>
+            </a:r>
+          </a:p>
+          <a:p>
+            <a:pPr algn="l">
+              <a:spcAft>
+                <a:spcPts val="1000"/>
+              </a:spcAft>
+            </a:pPr>
+            <a:r>
+              <a:rPr sz="1400" b="1">
+                <a:solidFill>
+                  <a:srgbClr val="51CF66"/>
+                </a:solidFill>
+                <a:latin typeface="Calibri"/>
+                <a:ea typeface="Calibri"/>
+              </a:rPr>
+              <a:t>▸  </a:t>
+            </a:r>
+            <a:r>
+              <a:rPr sz="1400" b="0">
+                <a:solidFill>
+                  <a:srgbClr val="F5F7FA"/>
+                </a:solidFill>
+                <a:latin typeface="Calibri"/>
+                <a:ea typeface="Calibri"/>
+              </a:rPr>
+              <a:t>Offline fallback</a:t>
+            </a:r>
+          </a:p>
+          <a:p>
+            <a:pPr algn="l">
+              <a:spcAft>
+                <a:spcPts val="1000"/>
+              </a:spcAft>
+            </a:pPr>
+            <a:r>
+              <a:rPr sz="1400" b="1">
+                <a:solidFill>
+                  <a:srgbClr val="51CF66"/>
+                </a:solidFill>
+                <a:latin typeface="Calibri"/>
+                <a:ea typeface="Calibri"/>
+              </a:rPr>
+              <a:t>▸  </a:t>
+            </a:r>
+            <a:r>
+              <a:rPr sz="1400" b="0">
+                <a:solidFill>
+                  <a:srgbClr val="F5F7FA"/>
+                </a:solidFill>
+                <a:latin typeface="Calibri"/>
+                <a:ea typeface="Calibri"/>
+              </a:rPr>
+              <a:t>Alt+1–7 shortcuts</a:t>
+            </a:r>
+          </a:p>
+        </p:txBody>
+      </p:sp>
+      <p:sp>
+        <p:nvSpPr>
+          <p:cNvPr id="10" name="TextBox 9"/>
+          <p:cNvSpPr txBox="1"/>
+          <p:nvPr/>
+        </p:nvSpPr>
+        <p:spPr>
+          <a:xfrm>
+            <a:off x="640080" y="6446520"/>
+            <a:ext cx="7315200" cy="274320"/>
+          </a:xfrm>
+          <a:prstGeom prst="rect">
+            <a:avLst/>
+          </a:prstGeom>
+          <a:noFill/>
+        </p:spPr>
+        <p:txBody>
+          <a:bodyPr wrap="square" anchor="t"/>
+          <a:lstStyle/>
+          <a:p>
             <a:pPr algn="l"/>
             <a:r>
-              <a:rPr sz="1400" b="0">
+              <a:rPr sz="1100" b="0">
                 <a:solidFill>
                   <a:srgbClr val="9AA4B2"/>
                 </a:solidFill>
                 <a:latin typeface="Calibri"/>
-              </a:rPr>
-              <a:t>Power button  ·  engine health chip  ·  typed fallback  ·  8 panels  ·  5 settings tabs</a:t>
+                <a:ea typeface="Calibri"/>
+              </a:rPr>
+              <a:t>VoiceBridge AI  ·  AssemblyAI Voice Agent Hackathon 2026</a:t>
+            </a:r>
+          </a:p>
+        </p:txBody>
+      </p:sp>
+      <p:sp>
+        <p:nvSpPr>
+          <p:cNvPr id="11" name="TextBox 10"/>
+          <p:cNvSpPr txBox="1"/>
+          <p:nvPr/>
+        </p:nvSpPr>
+        <p:spPr>
+          <a:xfrm>
+            <a:off x="10515600" y="6446520"/>
+            <a:ext cx="1097280" cy="274320"/>
+          </a:xfrm>
+          <a:prstGeom prst="rect">
+            <a:avLst/>
+          </a:prstGeom>
+          <a:noFill/>
+        </p:spPr>
+        <p:txBody>
+          <a:bodyPr wrap="square" anchor="t"/>
+          <a:lstStyle/>
+          <a:p>
+            <a:pPr algn="r"/>
+            <a:r>
+              <a:rPr sz="1100" b="0">
+                <a:solidFill>
+                  <a:srgbClr val="9AA4B2"/>
+                </a:solidFill>
+                <a:latin typeface="Calibri"/>
+                <a:ea typeface="Calibri"/>
+              </a:rPr>
+              <a:t>4/10</a:t>
             </a:r>
           </a:p>
         </p:txBody>
@@ -6037,16 +7270,84 @@
       </p:sp>
       <p:sp>
         <p:nvSpPr>
-          <p:cNvPr id="3" name="Rounded Rectangle 2"/>
+          <p:cNvPr id="3" name="TextBox 2"/>
+          <p:cNvSpPr txBox="1"/>
+          <p:nvPr/>
+        </p:nvSpPr>
+        <p:spPr>
+          <a:xfrm>
+            <a:off x="640080" y="365760"/>
+            <a:ext cx="10972800" cy="320040"/>
+          </a:xfrm>
+          <a:prstGeom prst="rect">
+            <a:avLst/>
+          </a:prstGeom>
+          <a:noFill/>
+        </p:spPr>
+        <p:txBody>
+          <a:bodyPr wrap="square" anchor="t"/>
+          <a:lstStyle/>
+          <a:p>
+            <a:pPr algn="l"/>
+            <a:r>
+              <a:rPr sz="1200" b="1">
+                <a:solidFill>
+                  <a:srgbClr val="00F0FF"/>
+                </a:solidFill>
+                <a:latin typeface="Calibri"/>
+                <a:ea typeface="Calibri"/>
+              </a:rPr>
+              <a:t>TECHNOLOGY</a:t>
+            </a:r>
+          </a:p>
+        </p:txBody>
+      </p:sp>
+      <p:sp>
+        <p:nvSpPr>
+          <p:cNvPr id="4" name="TextBox 3"/>
+          <p:cNvSpPr txBox="1"/>
+          <p:nvPr/>
+        </p:nvSpPr>
+        <p:spPr>
+          <a:xfrm>
+            <a:off x="640080" y="685800"/>
+            <a:ext cx="10972800" cy="640080"/>
+          </a:xfrm>
+          <a:prstGeom prst="rect">
+            <a:avLst/>
+          </a:prstGeom>
+          <a:noFill/>
+        </p:spPr>
+        <p:txBody>
+          <a:bodyPr wrap="square" anchor="t"/>
+          <a:lstStyle/>
+          <a:p>
+            <a:pPr algn="l"/>
+            <a:r>
+              <a:rPr sz="3200" b="1">
+                <a:solidFill>
+                  <a:srgbClr val="F5F7FA"/>
+                </a:solidFill>
+                <a:latin typeface="Calibri"/>
+                <a:ea typeface="Calibri"/>
+              </a:rPr>
+              <a:t>Why AssemblyAI Voice Agent — not a generic STT wrapper</a:t>
+            </a:r>
+          </a:p>
+        </p:txBody>
+      </p:sp>
+      <p:sp>
+        <p:nvSpPr>
+          <p:cNvPr id="5" name="Rectangle 4"/>
           <p:cNvSpPr/>
           <p:nvPr/>
         </p:nvSpPr>
         <p:spPr>
           <a:xfrm>
-            <a:off x="457200" y="320040"/>
-            <a:ext cx="109728" cy="640080"/>
-          </a:xfrm>
-          <a:prstGeom prst="roundRect">
+            <a:off x="640080" y="1325880"/>
+            <a:ext cx="1097280" cy="45720"/>
+          </a:xfrm>
+          <a:prstGeom prst="rect">
             <a:avLst/>
           </a:prstGeom>
           <a:solidFill>
@@ -6080,55 +7381,22 @@
       </p:sp>
       <p:sp>
         <p:nvSpPr>
-          <p:cNvPr id="4" name="TextBox 3"/>
-          <p:cNvSpPr txBox="1"/>
-          <p:nvPr/>
-        </p:nvSpPr>
-        <p:spPr>
-          <a:xfrm>
-            <a:off x="822960" y="411480"/>
+          <p:cNvPr id="6" name="Rounded Rectangle 5"/>
+          <p:cNvSpPr/>
+          <p:nvPr/>
+        </p:nvSpPr>
+        <p:spPr>
+          <a:xfrm>
+            <a:off x="640080" y="1600200"/>
             <a:ext cx="10972800" cy="640080"/>
           </a:xfrm>
-          <a:prstGeom prst="rect">
-            <a:avLst/>
-          </a:prstGeom>
-          <a:noFill/>
-        </p:spPr>
-        <p:txBody>
-          <a:bodyPr wrap="square">
-            <a:spAutoFit/>
-          </a:bodyPr>
-          <a:lstStyle/>
-          <a:p>
-            <a:pPr algn="l"/>
-            <a:r>
-              <a:rPr sz="3600" b="1">
-                <a:solidFill>
-                  <a:srgbClr val="FFFFFF"/>
-                </a:solidFill>
-                <a:latin typeface="Calibri"/>
-              </a:rPr>
-              <a:t>Why AssemblyAI Voice Agent API</a:t>
-            </a:r>
-          </a:p>
-        </p:txBody>
-      </p:sp>
-      <p:sp>
-        <p:nvSpPr>
-          <p:cNvPr id="5" name="Rounded Rectangle 4"/>
-          <p:cNvSpPr/>
-          <p:nvPr/>
-        </p:nvSpPr>
-        <p:spPr>
-          <a:xfrm>
-            <a:off x="822960" y="1371600"/>
-            <a:ext cx="2194560" cy="347472"/>
-          </a:xfrm>
           <a:prstGeom prst="roundRect">
-            <a:avLst/>
+            <a:avLst>
+              <a:gd name="adj" fmla="val 8000"/>
+            </a:avLst>
           </a:prstGeom>
           <a:solidFill>
-            <a:srgbClr val="0D1117"/>
+            <a:srgbClr val="111827"/>
           </a:solidFill>
           <a:ln>
             <a:noFill/>
@@ -6149,32 +7417,57 @@
           </a:fontRef>
         </p:style>
         <p:txBody>
-          <a:bodyPr rtlCol="0" anchor="ctr" wrap="none"/>
+          <a:bodyPr rtlCol="0" anchor="ctr"/>
           <a:lstStyle/>
           <a:p>
             <a:pPr algn="ctr"/>
-            <a:r>
-              <a:rPr sz="1200" b="1">
+          </a:p>
+        </p:txBody>
+      </p:sp>
+      <p:sp>
+        <p:nvSpPr>
+          <p:cNvPr id="7" name="TextBox 6"/>
+          <p:cNvSpPr txBox="1"/>
+          <p:nvPr/>
+        </p:nvSpPr>
+        <p:spPr>
+          <a:xfrm>
+            <a:off x="868680" y="1764792"/>
+            <a:ext cx="2926080" cy="365760"/>
+          </a:xfrm>
+          <a:prstGeom prst="rect">
+            <a:avLst/>
+          </a:prstGeom>
+          <a:noFill/>
+        </p:spPr>
+        <p:txBody>
+          <a:bodyPr wrap="square" anchor="t"/>
+          <a:lstStyle/>
+          <a:p>
+            <a:pPr algn="l"/>
+            <a:r>
+              <a:rPr sz="1600" b="1">
                 <a:solidFill>
                   <a:srgbClr val="00F0FF"/>
                 </a:solidFill>
                 <a:latin typeface="Calibri"/>
-              </a:rPr>
-              <a:t>Full-duplex WS</a:t>
-            </a:r>
-          </a:p>
-        </p:txBody>
-      </p:sp>
-      <p:sp>
-        <p:nvSpPr>
-          <p:cNvPr id="6" name="TextBox 5"/>
+                <a:ea typeface="Calibri"/>
+              </a:rPr>
+              <a:t>Voice Agent WS</a:t>
+            </a:r>
+          </a:p>
+        </p:txBody>
+      </p:sp>
+      <p:sp>
+        <p:nvSpPr>
+          <p:cNvPr id="8" name="TextBox 7"/>
           <p:cNvSpPr txBox="1"/>
           <p:nvPr/>
         </p:nvSpPr>
         <p:spPr>
           <a:xfrm>
-            <a:off x="3200400" y="1325880"/>
-            <a:ext cx="8229600" cy="457200"/>
+            <a:off x="3931920" y="1764792"/>
+            <a:ext cx="7315200" cy="365760"/>
           </a:xfrm>
           <a:prstGeom prst="rect">
             <a:avLst/>
@@ -6182,40 +7475,41 @@
           <a:noFill/>
         </p:spPr>
         <p:txBody>
-          <a:bodyPr wrap="square">
-            <a:spAutoFit/>
-          </a:bodyPr>
+          <a:bodyPr wrap="square" anchor="t"/>
           <a:lstStyle/>
           <a:p>
             <a:pPr algn="l"/>
             <a:r>
-              <a:rPr sz="1600" b="0">
-                <a:solidFill>
-                  <a:srgbClr val="FFFFFF"/>
-                </a:solidFill>
-                <a:latin typeface="Calibri"/>
-              </a:rPr>
-              <a:t>Listen + speak in one socket — interruption built in</a:t>
-            </a:r>
-          </a:p>
-        </p:txBody>
-      </p:sp>
-      <p:sp>
-        <p:nvSpPr>
-          <p:cNvPr id="7" name="Rounded Rectangle 6"/>
+              <a:rPr sz="1500" b="0">
+                <a:solidFill>
+                  <a:srgbClr val="9AA4B2"/>
+                </a:solidFill>
+                <a:latin typeface="Calibri"/>
+                <a:ea typeface="Calibri"/>
+              </a:rPr>
+              <a:t>Full-duplex listen + speak on one socket</a:t>
+            </a:r>
+          </a:p>
+        </p:txBody>
+      </p:sp>
+      <p:sp>
+        <p:nvSpPr>
+          <p:cNvPr id="9" name="Rounded Rectangle 8"/>
           <p:cNvSpPr/>
           <p:nvPr/>
         </p:nvSpPr>
         <p:spPr>
           <a:xfrm>
-            <a:off x="822960" y="2148840"/>
-            <a:ext cx="2194560" cy="347472"/>
+            <a:off x="640080" y="2331720"/>
+            <a:ext cx="10972800" cy="640080"/>
           </a:xfrm>
           <a:prstGeom prst="roundRect">
-            <a:avLst/>
+            <a:avLst>
+              <a:gd name="adj" fmla="val 8000"/>
+            </a:avLst>
           </a:prstGeom>
           <a:solidFill>
-            <a:srgbClr val="0D1117"/>
+            <a:srgbClr val="111827"/>
           </a:solidFill>
           <a:ln>
             <a:noFill/>
@@ -6236,16 +7530,41 @@
           </a:fontRef>
         </p:style>
         <p:txBody>
-          <a:bodyPr rtlCol="0" anchor="ctr" wrap="none"/>
+          <a:bodyPr rtlCol="0" anchor="ctr"/>
           <a:lstStyle/>
           <a:p>
             <a:pPr algn="ctr"/>
-            <a:r>
-              <a:rPr sz="1200" b="1">
+          </a:p>
+        </p:txBody>
+      </p:sp>
+      <p:sp>
+        <p:nvSpPr>
+          <p:cNvPr id="10" name="TextBox 9"/>
+          <p:cNvSpPr txBox="1"/>
+          <p:nvPr/>
+        </p:nvSpPr>
+        <p:spPr>
+          <a:xfrm>
+            <a:off x="868680" y="2496312"/>
+            <a:ext cx="2926080" cy="365760"/>
+          </a:xfrm>
+          <a:prstGeom prst="rect">
+            <a:avLst/>
+          </a:prstGeom>
+          <a:noFill/>
+        </p:spPr>
+        <p:txBody>
+          <a:bodyPr wrap="square" anchor="t"/>
+          <a:lstStyle/>
+          <a:p>
+            <a:pPr algn="l"/>
+            <a:r>
+              <a:rPr sz="1600" b="1">
                 <a:solidFill>
                   <a:srgbClr val="00F0FF"/>
                 </a:solidFill>
                 <a:latin typeface="Calibri"/>
+                <a:ea typeface="Calibri"/>
               </a:rPr>
               <a:t>Stored agent_id</a:t>
             </a:r>
@@ -6254,14 +7573,14 @@
       </p:sp>
       <p:sp>
         <p:nvSpPr>
-          <p:cNvPr id="8" name="TextBox 7"/>
+          <p:cNvPr id="11" name="TextBox 10"/>
           <p:cNvSpPr txBox="1"/>
           <p:nvPr/>
         </p:nvSpPr>
         <p:spPr>
           <a:xfrm>
-            <a:off x="3200400" y="2103120"/>
-            <a:ext cx="8229600" cy="457200"/>
+            <a:off x="3931920" y="2496312"/>
+            <a:ext cx="7315200" cy="365760"/>
           </a:xfrm>
           <a:prstGeom prst="rect">
             <a:avLst/>
@@ -6269,40 +7588,41 @@
           <a:noFill/>
         </p:spPr>
         <p:txBody>
-          <a:bodyPr wrap="square">
-            <a:spAutoFit/>
-          </a:bodyPr>
+          <a:bodyPr wrap="square" anchor="t"/>
           <a:lstStyle/>
           <a:p>
             <a:pPr algn="l"/>
             <a:r>
-              <a:rPr sz="1600" b="0">
-                <a:solidFill>
-                  <a:srgbClr val="FFFFFF"/>
-                </a:solidFill>
-                <a:latin typeface="Calibri"/>
-              </a:rPr>
-              <a:t>Prompt, voice, keyterms, tools configured once via POST /v1/agents</a:t>
-            </a:r>
-          </a:p>
-        </p:txBody>
-      </p:sp>
-      <p:sp>
-        <p:nvSpPr>
-          <p:cNvPr id="9" name="Rounded Rectangle 8"/>
+              <a:rPr sz="1500" b="0">
+                <a:solidFill>
+                  <a:srgbClr val="9AA4B2"/>
+                </a:solidFill>
+                <a:latin typeface="Calibri"/>
+                <a:ea typeface="Calibri"/>
+              </a:rPr>
+              <a:t>Prompt, voice, keyterms, tools configured once</a:t>
+            </a:r>
+          </a:p>
+        </p:txBody>
+      </p:sp>
+      <p:sp>
+        <p:nvSpPr>
+          <p:cNvPr id="12" name="Rounded Rectangle 11"/>
           <p:cNvSpPr/>
           <p:nvPr/>
         </p:nvSpPr>
         <p:spPr>
           <a:xfrm>
-            <a:off x="822960" y="2926080"/>
-            <a:ext cx="2194560" cy="347472"/>
+            <a:off x="640080" y="3063240"/>
+            <a:ext cx="10972800" cy="640080"/>
           </a:xfrm>
           <a:prstGeom prst="roundRect">
-            <a:avLst/>
+            <a:avLst>
+              <a:gd name="adj" fmla="val 8000"/>
+            </a:avLst>
           </a:prstGeom>
           <a:solidFill>
-            <a:srgbClr val="0D1117"/>
+            <a:srgbClr val="111827"/>
           </a:solidFill>
           <a:ln>
             <a:noFill/>
@@ -6323,16 +7643,41 @@
           </a:fontRef>
         </p:style>
         <p:txBody>
-          <a:bodyPr rtlCol="0" anchor="ctr" wrap="none"/>
+          <a:bodyPr rtlCol="0" anchor="ctr"/>
           <a:lstStyle/>
           <a:p>
             <a:pPr algn="ctr"/>
-            <a:r>
-              <a:rPr sz="1200" b="1">
+          </a:p>
+        </p:txBody>
+      </p:sp>
+      <p:sp>
+        <p:nvSpPr>
+          <p:cNvPr id="13" name="TextBox 12"/>
+          <p:cNvSpPr txBox="1"/>
+          <p:nvPr/>
+        </p:nvSpPr>
+        <p:spPr>
+          <a:xfrm>
+            <a:off x="868680" y="3227832"/>
+            <a:ext cx="2926080" cy="365760"/>
+          </a:xfrm>
+          <a:prstGeom prst="rect">
+            <a:avLst/>
+          </a:prstGeom>
+          <a:noFill/>
+        </p:spPr>
+        <p:txBody>
+          <a:bodyPr wrap="square" anchor="t"/>
+          <a:lstStyle/>
+          <a:p>
+            <a:pPr algn="l"/>
+            <a:r>
+              <a:rPr sz="1600" b="1">
                 <a:solidFill>
                   <a:srgbClr val="00F0FF"/>
                 </a:solidFill>
                 <a:latin typeface="Calibri"/>
+                <a:ea typeface="Calibri"/>
               </a:rPr>
               <a:t>Single-use tokens</a:t>
             </a:r>
@@ -6341,14 +7686,14 @@
       </p:sp>
       <p:sp>
         <p:nvSpPr>
-          <p:cNvPr id="10" name="TextBox 9"/>
+          <p:cNvPr id="14" name="TextBox 13"/>
           <p:cNvSpPr txBox="1"/>
           <p:nvPr/>
         </p:nvSpPr>
         <p:spPr>
           <a:xfrm>
-            <a:off x="3200400" y="2880360"/>
-            <a:ext cx="8229600" cy="457200"/>
+            <a:off x="3931920" y="3227832"/>
+            <a:ext cx="7315200" cy="365760"/>
           </a:xfrm>
           <a:prstGeom prst="rect">
             <a:avLst/>
@@ -6356,40 +7701,41 @@
           <a:noFill/>
         </p:spPr>
         <p:txBody>
-          <a:bodyPr wrap="square">
-            <a:spAutoFit/>
-          </a:bodyPr>
+          <a:bodyPr wrap="square" anchor="t"/>
           <a:lstStyle/>
           <a:p>
             <a:pPr algn="l"/>
             <a:r>
-              <a:rPr sz="1600" b="0">
-                <a:solidFill>
-                  <a:srgbClr val="FFFFFF"/>
-                </a:solidFill>
-                <a:latin typeface="Calibri"/>
-              </a:rPr>
-              <a:t>API key never leaves the server; browser only gets a short-lived token</a:t>
-            </a:r>
-          </a:p>
-        </p:txBody>
-      </p:sp>
-      <p:sp>
-        <p:nvSpPr>
-          <p:cNvPr id="11" name="Rounded Rectangle 10"/>
+              <a:rPr sz="1500" b="0">
+                <a:solidFill>
+                  <a:srgbClr val="9AA4B2"/>
+                </a:solidFill>
+                <a:latin typeface="Calibri"/>
+                <a:ea typeface="Calibri"/>
+              </a:rPr>
+              <a:t>API key never leaves the server</a:t>
+            </a:r>
+          </a:p>
+        </p:txBody>
+      </p:sp>
+      <p:sp>
+        <p:nvSpPr>
+          <p:cNvPr id="15" name="Rounded Rectangle 14"/>
           <p:cNvSpPr/>
           <p:nvPr/>
         </p:nvSpPr>
         <p:spPr>
           <a:xfrm>
-            <a:off x="822960" y="3703320"/>
-            <a:ext cx="2194560" cy="347472"/>
+            <a:off x="640080" y="3794760"/>
+            <a:ext cx="10972800" cy="640080"/>
           </a:xfrm>
           <a:prstGeom prst="roundRect">
-            <a:avLst/>
+            <a:avLst>
+              <a:gd name="adj" fmla="val 8000"/>
+            </a:avLst>
           </a:prstGeom>
           <a:solidFill>
-            <a:srgbClr val="0D1117"/>
+            <a:srgbClr val="111827"/>
           </a:solidFill>
           <a:ln>
             <a:noFill/>
@@ -6410,16 +7756,41 @@
           </a:fontRef>
         </p:style>
         <p:txBody>
-          <a:bodyPr rtlCol="0" anchor="ctr" wrap="none"/>
+          <a:bodyPr rtlCol="0" anchor="ctr"/>
           <a:lstStyle/>
           <a:p>
             <a:pPr algn="ctr"/>
-            <a:r>
-              <a:rPr sz="1200" b="1">
+          </a:p>
+        </p:txBody>
+      </p:sp>
+      <p:sp>
+        <p:nvSpPr>
+          <p:cNvPr id="16" name="TextBox 15"/>
+          <p:cNvSpPr txBox="1"/>
+          <p:nvPr/>
+        </p:nvSpPr>
+        <p:spPr>
+          <a:xfrm>
+            <a:off x="868680" y="3959352"/>
+            <a:ext cx="2926080" cy="365760"/>
+          </a:xfrm>
+          <a:prstGeom prst="rect">
+            <a:avLst/>
+          </a:prstGeom>
+          <a:noFill/>
+        </p:spPr>
+        <p:txBody>
+          <a:bodyPr wrap="square" anchor="t"/>
+          <a:lstStyle/>
+          <a:p>
+            <a:pPr algn="l"/>
+            <a:r>
+              <a:rPr sz="1600" b="1">
                 <a:solidFill>
                   <a:srgbClr val="00F0FF"/>
                 </a:solidFill>
                 <a:latin typeface="Calibri"/>
+                <a:ea typeface="Calibri"/>
               </a:rPr>
               <a:t>Function tools</a:t>
             </a:r>
@@ -6428,14 +7799,14 @@
       </p:sp>
       <p:sp>
         <p:nvSpPr>
-          <p:cNvPr id="12" name="TextBox 11"/>
+          <p:cNvPr id="17" name="TextBox 16"/>
           <p:cNvSpPr txBox="1"/>
           <p:nvPr/>
         </p:nvSpPr>
         <p:spPr>
           <a:xfrm>
-            <a:off x="3200400" y="3657600"/>
-            <a:ext cx="8229600" cy="457200"/>
+            <a:off x="3931920" y="3959352"/>
+            <a:ext cx="7315200" cy="365760"/>
           </a:xfrm>
           <a:prstGeom prst="rect">
             <a:avLst/>
@@ -6443,40 +7814,41 @@
           <a:noFill/>
         </p:spPr>
         <p:txBody>
-          <a:bodyPr wrap="square">
-            <a:spAutoFit/>
-          </a:bodyPr>
+          <a:bodyPr wrap="square" anchor="t"/>
           <a:lstStyle/>
           <a:p>
             <a:pPr algn="l"/>
             <a:r>
-              <a:rPr sz="1600" b="0">
-                <a:solidFill>
-                  <a:srgbClr val="FFFFFF"/>
-                </a:solidFill>
-                <a:latin typeface="Calibri"/>
-              </a:rPr>
-              <a:t>dispatch_tool → tool.call / tool.result writes real product state</a:t>
-            </a:r>
-          </a:p>
-        </p:txBody>
-      </p:sp>
-      <p:sp>
-        <p:nvSpPr>
-          <p:cNvPr id="13" name="Rounded Rectangle 12"/>
+              <a:rPr sz="1500" b="0">
+                <a:solidFill>
+                  <a:srgbClr val="9AA4B2"/>
+                </a:solidFill>
+                <a:latin typeface="Calibri"/>
+                <a:ea typeface="Calibri"/>
+              </a:rPr>
+              <a:t>dispatch_tool → tool.call / tool.result loop</a:t>
+            </a:r>
+          </a:p>
+        </p:txBody>
+      </p:sp>
+      <p:sp>
+        <p:nvSpPr>
+          <p:cNvPr id="18" name="Rounded Rectangle 17"/>
           <p:cNvSpPr/>
           <p:nvPr/>
         </p:nvSpPr>
         <p:spPr>
           <a:xfrm>
-            <a:off x="822960" y="4480559"/>
-            <a:ext cx="2194560" cy="347472"/>
+            <a:off x="640080" y="4526280"/>
+            <a:ext cx="10972800" cy="640080"/>
           </a:xfrm>
           <a:prstGeom prst="roundRect">
-            <a:avLst/>
+            <a:avLst>
+              <a:gd name="adj" fmla="val 8000"/>
+            </a:avLst>
           </a:prstGeom>
           <a:solidFill>
-            <a:srgbClr val="0D1117"/>
+            <a:srgbClr val="111827"/>
           </a:solidFill>
           <a:ln>
             <a:noFill/>
@@ -6497,16 +7869,154 @@
           </a:fontRef>
         </p:style>
         <p:txBody>
-          <a:bodyPr rtlCol="0" anchor="ctr" wrap="none"/>
+          <a:bodyPr rtlCol="0" anchor="ctr"/>
           <a:lstStyle/>
           <a:p>
             <a:pPr algn="ctr"/>
-            <a:r>
-              <a:rPr sz="1200" b="1">
+          </a:p>
+        </p:txBody>
+      </p:sp>
+      <p:sp>
+        <p:nvSpPr>
+          <p:cNvPr id="19" name="TextBox 18"/>
+          <p:cNvSpPr txBox="1"/>
+          <p:nvPr/>
+        </p:nvSpPr>
+        <p:spPr>
+          <a:xfrm>
+            <a:off x="868680" y="4690872"/>
+            <a:ext cx="2926080" cy="365760"/>
+          </a:xfrm>
+          <a:prstGeom prst="rect">
+            <a:avLst/>
+          </a:prstGeom>
+          <a:noFill/>
+        </p:spPr>
+        <p:txBody>
+          <a:bodyPr wrap="square" anchor="t"/>
+          <a:lstStyle/>
+          <a:p>
+            <a:pPr algn="l"/>
+            <a:r>
+              <a:rPr sz="1600" b="1">
                 <a:solidFill>
                   <a:srgbClr val="00F0FF"/>
                 </a:solidFill>
                 <a:latin typeface="Calibri"/>
+                <a:ea typeface="Calibri"/>
+              </a:rPr>
+              <a:t>Interruption / VAD</a:t>
+            </a:r>
+          </a:p>
+        </p:txBody>
+      </p:sp>
+      <p:sp>
+        <p:nvSpPr>
+          <p:cNvPr id="20" name="TextBox 19"/>
+          <p:cNvSpPr txBox="1"/>
+          <p:nvPr/>
+        </p:nvSpPr>
+        <p:spPr>
+          <a:xfrm>
+            <a:off x="3931920" y="4690872"/>
+            <a:ext cx="7315200" cy="365760"/>
+          </a:xfrm>
+          <a:prstGeom prst="rect">
+            <a:avLst/>
+          </a:prstGeom>
+          <a:noFill/>
+        </p:spPr>
+        <p:txBody>
+          <a:bodyPr wrap="square" anchor="t"/>
+          <a:lstStyle/>
+          <a:p>
+            <a:pPr algn="l"/>
+            <a:r>
+              <a:rPr sz="1500" b="0">
+                <a:solidFill>
+                  <a:srgbClr val="9AA4B2"/>
+                </a:solidFill>
+                <a:latin typeface="Calibri"/>
+                <a:ea typeface="Calibri"/>
+              </a:rPr>
+              <a:t>Barge-in flushes local playback cleanly</a:t>
+            </a:r>
+          </a:p>
+        </p:txBody>
+      </p:sp>
+      <p:sp>
+        <p:nvSpPr>
+          <p:cNvPr id="21" name="Rounded Rectangle 20"/>
+          <p:cNvSpPr/>
+          <p:nvPr/>
+        </p:nvSpPr>
+        <p:spPr>
+          <a:xfrm>
+            <a:off x="640080" y="5257800"/>
+            <a:ext cx="10972800" cy="640080"/>
+          </a:xfrm>
+          <a:prstGeom prst="roundRect">
+            <a:avLst>
+              <a:gd name="adj" fmla="val 8000"/>
+            </a:avLst>
+          </a:prstGeom>
+          <a:solidFill>
+            <a:srgbClr val="111827"/>
+          </a:solidFill>
+          <a:ln>
+            <a:noFill/>
+          </a:ln>
+        </p:spPr>
+        <p:style>
+          <a:lnRef idx="1">
+            <a:schemeClr val="accent1"/>
+          </a:lnRef>
+          <a:fillRef idx="3">
+            <a:schemeClr val="accent1"/>
+          </a:fillRef>
+          <a:effectRef idx="2">
+            <a:schemeClr val="accent1"/>
+          </a:effectRef>
+          <a:fontRef idx="minor">
+            <a:schemeClr val="lt1"/>
+          </a:fontRef>
+        </p:style>
+        <p:txBody>
+          <a:bodyPr rtlCol="0" anchor="ctr"/>
+          <a:lstStyle/>
+          <a:p>
+            <a:pPr algn="ctr"/>
+          </a:p>
+        </p:txBody>
+      </p:sp>
+      <p:sp>
+        <p:nvSpPr>
+          <p:cNvPr id="22" name="TextBox 21"/>
+          <p:cNvSpPr txBox="1"/>
+          <p:nvPr/>
+        </p:nvSpPr>
+        <p:spPr>
+          <a:xfrm>
+            <a:off x="868680" y="5422392"/>
+            <a:ext cx="2926080" cy="365760"/>
+          </a:xfrm>
+          <a:prstGeom prst="rect">
+            <a:avLst/>
+          </a:prstGeom>
+          <a:noFill/>
+        </p:spPr>
+        <p:txBody>
+          <a:bodyPr wrap="square" anchor="t"/>
+          <a:lstStyle/>
+          <a:p>
+            <a:pPr algn="l"/>
+            <a:r>
+              <a:rPr sz="1600" b="1">
+                <a:solidFill>
+                  <a:srgbClr val="00F0FF"/>
+                </a:solidFill>
+                <a:latin typeface="Calibri"/>
+                <a:ea typeface="Calibri"/>
               </a:rPr>
               <a:t>Session lifecycle</a:t>
             </a:r>
@@ -6515,14 +8025,14 @@
       </p:sp>
       <p:sp>
         <p:nvSpPr>
-          <p:cNvPr id="14" name="TextBox 13"/>
+          <p:cNvPr id="23" name="TextBox 22"/>
           <p:cNvSpPr txBox="1"/>
           <p:nvPr/>
         </p:nvSpPr>
         <p:spPr>
           <a:xfrm>
-            <a:off x="3200400" y="4434840"/>
-            <a:ext cx="8229600" cy="457200"/>
+            <a:off x="3931920" y="5422392"/>
+            <a:ext cx="7315200" cy="365760"/>
           </a:xfrm>
           <a:prstGeom prst="rect">
             <a:avLst/>
@@ -6530,34 +8040,33 @@
           <a:noFill/>
         </p:spPr>
         <p:txBody>
-          <a:bodyPr wrap="square">
-            <a:spAutoFit/>
-          </a:bodyPr>
+          <a:bodyPr wrap="square" anchor="t"/>
           <a:lstStyle/>
           <a:p>
             <a:pPr algn="l"/>
             <a:r>
-              <a:rPr sz="1600" b="0">
-                <a:solidFill>
-                  <a:srgbClr val="FFFFFF"/>
-                </a:solidFill>
-                <a:latin typeface="Calibri"/>
-              </a:rPr>
-              <a:t>session.end on power-off + pagehide; auto-resume in the 30s window</a:t>
-            </a:r>
-          </a:p>
-        </p:txBody>
-      </p:sp>
-      <p:sp>
-        <p:nvSpPr>
-          <p:cNvPr id="15" name="TextBox 14"/>
+              <a:rPr sz="1500" b="0">
+                <a:solidFill>
+                  <a:srgbClr val="9AA4B2"/>
+                </a:solidFill>
+                <a:latin typeface="Calibri"/>
+                <a:ea typeface="Calibri"/>
+              </a:rPr>
+              <a:t>session.end + auto-resume in the 30s window</a:t>
+            </a:r>
+          </a:p>
+        </p:txBody>
+      </p:sp>
+      <p:sp>
+        <p:nvSpPr>
+          <p:cNvPr id="24" name="TextBox 23"/>
           <p:cNvSpPr txBox="1"/>
           <p:nvPr/>
         </p:nvSpPr>
         <p:spPr>
           <a:xfrm>
-            <a:off x="822960" y="5760720"/>
-            <a:ext cx="10058400" cy="548640"/>
+            <a:off x="640080" y="6446520"/>
+            <a:ext cx="7315200" cy="274320"/>
           </a:xfrm>
           <a:prstGeom prst="rect">
             <a:avLst/>
@@ -6565,20 +8074,53 @@
           <a:noFill/>
         </p:spPr>
         <p:txBody>
-          <a:bodyPr wrap="square">
-            <a:spAutoFit/>
-          </a:bodyPr>
+          <a:bodyPr wrap="square" anchor="t"/>
           <a:lstStyle/>
           <a:p>
             <a:pPr algn="l"/>
             <a:r>
-              <a:rPr sz="1400" b="0">
+              <a:rPr sz="1100" b="0">
                 <a:solidFill>
                   <a:srgbClr val="9AA4B2"/>
                 </a:solidFill>
                 <a:latin typeface="Calibri"/>
-              </a:rPr>
-              <a:t>Live agent:  VoiceBridge Accessibility Agent  ·  voice: anna  ·  tool: dispatch_tool</a:t>
+                <a:ea typeface="Calibri"/>
+              </a:rPr>
+              <a:t>VoiceBridge AI  ·  AssemblyAI Voice Agent Hackathon 2026</a:t>
+            </a:r>
+          </a:p>
+        </p:txBody>
+      </p:sp>
+      <p:sp>
+        <p:nvSpPr>
+          <p:cNvPr id="25" name="TextBox 24"/>
+          <p:cNvSpPr txBox="1"/>
+          <p:nvPr/>
+        </p:nvSpPr>
+        <p:spPr>
+          <a:xfrm>
+            <a:off x="10515600" y="6446520"/>
+            <a:ext cx="1097280" cy="274320"/>
+          </a:xfrm>
+          <a:prstGeom prst="rect">
+            <a:avLst/>
+          </a:prstGeom>
+          <a:noFill/>
+        </p:spPr>
+        <p:txBody>
+          <a:bodyPr wrap="square" anchor="t"/>
+          <a:lstStyle/>
+          <a:p>
+            <a:pPr algn="r"/>
+            <a:r>
+              <a:rPr sz="1100" b="0">
+                <a:solidFill>
+                  <a:srgbClr val="9AA4B2"/>
+                </a:solidFill>
+                <a:latin typeface="Calibri"/>
+                <a:ea typeface="Calibri"/>
+              </a:rPr>
+              <a:t>5/10</a:t>
             </a:r>
           </a:p>
         </p:txBody>
@@ -6646,16 +8188,84 @@
       </p:sp>
       <p:sp>
         <p:nvSpPr>
-          <p:cNvPr id="3" name="Rounded Rectangle 2"/>
+          <p:cNvPr id="3" name="TextBox 2"/>
+          <p:cNvSpPr txBox="1"/>
+          <p:nvPr/>
+        </p:nvSpPr>
+        <p:spPr>
+          <a:xfrm>
+            <a:off x="640080" y="365760"/>
+            <a:ext cx="10972800" cy="320040"/>
+          </a:xfrm>
+          <a:prstGeom prst="rect">
+            <a:avLst/>
+          </a:prstGeom>
+          <a:noFill/>
+        </p:spPr>
+        <p:txBody>
+          <a:bodyPr wrap="square" anchor="t"/>
+          <a:lstStyle/>
+          <a:p>
+            <a:pPr algn="l"/>
+            <a:r>
+              <a:rPr sz="1200" b="1">
+                <a:solidFill>
+                  <a:srgbClr val="00F0FF"/>
+                </a:solidFill>
+                <a:latin typeface="Calibri"/>
+                <a:ea typeface="Calibri"/>
+              </a:rPr>
+              <a:t>ARCHITECTURE</a:t>
+            </a:r>
+          </a:p>
+        </p:txBody>
+      </p:sp>
+      <p:sp>
+        <p:nvSpPr>
+          <p:cNvPr id="4" name="TextBox 3"/>
+          <p:cNvSpPr txBox="1"/>
+          <p:nvPr/>
+        </p:nvSpPr>
+        <p:spPr>
+          <a:xfrm>
+            <a:off x="640080" y="685800"/>
+            <a:ext cx="10972800" cy="640080"/>
+          </a:xfrm>
+          <a:prstGeom prst="rect">
+            <a:avLst/>
+          </a:prstGeom>
+          <a:noFill/>
+        </p:spPr>
+        <p:txBody>
+          <a:bodyPr wrap="square" anchor="t"/>
+          <a:lstStyle/>
+          <a:p>
+            <a:pPr algn="l"/>
+            <a:r>
+              <a:rPr sz="3200" b="1">
+                <a:solidFill>
+                  <a:srgbClr val="F5F7FA"/>
+                </a:solidFill>
+                <a:latin typeface="Calibri"/>
+                <a:ea typeface="Calibri"/>
+              </a:rPr>
+              <a:t>Browser + server + AssemblyAI, fail-closed security</a:t>
+            </a:r>
+          </a:p>
+        </p:txBody>
+      </p:sp>
+      <p:sp>
+        <p:nvSpPr>
+          <p:cNvPr id="5" name="Rectangle 4"/>
           <p:cNvSpPr/>
           <p:nvPr/>
         </p:nvSpPr>
         <p:spPr>
           <a:xfrm>
-            <a:off x="457200" y="320040"/>
-            <a:ext cx="109728" cy="640080"/>
-          </a:xfrm>
-          <a:prstGeom prst="roundRect">
+            <a:off x="640080" y="1325880"/>
+            <a:ext cx="1097280" cy="45720"/>
+          </a:xfrm>
+          <a:prstGeom prst="rect">
             <a:avLst/>
           </a:prstGeom>
           <a:solidFill>
@@ -6689,57 +8299,24 @@
       </p:sp>
       <p:sp>
         <p:nvSpPr>
-          <p:cNvPr id="4" name="TextBox 3"/>
-          <p:cNvSpPr txBox="1"/>
-          <p:nvPr/>
-        </p:nvSpPr>
-        <p:spPr>
-          <a:xfrm>
-            <a:off x="822960" y="411480"/>
-            <a:ext cx="10972800" cy="640080"/>
-          </a:xfrm>
-          <a:prstGeom prst="rect">
-            <a:avLst/>
-          </a:prstGeom>
-          <a:noFill/>
-        </p:spPr>
-        <p:txBody>
-          <a:bodyPr wrap="square">
-            <a:spAutoFit/>
-          </a:bodyPr>
-          <a:lstStyle/>
-          <a:p>
-            <a:pPr algn="l"/>
-            <a:r>
-              <a:rPr sz="3600" b="1">
-                <a:solidFill>
-                  <a:srgbClr val="FFFFFF"/>
-                </a:solidFill>
-                <a:latin typeface="Calibri"/>
-              </a:rPr>
-              <a:t>More than a voice wrapper</a:t>
-            </a:r>
-          </a:p>
-        </p:txBody>
-      </p:sp>
-      <p:sp>
-        <p:nvSpPr>
-          <p:cNvPr id="5" name="Rounded Rectangle 4"/>
+          <p:cNvPr id="6" name="Rounded Rectangle 5"/>
           <p:cNvSpPr/>
           <p:nvPr/>
         </p:nvSpPr>
         <p:spPr>
           <a:xfrm>
-            <a:off x="822960" y="1371600"/>
-            <a:ext cx="10515600" cy="960120"/>
+            <a:off x="640080" y="1645920"/>
+            <a:ext cx="3566160" cy="4023360"/>
           </a:xfrm>
           <a:prstGeom prst="roundRect">
-            <a:avLst/>
+            <a:avLst>
+              <a:gd name="adj" fmla="val 8000"/>
+            </a:avLst>
           </a:prstGeom>
           <a:solidFill>
-            <a:srgbClr val="0D1117"/>
+            <a:srgbClr val="111827"/>
           </a:solidFill>
-          <a:ln>
+          <a:ln w="12700">
             <a:solidFill>
               <a:srgbClr val="00F0FF"/>
             </a:solidFill>
@@ -6769,14 +8346,48 @@
       </p:sp>
       <p:sp>
         <p:nvSpPr>
-          <p:cNvPr id="6" name="TextBox 5"/>
+          <p:cNvPr id="7" name="TextBox 6"/>
           <p:cNvSpPr txBox="1"/>
           <p:nvPr/>
         </p:nvSpPr>
         <p:spPr>
           <a:xfrm>
-            <a:off x="1097280" y="1508760"/>
-            <a:ext cx="9601200" cy="365760"/>
+            <a:off x="868680" y="1874519"/>
+            <a:ext cx="3108960" cy="365760"/>
+          </a:xfrm>
+          <a:prstGeom prst="rect">
+            <a:avLst/>
+          </a:prstGeom>
+          <a:noFill/>
+        </p:spPr>
+        <p:txBody>
+          <a:bodyPr wrap="square" anchor="t"/>
+          <a:lstStyle/>
+          <a:p>
+            <a:pPr algn="l"/>
+            <a:r>
+              <a:rPr sz="1800" b="1">
+                <a:solidFill>
+                  <a:srgbClr val="00F0FF"/>
+                </a:solidFill>
+                <a:latin typeface="Calibri"/>
+                <a:ea typeface="Calibri"/>
+              </a:rPr>
+              <a:t>Browser</a:t>
+            </a:r>
+          </a:p>
+        </p:txBody>
+      </p:sp>
+      <p:sp>
+        <p:nvSpPr>
+          <p:cNvPr id="8" name="TextBox 7"/>
+          <p:cNvSpPr txBox="1"/>
+          <p:nvPr/>
+        </p:nvSpPr>
+        <p:spPr>
+          <a:xfrm>
+            <a:off x="868680" y="2377440"/>
+            <a:ext cx="3108960" cy="3017520"/>
           </a:xfrm>
           <a:prstGeom prst="rect">
             <a:avLst/>
@@ -6789,72 +8400,135 @@
           </a:bodyPr>
           <a:lstStyle/>
           <a:p>
-            <a:pPr algn="l"/>
-            <a:r>
-              <a:rPr sz="1800" b="1">
+            <a:pPr algn="l">
+              <a:spcAft>
+                <a:spcPts val="1000"/>
+              </a:spcAft>
+            </a:pPr>
+            <a:r>
+              <a:rPr sz="1400" b="1">
                 <a:solidFill>
                   <a:srgbClr val="00F0FF"/>
                 </a:solidFill>
                 <a:latin typeface="Calibri"/>
-              </a:rPr>
-              <a:t>Operates the product</a:t>
-            </a:r>
-          </a:p>
-        </p:txBody>
-      </p:sp>
-      <p:sp>
-        <p:nvSpPr>
-          <p:cNvPr id="7" name="TextBox 6"/>
-          <p:cNvSpPr txBox="1"/>
-          <p:nvPr/>
-        </p:nvSpPr>
-        <p:spPr>
-          <a:xfrm>
-            <a:off x="1097280" y="1874519"/>
-            <a:ext cx="9601200" cy="365760"/>
-          </a:xfrm>
-          <a:prstGeom prst="rect">
-            <a:avLst/>
-          </a:prstGeom>
-          <a:noFill/>
-        </p:spPr>
-        <p:txBody>
-          <a:bodyPr wrap="square">
-            <a:spAutoFit/>
-          </a:bodyPr>
-          <a:lstStyle/>
-          <a:p>
-            <a:pPr algn="l"/>
+                <a:ea typeface="Calibri"/>
+              </a:rPr>
+              <a:t>▸  </a:t>
+            </a:r>
             <a:r>
               <a:rPr sz="1400" b="0">
                 <a:solidFill>
-                  <a:srgbClr val="9AA4B2"/>
-                </a:solidFill>
-                <a:latin typeface="Calibri"/>
-              </a:rPr>
-              <a:t>Opens panels, writes prefs, reads metrics — not just answers questions</a:t>
-            </a:r>
-          </a:p>
-        </p:txBody>
-      </p:sp>
-      <p:sp>
-        <p:nvSpPr>
-          <p:cNvPr id="8" name="Rounded Rectangle 7"/>
+                  <a:srgbClr val="F5F7FA"/>
+                </a:solidFill>
+                <a:latin typeface="Calibri"/>
+                <a:ea typeface="Calibri"/>
+              </a:rPr>
+              <a:t>Next.js dashboard</a:t>
+            </a:r>
+          </a:p>
+          <a:p>
+            <a:pPr algn="l">
+              <a:spcAft>
+                <a:spcPts val="1000"/>
+              </a:spcAft>
+            </a:pPr>
+            <a:r>
+              <a:rPr sz="1400" b="1">
+                <a:solidFill>
+                  <a:srgbClr val="00F0FF"/>
+                </a:solidFill>
+                <a:latin typeface="Calibri"/>
+                <a:ea typeface="Calibri"/>
+              </a:rPr>
+              <a:t>▸  </a:t>
+            </a:r>
+            <a:r>
+              <a:rPr sz="1400" b="0">
+                <a:solidFill>
+                  <a:srgbClr val="F5F7FA"/>
+                </a:solidFill>
+                <a:latin typeface="Calibri"/>
+                <a:ea typeface="Calibri"/>
+              </a:rPr>
+              <a:t>PCM worklet 24 kHz</a:t>
+            </a:r>
+          </a:p>
+          <a:p>
+            <a:pPr algn="l">
+              <a:spcAft>
+                <a:spcPts val="1000"/>
+              </a:spcAft>
+            </a:pPr>
+            <a:r>
+              <a:rPr sz="1400" b="1">
+                <a:solidFill>
+                  <a:srgbClr val="00F0FF"/>
+                </a:solidFill>
+                <a:latin typeface="Calibri"/>
+                <a:ea typeface="Calibri"/>
+              </a:rPr>
+              <a:t>▸  </a:t>
+            </a:r>
+            <a:r>
+              <a:rPr sz="1400" b="0">
+                <a:solidFill>
+                  <a:srgbClr val="F5F7FA"/>
+                </a:solidFill>
+                <a:latin typeface="Calibri"/>
+                <a:ea typeface="Calibri"/>
+              </a:rPr>
+              <a:t>Local client actions</a:t>
+            </a:r>
+          </a:p>
+          <a:p>
+            <a:pPr algn="l">
+              <a:spcAft>
+                <a:spcPts val="1000"/>
+              </a:spcAft>
+            </a:pPr>
+            <a:r>
+              <a:rPr sz="1400" b="1">
+                <a:solidFill>
+                  <a:srgbClr val="00F0FF"/>
+                </a:solidFill>
+                <a:latin typeface="Calibri"/>
+                <a:ea typeface="Calibri"/>
+              </a:rPr>
+              <a:t>▸  </a:t>
+            </a:r>
+            <a:r>
+              <a:rPr sz="1400" b="0">
+                <a:solidFill>
+                  <a:srgbClr val="F5F7FA"/>
+                </a:solidFill>
+                <a:latin typeface="Calibri"/>
+                <a:ea typeface="Calibri"/>
+              </a:rPr>
+              <a:t>Engine ladder UI</a:t>
+            </a:r>
+          </a:p>
+        </p:txBody>
+      </p:sp>
+      <p:sp>
+        <p:nvSpPr>
+          <p:cNvPr id="9" name="Rounded Rectangle 8"/>
           <p:cNvSpPr/>
           <p:nvPr/>
         </p:nvSpPr>
         <p:spPr>
           <a:xfrm>
-            <a:off x="822960" y="2514600"/>
-            <a:ext cx="10515600" cy="960120"/>
+            <a:off x="4480560" y="1645920"/>
+            <a:ext cx="3566160" cy="4023360"/>
           </a:xfrm>
           <a:prstGeom prst="roundRect">
-            <a:avLst/>
+            <a:avLst>
+              <a:gd name="adj" fmla="val 8000"/>
+            </a:avLst>
           </a:prstGeom>
           <a:solidFill>
-            <a:srgbClr val="0D1117"/>
+            <a:srgbClr val="111827"/>
           </a:solidFill>
-          <a:ln>
+          <a:ln w="12700">
             <a:solidFill>
               <a:srgbClr val="5CE0D8"/>
             </a:solidFill>
@@ -6884,14 +8558,48 @@
       </p:sp>
       <p:sp>
         <p:nvSpPr>
-          <p:cNvPr id="9" name="TextBox 8"/>
+          <p:cNvPr id="10" name="TextBox 9"/>
           <p:cNvSpPr txBox="1"/>
           <p:nvPr/>
         </p:nvSpPr>
         <p:spPr>
           <a:xfrm>
-            <a:off x="1097280" y="2651760"/>
-            <a:ext cx="9601200" cy="365760"/>
+            <a:off x="4709160" y="1874519"/>
+            <a:ext cx="3108960" cy="365760"/>
+          </a:xfrm>
+          <a:prstGeom prst="rect">
+            <a:avLst/>
+          </a:prstGeom>
+          <a:noFill/>
+        </p:spPr>
+        <p:txBody>
+          <a:bodyPr wrap="square" anchor="t"/>
+          <a:lstStyle/>
+          <a:p>
+            <a:pPr algn="l"/>
+            <a:r>
+              <a:rPr sz="1800" b="1">
+                <a:solidFill>
+                  <a:srgbClr val="5CE0D8"/>
+                </a:solidFill>
+                <a:latin typeface="Calibri"/>
+                <a:ea typeface="Calibri"/>
+              </a:rPr>
+              <a:t>Server</a:t>
+            </a:r>
+          </a:p>
+        </p:txBody>
+      </p:sp>
+      <p:sp>
+        <p:nvSpPr>
+          <p:cNvPr id="11" name="TextBox 10"/>
+          <p:cNvSpPr txBox="1"/>
+          <p:nvPr/>
+        </p:nvSpPr>
+        <p:spPr>
+          <a:xfrm>
+            <a:off x="4709160" y="2377440"/>
+            <a:ext cx="3108960" cy="3017520"/>
           </a:xfrm>
           <a:prstGeom prst="rect">
             <a:avLst/>
@@ -6904,72 +8612,135 @@
           </a:bodyPr>
           <a:lstStyle/>
           <a:p>
-            <a:pPr algn="l"/>
-            <a:r>
-              <a:rPr sz="1800" b="1">
+            <a:pPr algn="l">
+              <a:spcAft>
+                <a:spcPts val="1000"/>
+              </a:spcAft>
+            </a:pPr>
+            <a:r>
+              <a:rPr sz="1400" b="1">
                 <a:solidFill>
                   <a:srgbClr val="5CE0D8"/>
                 </a:solidFill>
                 <a:latin typeface="Calibri"/>
-              </a:rPr>
-              <a:t>Offline ladder</a:t>
-            </a:r>
-          </a:p>
-        </p:txBody>
-      </p:sp>
-      <p:sp>
-        <p:nvSpPr>
-          <p:cNvPr id="10" name="TextBox 9"/>
-          <p:cNvSpPr txBox="1"/>
-          <p:nvPr/>
-        </p:nvSpPr>
-        <p:spPr>
-          <a:xfrm>
-            <a:off x="1097280" y="3017520"/>
-            <a:ext cx="9601200" cy="365760"/>
-          </a:xfrm>
-          <a:prstGeom prst="rect">
-            <a:avLst/>
-          </a:prstGeom>
-          <a:noFill/>
-        </p:spPr>
-        <p:txBody>
-          <a:bodyPr wrap="square">
-            <a:spAutoFit/>
-          </a:bodyPr>
-          <a:lstStyle/>
-          <a:p>
-            <a:pPr algn="l"/>
+                <a:ea typeface="Calibri"/>
+              </a:rPr>
+              <a:t>▸  </a:t>
+            </a:r>
             <a:r>
               <a:rPr sz="1400" b="0">
                 <a:solidFill>
-                  <a:srgbClr val="9AA4B2"/>
-                </a:solidFill>
-                <a:latin typeface="Calibri"/>
-              </a:rPr>
-              <a:t>Vosk WASM → Web Speech → typed input when the cloud fails</a:t>
-            </a:r>
-          </a:p>
-        </p:txBody>
-      </p:sp>
-      <p:sp>
-        <p:nvSpPr>
-          <p:cNvPr id="11" name="Rounded Rectangle 10"/>
+                  <a:srgbClr val="F5F7FA"/>
+                </a:solidFill>
+                <a:latin typeface="Calibri"/>
+                <a:ea typeface="Calibri"/>
+              </a:rPr>
+              <a:t>/api/agent/token</a:t>
+            </a:r>
+          </a:p>
+          <a:p>
+            <a:pPr algn="l">
+              <a:spcAft>
+                <a:spcPts val="1000"/>
+              </a:spcAft>
+            </a:pPr>
+            <a:r>
+              <a:rPr sz="1400" b="1">
+                <a:solidFill>
+                  <a:srgbClr val="5CE0D8"/>
+                </a:solidFill>
+                <a:latin typeface="Calibri"/>
+                <a:ea typeface="Calibri"/>
+              </a:rPr>
+              <a:t>▸  </a:t>
+            </a:r>
+            <a:r>
+              <a:rPr sz="1400" b="0">
+                <a:solidFill>
+                  <a:srgbClr val="F5F7FA"/>
+                </a:solidFill>
+                <a:latin typeface="Calibri"/>
+                <a:ea typeface="Calibri"/>
+              </a:rPr>
+              <a:t>/api/agent/tools</a:t>
+            </a:r>
+          </a:p>
+          <a:p>
+            <a:pPr algn="l">
+              <a:spcAft>
+                <a:spcPts val="1000"/>
+              </a:spcAft>
+            </a:pPr>
+            <a:r>
+              <a:rPr sz="1400" b="1">
+                <a:solidFill>
+                  <a:srgbClr val="5CE0D8"/>
+                </a:solidFill>
+                <a:latin typeface="Calibri"/>
+                <a:ea typeface="Calibri"/>
+              </a:rPr>
+              <a:t>▸  </a:t>
+            </a:r>
+            <a:r>
+              <a:rPr sz="1400" b="0">
+                <a:solidFill>
+                  <a:srgbClr val="F5F7FA"/>
+                </a:solidFill>
+                <a:latin typeface="Calibri"/>
+                <a:ea typeface="Calibri"/>
+              </a:rPr>
+              <a:t>/api/stt/fallback</a:t>
+            </a:r>
+          </a:p>
+          <a:p>
+            <a:pPr algn="l">
+              <a:spcAft>
+                <a:spcPts val="1000"/>
+              </a:spcAft>
+            </a:pPr>
+            <a:r>
+              <a:rPr sz="1400" b="1">
+                <a:solidFill>
+                  <a:srgbClr val="5CE0D8"/>
+                </a:solidFill>
+                <a:latin typeface="Calibri"/>
+                <a:ea typeface="Calibri"/>
+              </a:rPr>
+              <a:t>▸  </a:t>
+            </a:r>
+            <a:r>
+              <a:rPr sz="1400" b="0">
+                <a:solidFill>
+                  <a:srgbClr val="F5F7FA"/>
+                </a:solidFill>
+                <a:latin typeface="Calibri"/>
+                <a:ea typeface="Calibri"/>
+              </a:rPr>
+              <a:t>Prisma + SQLite</a:t>
+            </a:r>
+          </a:p>
+        </p:txBody>
+      </p:sp>
+      <p:sp>
+        <p:nvSpPr>
+          <p:cNvPr id="12" name="Rounded Rectangle 11"/>
           <p:cNvSpPr/>
           <p:nvPr/>
         </p:nvSpPr>
         <p:spPr>
           <a:xfrm>
-            <a:off x="822960" y="3657600"/>
-            <a:ext cx="10515600" cy="960120"/>
+            <a:off x="8321040" y="1645920"/>
+            <a:ext cx="3566160" cy="4023360"/>
           </a:xfrm>
           <a:prstGeom prst="roundRect">
-            <a:avLst/>
+            <a:avLst>
+              <a:gd name="adj" fmla="val 8000"/>
+            </a:avLst>
           </a:prstGeom>
           <a:solidFill>
-            <a:srgbClr val="0D1117"/>
+            <a:srgbClr val="111827"/>
           </a:solidFill>
-          <a:ln>
+          <a:ln w="12700">
             <a:solidFill>
               <a:srgbClr val="FFB627"/>
             </a:solidFill>
@@ -6999,14 +8770,48 @@
       </p:sp>
       <p:sp>
         <p:nvSpPr>
-          <p:cNvPr id="12" name="TextBox 11"/>
+          <p:cNvPr id="13" name="TextBox 12"/>
           <p:cNvSpPr txBox="1"/>
           <p:nvPr/>
         </p:nvSpPr>
         <p:spPr>
           <a:xfrm>
-            <a:off x="1097280" y="3794760"/>
-            <a:ext cx="9601200" cy="365760"/>
+            <a:off x="8549640" y="1874519"/>
+            <a:ext cx="3108960" cy="365760"/>
+          </a:xfrm>
+          <a:prstGeom prst="rect">
+            <a:avLst/>
+          </a:prstGeom>
+          <a:noFill/>
+        </p:spPr>
+        <p:txBody>
+          <a:bodyPr wrap="square" anchor="t"/>
+          <a:lstStyle/>
+          <a:p>
+            <a:pPr algn="l"/>
+            <a:r>
+              <a:rPr sz="1800" b="1">
+                <a:solidFill>
+                  <a:srgbClr val="FFB627"/>
+                </a:solidFill>
+                <a:latin typeface="Calibri"/>
+                <a:ea typeface="Calibri"/>
+              </a:rPr>
+              <a:t>AssemblyAI</a:t>
+            </a:r>
+          </a:p>
+        </p:txBody>
+      </p:sp>
+      <p:sp>
+        <p:nvSpPr>
+          <p:cNvPr id="14" name="TextBox 13"/>
+          <p:cNvSpPr txBox="1"/>
+          <p:nvPr/>
+        </p:nvSpPr>
+        <p:spPr>
+          <a:xfrm>
+            <a:off x="8549640" y="2377440"/>
+            <a:ext cx="3108960" cy="3017520"/>
           </a:xfrm>
           <a:prstGeom prst="rect">
             <a:avLst/>
@@ -7019,96 +8824,112 @@
           </a:bodyPr>
           <a:lstStyle/>
           <a:p>
-            <a:pPr algn="l"/>
-            <a:r>
-              <a:rPr sz="1800" b="1">
+            <a:pPr algn="l">
+              <a:spcAft>
+                <a:spcPts val="1000"/>
+              </a:spcAft>
+            </a:pPr>
+            <a:r>
+              <a:rPr sz="1400" b="1">
                 <a:solidFill>
                   <a:srgbClr val="FFB627"/>
                 </a:solidFill>
                 <a:latin typeface="Calibri"/>
-              </a:rPr>
-              <a:t>Production security</a:t>
-            </a:r>
-          </a:p>
-        </p:txBody>
-      </p:sp>
-      <p:sp>
-        <p:nvSpPr>
-          <p:cNvPr id="13" name="TextBox 12"/>
-          <p:cNvSpPr txBox="1"/>
-          <p:nvPr/>
-        </p:nvSpPr>
-        <p:spPr>
-          <a:xfrm>
-            <a:off x="1097280" y="4160520"/>
-            <a:ext cx="9601200" cy="365760"/>
-          </a:xfrm>
-          <a:prstGeom prst="rect">
-            <a:avLst/>
-          </a:prstGeom>
-          <a:noFill/>
-        </p:spPr>
-        <p:txBody>
-          <a:bodyPr wrap="square">
-            <a:spAutoFit/>
-          </a:bodyPr>
-          <a:lstStyle/>
-          <a:p>
-            <a:pPr algn="l"/>
+                <a:ea typeface="Calibri"/>
+              </a:rPr>
+              <a:t>▸  </a:t>
+            </a:r>
             <a:r>
               <a:rPr sz="1400" b="0">
                 <a:solidFill>
-                  <a:srgbClr val="9AA4B2"/>
-                </a:solidFill>
-                <a:latin typeface="Calibri"/>
-              </a:rPr>
-              <a:t>Signed sessions, CSRF, rate limits, AES-GCM, audit log, fail-closed secrets</a:t>
-            </a:r>
-          </a:p>
-        </p:txBody>
-      </p:sp>
-      <p:sp>
-        <p:nvSpPr>
-          <p:cNvPr id="14" name="Rounded Rectangle 13"/>
-          <p:cNvSpPr/>
-          <p:nvPr/>
-        </p:nvSpPr>
-        <p:spPr>
-          <a:xfrm>
-            <a:off x="822960" y="4800600"/>
-            <a:ext cx="10515600" cy="960120"/>
-          </a:xfrm>
-          <a:prstGeom prst="roundRect">
-            <a:avLst/>
-          </a:prstGeom>
-          <a:solidFill>
-            <a:srgbClr val="0D1117"/>
-          </a:solidFill>
-          <a:ln>
-            <a:solidFill>
-              <a:srgbClr val="51CF66"/>
-            </a:solidFill>
-          </a:ln>
-        </p:spPr>
-        <p:style>
-          <a:lnRef idx="1">
-            <a:schemeClr val="accent1"/>
-          </a:lnRef>
-          <a:fillRef idx="3">
-            <a:schemeClr val="accent1"/>
-          </a:fillRef>
-          <a:effectRef idx="2">
-            <a:schemeClr val="accent1"/>
-          </a:effectRef>
-          <a:fontRef idx="minor">
-            <a:schemeClr val="lt1"/>
-          </a:fontRef>
-        </p:style>
-        <p:txBody>
-          <a:bodyPr rtlCol="0" anchor="ctr"/>
-          <a:lstStyle/>
-          <a:p>
-            <a:pPr algn="ctr"/>
+                  <a:srgbClr val="F5F7FA"/>
+                </a:solidFill>
+                <a:latin typeface="Calibri"/>
+                <a:ea typeface="Calibri"/>
+              </a:rPr>
+              <a:t>Stored Voice Agent</a:t>
+            </a:r>
+          </a:p>
+          <a:p>
+            <a:pPr algn="l">
+              <a:spcAft>
+                <a:spcPts val="1000"/>
+              </a:spcAft>
+            </a:pPr>
+            <a:r>
+              <a:rPr sz="1400" b="1">
+                <a:solidFill>
+                  <a:srgbClr val="FFB627"/>
+                </a:solidFill>
+                <a:latin typeface="Calibri"/>
+                <a:ea typeface="Calibri"/>
+              </a:rPr>
+              <a:t>▸  </a:t>
+            </a:r>
+            <a:r>
+              <a:rPr sz="1400" b="0">
+                <a:solidFill>
+                  <a:srgbClr val="F5F7FA"/>
+                </a:solidFill>
+                <a:latin typeface="Calibri"/>
+                <a:ea typeface="Calibri"/>
+              </a:rPr>
+              <a:t>Realtime WS session</a:t>
+            </a:r>
+          </a:p>
+          <a:p>
+            <a:pPr algn="l">
+              <a:spcAft>
+                <a:spcPts val="1000"/>
+              </a:spcAft>
+            </a:pPr>
+            <a:r>
+              <a:rPr sz="1400" b="1">
+                <a:solidFill>
+                  <a:srgbClr val="FFB627"/>
+                </a:solidFill>
+                <a:latin typeface="Calibri"/>
+                <a:ea typeface="Calibri"/>
+              </a:rPr>
+              <a:t>▸  </a:t>
+            </a:r>
+            <a:r>
+              <a:rPr sz="1400" b="0">
+                <a:solidFill>
+                  <a:srgbClr val="F5F7FA"/>
+                </a:solidFill>
+                <a:latin typeface="Calibri"/>
+                <a:ea typeface="Calibri"/>
+              </a:rPr>
+              <a:t>LLM + TTS + VAD</a:t>
+            </a:r>
+          </a:p>
+          <a:p>
+            <a:pPr algn="l">
+              <a:spcAft>
+                <a:spcPts val="1000"/>
+              </a:spcAft>
+            </a:pPr>
+            <a:r>
+              <a:rPr sz="1400" b="1">
+                <a:solidFill>
+                  <a:srgbClr val="FFB627"/>
+                </a:solidFill>
+                <a:latin typeface="Calibri"/>
+                <a:ea typeface="Calibri"/>
+              </a:rPr>
+              <a:t>▸  </a:t>
+            </a:r>
+            <a:r>
+              <a:rPr sz="1400" b="0">
+                <a:solidFill>
+                  <a:srgbClr val="F5F7FA"/>
+                </a:solidFill>
+                <a:latin typeface="Calibri"/>
+                <a:ea typeface="Calibri"/>
+              </a:rPr>
+              <a:t>tool.call events</a:t>
+            </a:r>
           </a:p>
         </p:txBody>
       </p:sp>
@@ -7120,8 +8941,8 @@
         </p:nvSpPr>
         <p:spPr>
           <a:xfrm>
-            <a:off x="1097280" y="4937760"/>
-            <a:ext cx="9601200" cy="365760"/>
+            <a:off x="640080" y="5852160"/>
+            <a:ext cx="10972800" cy="365760"/>
           </a:xfrm>
           <a:prstGeom prst="rect">
             <a:avLst/>
@@ -7129,20 +8950,19 @@
           <a:noFill/>
         </p:spPr>
         <p:txBody>
-          <a:bodyPr wrap="square">
-            <a:spAutoFit/>
-          </a:bodyPr>
+          <a:bodyPr wrap="square" anchor="t"/>
           <a:lstStyle/>
           <a:p>
             <a:pPr algn="l"/>
             <a:r>
-              <a:rPr sz="1800" b="1">
-                <a:solidFill>
-                  <a:srgbClr val="51CF66"/>
-                </a:solidFill>
-                <a:latin typeface="Calibri"/>
-              </a:rPr>
-              <a:t>Accessibility-native</a:t>
+              <a:rPr sz="1300" b="0">
+                <a:solidFill>
+                  <a:srgbClr val="9AA4B2"/>
+                </a:solidFill>
+                <a:latin typeface="Calibri"/>
+                <a:ea typeface="Calibri"/>
+              </a:rPr>
+              <a:t>Security: signed HttpOnly sessions · CSRF double-submit · rate limits · bot/scanner block · AES-256-GCM · audit log</a:t>
             </a:r>
           </a:p>
         </p:txBody>
@@ -7155,8 +8975,8 @@
         </p:nvSpPr>
         <p:spPr>
           <a:xfrm>
-            <a:off x="1097280" y="5303520"/>
-            <a:ext cx="9601200" cy="365760"/>
+            <a:off x="640080" y="6446520"/>
+            <a:ext cx="7315200" cy="274320"/>
           </a:xfrm>
           <a:prstGeom prst="rect">
             <a:avLst/>
@@ -7164,20 +8984,53 @@
           <a:noFill/>
         </p:spPr>
         <p:txBody>
-          <a:bodyPr wrap="square">
-            <a:spAutoFit/>
-          </a:bodyPr>
+          <a:bodyPr wrap="square" anchor="t"/>
           <a:lstStyle/>
           <a:p>
             <a:pPr algn="l"/>
             <a:r>
-              <a:rPr sz="1400" b="0">
+              <a:rPr sz="1100" b="0">
                 <a:solidFill>
                   <a:srgbClr val="9AA4B2"/>
                 </a:solidFill>
                 <a:latin typeface="Calibri"/>
-              </a:rPr>
-              <a:t>Space / Alt+1–7, SR announcements, mute, transcript export, short replies</a:t>
+                <a:ea typeface="Calibri"/>
+              </a:rPr>
+              <a:t>VoiceBridge AI  ·  AssemblyAI Voice Agent Hackathon 2026</a:t>
+            </a:r>
+          </a:p>
+        </p:txBody>
+      </p:sp>
+      <p:sp>
+        <p:nvSpPr>
+          <p:cNvPr id="17" name="TextBox 16"/>
+          <p:cNvSpPr txBox="1"/>
+          <p:nvPr/>
+        </p:nvSpPr>
+        <p:spPr>
+          <a:xfrm>
+            <a:off x="10515600" y="6446520"/>
+            <a:ext cx="1097280" cy="274320"/>
+          </a:xfrm>
+          <a:prstGeom prst="rect">
+            <a:avLst/>
+          </a:prstGeom>
+          <a:noFill/>
+        </p:spPr>
+        <p:txBody>
+          <a:bodyPr wrap="square" anchor="t"/>
+          <a:lstStyle/>
+          <a:p>
+            <a:pPr algn="r"/>
+            <a:r>
+              <a:rPr sz="1100" b="0">
+                <a:solidFill>
+                  <a:srgbClr val="9AA4B2"/>
+                </a:solidFill>
+                <a:latin typeface="Calibri"/>
+                <a:ea typeface="Calibri"/>
+              </a:rPr>
+              <a:t>6/10</a:t>
             </a:r>
           </a:p>
         </p:txBody>
@@ -7245,16 +9098,84 @@
       </p:sp>
       <p:sp>
         <p:nvSpPr>
-          <p:cNvPr id="3" name="Rounded Rectangle 2"/>
+          <p:cNvPr id="3" name="TextBox 2"/>
+          <p:cNvSpPr txBox="1"/>
+          <p:nvPr/>
+        </p:nvSpPr>
+        <p:spPr>
+          <a:xfrm>
+            <a:off x="640080" y="365760"/>
+            <a:ext cx="10972800" cy="320040"/>
+          </a:xfrm>
+          <a:prstGeom prst="rect">
+            <a:avLst/>
+          </a:prstGeom>
+          <a:noFill/>
+        </p:spPr>
+        <p:txBody>
+          <a:bodyPr wrap="square" anchor="t"/>
+          <a:lstStyle/>
+          <a:p>
+            <a:pPr algn="l"/>
+            <a:r>
+              <a:rPr sz="1200" b="1">
+                <a:solidFill>
+                  <a:srgbClr val="00F0FF"/>
+                </a:solidFill>
+                <a:latin typeface="Calibri"/>
+                <a:ea typeface="Calibri"/>
+              </a:rPr>
+              <a:t>DIFFERENTIATION</a:t>
+            </a:r>
+          </a:p>
+        </p:txBody>
+      </p:sp>
+      <p:sp>
+        <p:nvSpPr>
+          <p:cNvPr id="4" name="TextBox 3"/>
+          <p:cNvSpPr txBox="1"/>
+          <p:nvPr/>
+        </p:nvSpPr>
+        <p:spPr>
+          <a:xfrm>
+            <a:off x="640080" y="685800"/>
+            <a:ext cx="10972800" cy="640080"/>
+          </a:xfrm>
+          <a:prstGeom prst="rect">
+            <a:avLst/>
+          </a:prstGeom>
+          <a:noFill/>
+        </p:spPr>
+        <p:txBody>
+          <a:bodyPr wrap="square" anchor="t"/>
+          <a:lstStyle/>
+          <a:p>
+            <a:pPr algn="l"/>
+            <a:r>
+              <a:rPr sz="3200" b="1">
+                <a:solidFill>
+                  <a:srgbClr val="F5F7FA"/>
+                </a:solidFill>
+                <a:latin typeface="Calibri"/>
+                <a:ea typeface="Calibri"/>
+              </a:rPr>
+              <a:t>Not another chat wrapper on a form</a:t>
+            </a:r>
+          </a:p>
+        </p:txBody>
+      </p:sp>
+      <p:sp>
+        <p:nvSpPr>
+          <p:cNvPr id="5" name="Rectangle 4"/>
           <p:cNvSpPr/>
           <p:nvPr/>
         </p:nvSpPr>
         <p:spPr>
           <a:xfrm>
-            <a:off x="457200" y="320040"/>
-            <a:ext cx="109728" cy="640080"/>
-          </a:xfrm>
-          <a:prstGeom prst="roundRect">
+            <a:off x="640080" y="1325880"/>
+            <a:ext cx="1097280" cy="45720"/>
+          </a:xfrm>
+          <a:prstGeom prst="rect">
             <a:avLst/>
           </a:prstGeom>
           <a:solidFill>
@@ -7288,106 +9209,48 @@
       </p:sp>
       <p:sp>
         <p:nvSpPr>
-          <p:cNvPr id="4" name="TextBox 3"/>
-          <p:cNvSpPr txBox="1"/>
-          <p:nvPr/>
-        </p:nvSpPr>
-        <p:spPr>
-          <a:xfrm>
-            <a:off x="822960" y="411480"/>
-            <a:ext cx="10972800" cy="640080"/>
-          </a:xfrm>
-          <a:prstGeom prst="rect">
-            <a:avLst/>
-          </a:prstGeom>
-          <a:noFill/>
-        </p:spPr>
-        <p:txBody>
-          <a:bodyPr wrap="square">
-            <a:spAutoFit/>
-          </a:bodyPr>
-          <a:lstStyle/>
-          <a:p>
-            <a:pPr algn="l"/>
-            <a:r>
-              <a:rPr sz="3600" b="1">
-                <a:solidFill>
-                  <a:srgbClr val="FFFFFF"/>
-                </a:solidFill>
-                <a:latin typeface="Calibri"/>
-              </a:rPr>
-              <a:t>Who pays, and why now</a:t>
-            </a:r>
-          </a:p>
-        </p:txBody>
-      </p:sp>
-      <p:sp>
-        <p:nvSpPr>
-          <p:cNvPr id="5" name="TextBox 4"/>
-          <p:cNvSpPr txBox="1"/>
-          <p:nvPr/>
-        </p:nvSpPr>
-        <p:spPr>
-          <a:xfrm>
-            <a:off x="822960" y="1463040"/>
-            <a:ext cx="3200400" cy="822960"/>
-          </a:xfrm>
-          <a:prstGeom prst="rect">
-            <a:avLst/>
-          </a:prstGeom>
-          <a:noFill/>
-        </p:spPr>
-        <p:txBody>
-          <a:bodyPr wrap="square">
-            <a:spAutoFit/>
-          </a:bodyPr>
-          <a:lstStyle/>
-          <a:p>
-            <a:pPr algn="l"/>
-            <a:r>
-              <a:rPr sz="4800" b="1">
-                <a:solidFill>
-                  <a:srgbClr val="00F0FF"/>
-                </a:solidFill>
-                <a:latin typeface="Calibri"/>
-              </a:rPr>
-              <a:t>1.3B</a:t>
-            </a:r>
-          </a:p>
-        </p:txBody>
-      </p:sp>
-      <p:sp>
-        <p:nvSpPr>
-          <p:cNvPr id="6" name="TextBox 5"/>
-          <p:cNvSpPr txBox="1"/>
-          <p:nvPr/>
-        </p:nvSpPr>
-        <p:spPr>
-          <a:xfrm>
-            <a:off x="822960" y="2240280"/>
-            <a:ext cx="3200400" cy="457200"/>
-          </a:xfrm>
-          <a:prstGeom prst="rect">
-            <a:avLst/>
-          </a:prstGeom>
-          <a:noFill/>
-        </p:spPr>
-        <p:txBody>
-          <a:bodyPr wrap="square">
-            <a:spAutoFit/>
-          </a:bodyPr>
-          <a:lstStyle/>
-          <a:p>
-            <a:pPr algn="l"/>
-            <a:r>
-              <a:rPr sz="1400" b="0">
-                <a:solidFill>
-                  <a:srgbClr val="9AA4B2"/>
-                </a:solidFill>
-                <a:latin typeface="Calibri"/>
-              </a:rPr>
-              <a:t>global disability market (WHO)</a:t>
-            </a:r>
+          <p:cNvPr id="6" name="Rounded Rectangle 5"/>
+          <p:cNvSpPr/>
+          <p:nvPr/>
+        </p:nvSpPr>
+        <p:spPr>
+          <a:xfrm>
+            <a:off x="640080" y="1645920"/>
+            <a:ext cx="10972800" cy="731520"/>
+          </a:xfrm>
+          <a:prstGeom prst="roundRect">
+            <a:avLst>
+              <a:gd name="adj" fmla="val 8000"/>
+            </a:avLst>
+          </a:prstGeom>
+          <a:solidFill>
+            <a:srgbClr val="111827"/>
+          </a:solidFill>
+          <a:ln w="12700">
+            <a:solidFill>
+              <a:srgbClr val="FF6B6B"/>
+            </a:solidFill>
+          </a:ln>
+        </p:spPr>
+        <p:style>
+          <a:lnRef idx="1">
+            <a:schemeClr val="accent1"/>
+          </a:lnRef>
+          <a:fillRef idx="3">
+            <a:schemeClr val="accent1"/>
+          </a:fillRef>
+          <a:effectRef idx="2">
+            <a:schemeClr val="accent1"/>
+          </a:effectRef>
+          <a:fontRef idx="minor">
+            <a:schemeClr val="lt1"/>
+          </a:fontRef>
+        </p:style>
+        <p:txBody>
+          <a:bodyPr rtlCol="0" anchor="ctr"/>
+          <a:lstStyle/>
+          <a:p>
+            <a:pPr algn="ctr"/>
           </a:p>
         </p:txBody>
       </p:sp>
@@ -7399,8 +9262,8 @@
         </p:nvSpPr>
         <p:spPr>
           <a:xfrm>
-            <a:off x="4114800" y="1463040"/>
-            <a:ext cx="3200400" cy="822960"/>
+            <a:off x="868680" y="1828800"/>
+            <a:ext cx="3200400" cy="365760"/>
           </a:xfrm>
           <a:prstGeom prst="rect">
             <a:avLst/>
@@ -7408,20 +9271,19 @@
           <a:noFill/>
         </p:spPr>
         <p:txBody>
-          <a:bodyPr wrap="square">
-            <a:spAutoFit/>
-          </a:bodyPr>
+          <a:bodyPr wrap="square" anchor="t"/>
           <a:lstStyle/>
           <a:p>
             <a:pPr algn="l"/>
             <a:r>
-              <a:rPr sz="4800" b="1">
-                <a:solidFill>
-                  <a:srgbClr val="5CE0D8"/>
-                </a:solidFill>
-                <a:latin typeface="Calibri"/>
-              </a:rPr>
-              <a:t>$26B+</a:t>
+              <a:rPr sz="1600" b="1">
+                <a:solidFill>
+                  <a:srgbClr val="FF6B6B"/>
+                </a:solidFill>
+                <a:latin typeface="Calibri"/>
+                <a:ea typeface="Calibri"/>
+              </a:rPr>
+              <a:t>Chat wrapper</a:t>
             </a:r>
           </a:p>
         </p:txBody>
@@ -7434,8 +9296,8 @@
         </p:nvSpPr>
         <p:spPr>
           <a:xfrm>
-            <a:off x="4114800" y="2240280"/>
-            <a:ext cx="3200400" cy="457200"/>
+            <a:off x="4206240" y="1828800"/>
+            <a:ext cx="7132320" cy="365760"/>
           </a:xfrm>
           <a:prstGeom prst="rect">
             <a:avLst/>
@@ -7443,56 +9305,67 @@
           <a:noFill/>
         </p:spPr>
         <p:txBody>
-          <a:bodyPr wrap="square">
-            <a:spAutoFit/>
-          </a:bodyPr>
+          <a:bodyPr wrap="square" anchor="t"/>
           <a:lstStyle/>
           <a:p>
             <a:pPr algn="l"/>
             <a:r>
-              <a:rPr sz="1400" b="0">
+              <a:rPr sz="1500" b="0">
                 <a:solidFill>
                   <a:srgbClr val="9AA4B2"/>
                 </a:solidFill>
                 <a:latin typeface="Calibri"/>
-              </a:rPr>
-              <a:t>assistive tech trajectory</a:t>
-            </a:r>
-          </a:p>
-        </p:txBody>
-      </p:sp>
-      <p:sp>
-        <p:nvSpPr>
-          <p:cNvPr id="9" name="TextBox 8"/>
-          <p:cNvSpPr txBox="1"/>
-          <p:nvPr/>
-        </p:nvSpPr>
-        <p:spPr>
-          <a:xfrm>
-            <a:off x="7498079" y="1463040"/>
-            <a:ext cx="3200400" cy="822960"/>
-          </a:xfrm>
-          <a:prstGeom prst="rect">
-            <a:avLst/>
-          </a:prstGeom>
-          <a:noFill/>
-        </p:spPr>
-        <p:txBody>
-          <a:bodyPr wrap="square">
-            <a:spAutoFit/>
-          </a:bodyPr>
-          <a:lstStyle/>
-          <a:p>
-            <a:pPr algn="l"/>
-            <a:r>
-              <a:rPr sz="4800" b="1">
-                <a:solidFill>
-                  <a:srgbClr val="FFB627"/>
-                </a:solidFill>
-                <a:latin typeface="Calibri"/>
-              </a:rPr>
-              <a:t>Legal</a:t>
-            </a:r>
+                <a:ea typeface="Calibri"/>
+              </a:rPr>
+              <a:t>No product actions</a:t>
+            </a:r>
+          </a:p>
+        </p:txBody>
+      </p:sp>
+      <p:sp>
+        <p:nvSpPr>
+          <p:cNvPr id="9" name="Rounded Rectangle 8"/>
+          <p:cNvSpPr/>
+          <p:nvPr/>
+        </p:nvSpPr>
+        <p:spPr>
+          <a:xfrm>
+            <a:off x="640080" y="2514600"/>
+            <a:ext cx="10972800" cy="731520"/>
+          </a:xfrm>
+          <a:prstGeom prst="roundRect">
+            <a:avLst>
+              <a:gd name="adj" fmla="val 8000"/>
+            </a:avLst>
+          </a:prstGeom>
+          <a:solidFill>
+            <a:srgbClr val="111827"/>
+          </a:solidFill>
+          <a:ln w="12700">
+            <a:solidFill>
+              <a:srgbClr val="FF6B6B"/>
+            </a:solidFill>
+          </a:ln>
+        </p:spPr>
+        <p:style>
+          <a:lnRef idx="1">
+            <a:schemeClr val="accent1"/>
+          </a:lnRef>
+          <a:fillRef idx="3">
+            <a:schemeClr val="accent1"/>
+          </a:fillRef>
+          <a:effectRef idx="2">
+            <a:schemeClr val="accent1"/>
+          </a:effectRef>
+          <a:fontRef idx="minor">
+            <a:schemeClr val="lt1"/>
+          </a:fontRef>
+        </p:style>
+        <p:txBody>
+          <a:bodyPr rtlCol="0" anchor="ctr"/>
+          <a:lstStyle/>
+          <a:p>
+            <a:pPr algn="ctr"/>
           </a:p>
         </p:txBody>
       </p:sp>
@@ -7504,8 +9377,8 @@
         </p:nvSpPr>
         <p:spPr>
           <a:xfrm>
-            <a:off x="7498079" y="2240280"/>
-            <a:ext cx="3200400" cy="457200"/>
+            <a:off x="868680" y="2697480"/>
+            <a:ext cx="3200400" cy="365760"/>
           </a:xfrm>
           <a:prstGeom prst="rect">
             <a:avLst/>
@@ -7513,20 +9386,19 @@
           <a:noFill/>
         </p:spPr>
         <p:txBody>
-          <a:bodyPr wrap="square">
-            <a:spAutoFit/>
-          </a:bodyPr>
+          <a:bodyPr wrap="square" anchor="t"/>
           <a:lstStyle/>
           <a:p>
             <a:pPr algn="l"/>
             <a:r>
-              <a:rPr sz="1400" b="0">
-                <a:solidFill>
-                  <a:srgbClr val="9AA4B2"/>
-                </a:solidFill>
-                <a:latin typeface="Calibri"/>
-              </a:rPr>
-              <a:t>WCAG / EN 301 549 / ADA mandates</a:t>
+              <a:rPr sz="1600" b="1">
+                <a:solidFill>
+                  <a:srgbClr val="FF6B6B"/>
+                </a:solidFill>
+                <a:latin typeface="Calibri"/>
+                <a:ea typeface="Calibri"/>
+              </a:rPr>
+              <a:t>Pure STT captions</a:t>
             </a:r>
           </a:p>
         </p:txBody>
@@ -7539,8 +9411,8 @@
         </p:nvSpPr>
         <p:spPr>
           <a:xfrm>
-            <a:off x="822960" y="3200400"/>
-            <a:ext cx="10058400" cy="2743200"/>
+            <a:off x="4206240" y="2697480"/>
+            <a:ext cx="7132320" cy="365760"/>
           </a:xfrm>
           <a:prstGeom prst="rect">
             <a:avLst/>
@@ -7548,104 +9420,432 @@
           <a:noFill/>
         </p:spPr>
         <p:txBody>
-          <a:bodyPr wrap="square">
-            <a:spAutoFit/>
-          </a:bodyPr>
-          <a:lstStyle/>
-          <a:p>
-            <a:pPr>
-              <a:spcAft>
-                <a:spcPts val="800"/>
-              </a:spcAft>
-            </a:pPr>
-            <a:r>
-              <a:rPr sz="1800" b="1">
-                <a:solidFill>
-                  <a:srgbClr val="00F0FF"/>
-                </a:solidFill>
-                <a:latin typeface="Calibri"/>
-              </a:rPr>
-              <a:t>Primary buyers</a:t>
-            </a:r>
-          </a:p>
-          <a:p>
-            <a:pPr>
-              <a:spcAft>
-                <a:spcPts val="800"/>
-              </a:spcAft>
-            </a:pPr>
-            <a:r>
-              <a:rPr sz="1800" b="0">
-                <a:solidFill>
-                  <a:srgbClr val="FFFFFF"/>
-                </a:solidFill>
-                <a:latin typeface="Calibri"/>
-              </a:rPr>
-              <a:t>Enterprise accessibility &amp; digital inclusion teams</a:t>
-            </a:r>
-          </a:p>
-          <a:p>
-            <a:pPr>
-              <a:spcAft>
-                <a:spcPts val="800"/>
-              </a:spcAft>
-            </a:pPr>
-            <a:r>
-              <a:rPr sz="1800" b="0">
-                <a:solidFill>
-                  <a:srgbClr val="FFFFFF"/>
-                </a:solidFill>
-                <a:latin typeface="Calibri"/>
-              </a:rPr>
-              <a:t>Government / education under procurement a11y rules</a:t>
-            </a:r>
-          </a:p>
-          <a:p>
-            <a:pPr>
-              <a:spcAft>
-                <a:spcPts val="800"/>
-              </a:spcAft>
-            </a:pPr>
-            <a:r>
-              <a:rPr sz="1800" b="0">
-                <a:solidFill>
-                  <a:srgbClr val="FFFFFF"/>
-                </a:solidFill>
-                <a:latin typeface="Calibri"/>
-              </a:rPr>
-              <a:t>Product orgs shipping voice-first or hands-free UX</a:t>
-            </a:r>
-          </a:p>
-          <a:p>
-            <a:pPr>
-              <a:spcAft>
-                <a:spcPts val="800"/>
-              </a:spcAft>
-            </a:pPr>
-            <a:r>
-              <a:rPr sz="1800" b="0">
-                <a:solidFill>
-                  <a:srgbClr val="FFFFFF"/>
-                </a:solidFill>
-                <a:latin typeface="Calibri"/>
-              </a:rPr>
-              <a:t/>
-            </a:r>
-          </a:p>
-          <a:p>
-            <a:pPr>
-              <a:spcAft>
-                <a:spcPts val="800"/>
-              </a:spcAft>
-            </a:pPr>
-            <a:r>
-              <a:rPr sz="1800" b="1">
-                <a:solidFill>
-                  <a:srgbClr val="5CE0D8"/>
-                </a:solidFill>
-                <a:latin typeface="Calibri"/>
-              </a:rPr>
-              <a:t>Why now: regulation + LLM agents + browser audio matured together</a:t>
+          <a:bodyPr wrap="square" anchor="t"/>
+          <a:lstStyle/>
+          <a:p>
+            <a:pPr algn="l"/>
+            <a:r>
+              <a:rPr sz="1500" b="0">
+                <a:solidFill>
+                  <a:srgbClr val="9AA4B2"/>
+                </a:solidFill>
+                <a:latin typeface="Calibri"/>
+                <a:ea typeface="Calibri"/>
+              </a:rPr>
+              <a:t>Passive — cannot act</a:t>
+            </a:r>
+          </a:p>
+        </p:txBody>
+      </p:sp>
+      <p:sp>
+        <p:nvSpPr>
+          <p:cNvPr id="12" name="Rounded Rectangle 11"/>
+          <p:cNvSpPr/>
+          <p:nvPr/>
+        </p:nvSpPr>
+        <p:spPr>
+          <a:xfrm>
+            <a:off x="640080" y="3383280"/>
+            <a:ext cx="10972800" cy="731520"/>
+          </a:xfrm>
+          <a:prstGeom prst="roundRect">
+            <a:avLst>
+              <a:gd name="adj" fmla="val 8000"/>
+            </a:avLst>
+          </a:prstGeom>
+          <a:solidFill>
+            <a:srgbClr val="111827"/>
+          </a:solidFill>
+          <a:ln w="12700">
+            <a:solidFill>
+              <a:srgbClr val="FFB627"/>
+            </a:solidFill>
+          </a:ln>
+        </p:spPr>
+        <p:style>
+          <a:lnRef idx="1">
+            <a:schemeClr val="accent1"/>
+          </a:lnRef>
+          <a:fillRef idx="3">
+            <a:schemeClr val="accent1"/>
+          </a:fillRef>
+          <a:effectRef idx="2">
+            <a:schemeClr val="accent1"/>
+          </a:effectRef>
+          <a:fontRef idx="minor">
+            <a:schemeClr val="lt1"/>
+          </a:fontRef>
+        </p:style>
+        <p:txBody>
+          <a:bodyPr rtlCol="0" anchor="ctr"/>
+          <a:lstStyle/>
+          <a:p>
+            <a:pPr algn="ctr"/>
+          </a:p>
+        </p:txBody>
+      </p:sp>
+      <p:sp>
+        <p:nvSpPr>
+          <p:cNvPr id="13" name="TextBox 12"/>
+          <p:cNvSpPr txBox="1"/>
+          <p:nvPr/>
+        </p:nvSpPr>
+        <p:spPr>
+          <a:xfrm>
+            <a:off x="868680" y="3566160"/>
+            <a:ext cx="3200400" cy="365760"/>
+          </a:xfrm>
+          <a:prstGeom prst="rect">
+            <a:avLst/>
+          </a:prstGeom>
+          <a:noFill/>
+        </p:spPr>
+        <p:txBody>
+          <a:bodyPr wrap="square" anchor="t"/>
+          <a:lstStyle/>
+          <a:p>
+            <a:pPr algn="l"/>
+            <a:r>
+              <a:rPr sz="1600" b="1">
+                <a:solidFill>
+                  <a:srgbClr val="FFB627"/>
+                </a:solidFill>
+                <a:latin typeface="Calibri"/>
+                <a:ea typeface="Calibri"/>
+              </a:rPr>
+              <a:t>Offline-only STT</a:t>
+            </a:r>
+          </a:p>
+        </p:txBody>
+      </p:sp>
+      <p:sp>
+        <p:nvSpPr>
+          <p:cNvPr id="14" name="TextBox 13"/>
+          <p:cNvSpPr txBox="1"/>
+          <p:nvPr/>
+        </p:nvSpPr>
+        <p:spPr>
+          <a:xfrm>
+            <a:off x="4206240" y="3566160"/>
+            <a:ext cx="7132320" cy="365760"/>
+          </a:xfrm>
+          <a:prstGeom prst="rect">
+            <a:avLst/>
+          </a:prstGeom>
+          <a:noFill/>
+        </p:spPr>
+        <p:txBody>
+          <a:bodyPr wrap="square" anchor="t"/>
+          <a:lstStyle/>
+          <a:p>
+            <a:pPr algn="l"/>
+            <a:r>
+              <a:rPr sz="1500" b="0">
+                <a:solidFill>
+                  <a:srgbClr val="9AA4B2"/>
+                </a:solidFill>
+                <a:latin typeface="Calibri"/>
+                <a:ea typeface="Calibri"/>
+              </a:rPr>
+              <a:t>Weak LLM &amp; tools</a:t>
+            </a:r>
+          </a:p>
+        </p:txBody>
+      </p:sp>
+      <p:sp>
+        <p:nvSpPr>
+          <p:cNvPr id="15" name="Rounded Rectangle 14"/>
+          <p:cNvSpPr/>
+          <p:nvPr/>
+        </p:nvSpPr>
+        <p:spPr>
+          <a:xfrm>
+            <a:off x="640080" y="4251959"/>
+            <a:ext cx="10972800" cy="731520"/>
+          </a:xfrm>
+          <a:prstGeom prst="roundRect">
+            <a:avLst>
+              <a:gd name="adj" fmla="val 8000"/>
+            </a:avLst>
+          </a:prstGeom>
+          <a:solidFill>
+            <a:srgbClr val="111827"/>
+          </a:solidFill>
+          <a:ln w="12700">
+            <a:solidFill>
+              <a:srgbClr val="FFB627"/>
+            </a:solidFill>
+          </a:ln>
+        </p:spPr>
+        <p:style>
+          <a:lnRef idx="1">
+            <a:schemeClr val="accent1"/>
+          </a:lnRef>
+          <a:fillRef idx="3">
+            <a:schemeClr val="accent1"/>
+          </a:fillRef>
+          <a:effectRef idx="2">
+            <a:schemeClr val="accent1"/>
+          </a:effectRef>
+          <a:fontRef idx="minor">
+            <a:schemeClr val="lt1"/>
+          </a:fontRef>
+        </p:style>
+        <p:txBody>
+          <a:bodyPr rtlCol="0" anchor="ctr"/>
+          <a:lstStyle/>
+          <a:p>
+            <a:pPr algn="ctr"/>
+          </a:p>
+        </p:txBody>
+      </p:sp>
+      <p:sp>
+        <p:nvSpPr>
+          <p:cNvPr id="16" name="TextBox 15"/>
+          <p:cNvSpPr txBox="1"/>
+          <p:nvPr/>
+        </p:nvSpPr>
+        <p:spPr>
+          <a:xfrm>
+            <a:off x="868680" y="4434839"/>
+            <a:ext cx="3200400" cy="365760"/>
+          </a:xfrm>
+          <a:prstGeom prst="rect">
+            <a:avLst/>
+          </a:prstGeom>
+          <a:noFill/>
+        </p:spPr>
+        <p:txBody>
+          <a:bodyPr wrap="square" anchor="t"/>
+          <a:lstStyle/>
+          <a:p>
+            <a:pPr algn="l"/>
+            <a:r>
+              <a:rPr sz="1600" b="1">
+                <a:solidFill>
+                  <a:srgbClr val="FFB627"/>
+                </a:solidFill>
+                <a:latin typeface="Calibri"/>
+                <a:ea typeface="Calibri"/>
+              </a:rPr>
+              <a:t>Cloud-only demo</a:t>
+            </a:r>
+          </a:p>
+        </p:txBody>
+      </p:sp>
+      <p:sp>
+        <p:nvSpPr>
+          <p:cNvPr id="17" name="TextBox 16"/>
+          <p:cNvSpPr txBox="1"/>
+          <p:nvPr/>
+        </p:nvSpPr>
+        <p:spPr>
+          <a:xfrm>
+            <a:off x="4206240" y="4434839"/>
+            <a:ext cx="7132320" cy="365760"/>
+          </a:xfrm>
+          <a:prstGeom prst="rect">
+            <a:avLst/>
+          </a:prstGeom>
+          <a:noFill/>
+        </p:spPr>
+        <p:txBody>
+          <a:bodyPr wrap="square" anchor="t"/>
+          <a:lstStyle/>
+          <a:p>
+            <a:pPr algn="l"/>
+            <a:r>
+              <a:rPr sz="1500" b="0">
+                <a:solidFill>
+                  <a:srgbClr val="9AA4B2"/>
+                </a:solidFill>
+                <a:latin typeface="Calibri"/>
+                <a:ea typeface="Calibri"/>
+              </a:rPr>
+              <a:t>Dies without network</a:t>
+            </a:r>
+          </a:p>
+        </p:txBody>
+      </p:sp>
+      <p:sp>
+        <p:nvSpPr>
+          <p:cNvPr id="18" name="Rounded Rectangle 17"/>
+          <p:cNvSpPr/>
+          <p:nvPr/>
+        </p:nvSpPr>
+        <p:spPr>
+          <a:xfrm>
+            <a:off x="640080" y="5120640"/>
+            <a:ext cx="10972800" cy="731520"/>
+          </a:xfrm>
+          <a:prstGeom prst="roundRect">
+            <a:avLst>
+              <a:gd name="adj" fmla="val 8000"/>
+            </a:avLst>
+          </a:prstGeom>
+          <a:solidFill>
+            <a:srgbClr val="111827"/>
+          </a:solidFill>
+          <a:ln w="12700">
+            <a:solidFill>
+              <a:srgbClr val="51CF66"/>
+            </a:solidFill>
+          </a:ln>
+        </p:spPr>
+        <p:style>
+          <a:lnRef idx="1">
+            <a:schemeClr val="accent1"/>
+          </a:lnRef>
+          <a:fillRef idx="3">
+            <a:schemeClr val="accent1"/>
+          </a:fillRef>
+          <a:effectRef idx="2">
+            <a:schemeClr val="accent1"/>
+          </a:effectRef>
+          <a:fontRef idx="minor">
+            <a:schemeClr val="lt1"/>
+          </a:fontRef>
+        </p:style>
+        <p:txBody>
+          <a:bodyPr rtlCol="0" anchor="ctr"/>
+          <a:lstStyle/>
+          <a:p>
+            <a:pPr algn="ctr"/>
+          </a:p>
+        </p:txBody>
+      </p:sp>
+      <p:sp>
+        <p:nvSpPr>
+          <p:cNvPr id="19" name="TextBox 18"/>
+          <p:cNvSpPr txBox="1"/>
+          <p:nvPr/>
+        </p:nvSpPr>
+        <p:spPr>
+          <a:xfrm>
+            <a:off x="868680" y="5303520"/>
+            <a:ext cx="3200400" cy="365760"/>
+          </a:xfrm>
+          <a:prstGeom prst="rect">
+            <a:avLst/>
+          </a:prstGeom>
+          <a:noFill/>
+        </p:spPr>
+        <p:txBody>
+          <a:bodyPr wrap="square" anchor="t"/>
+          <a:lstStyle/>
+          <a:p>
+            <a:pPr algn="l"/>
+            <a:r>
+              <a:rPr sz="1600" b="1">
+                <a:solidFill>
+                  <a:srgbClr val="51CF66"/>
+                </a:solidFill>
+                <a:latin typeface="Calibri"/>
+                <a:ea typeface="Calibri"/>
+              </a:rPr>
+              <a:t>VoiceBridge</a:t>
+            </a:r>
+          </a:p>
+        </p:txBody>
+      </p:sp>
+      <p:sp>
+        <p:nvSpPr>
+          <p:cNvPr id="20" name="TextBox 19"/>
+          <p:cNvSpPr txBox="1"/>
+          <p:nvPr/>
+        </p:nvSpPr>
+        <p:spPr>
+          <a:xfrm>
+            <a:off x="4206240" y="5303520"/>
+            <a:ext cx="7132320" cy="365760"/>
+          </a:xfrm>
+          <a:prstGeom prst="rect">
+            <a:avLst/>
+          </a:prstGeom>
+          <a:noFill/>
+        </p:spPr>
+        <p:txBody>
+          <a:bodyPr wrap="square" anchor="t"/>
+          <a:lstStyle/>
+          <a:p>
+            <a:pPr algn="l"/>
+            <a:r>
+              <a:rPr sz="1500" b="0">
+                <a:solidFill>
+                  <a:srgbClr val="9AA4B2"/>
+                </a:solidFill>
+                <a:latin typeface="Calibri"/>
+                <a:ea typeface="Calibri"/>
+              </a:rPr>
+              <a:t>Acts + speaks + degrades gracefully</a:t>
+            </a:r>
+          </a:p>
+        </p:txBody>
+      </p:sp>
+      <p:sp>
+        <p:nvSpPr>
+          <p:cNvPr id="21" name="TextBox 20"/>
+          <p:cNvSpPr txBox="1"/>
+          <p:nvPr/>
+        </p:nvSpPr>
+        <p:spPr>
+          <a:xfrm>
+            <a:off x="640080" y="6446520"/>
+            <a:ext cx="7315200" cy="274320"/>
+          </a:xfrm>
+          <a:prstGeom prst="rect">
+            <a:avLst/>
+          </a:prstGeom>
+          <a:noFill/>
+        </p:spPr>
+        <p:txBody>
+          <a:bodyPr wrap="square" anchor="t"/>
+          <a:lstStyle/>
+          <a:p>
+            <a:pPr algn="l"/>
+            <a:r>
+              <a:rPr sz="1100" b="0">
+                <a:solidFill>
+                  <a:srgbClr val="9AA4B2"/>
+                </a:solidFill>
+                <a:latin typeface="Calibri"/>
+                <a:ea typeface="Calibri"/>
+              </a:rPr>
+              <a:t>VoiceBridge AI  ·  AssemblyAI Voice Agent Hackathon 2026</a:t>
+            </a:r>
+          </a:p>
+        </p:txBody>
+      </p:sp>
+      <p:sp>
+        <p:nvSpPr>
+          <p:cNvPr id="22" name="TextBox 21"/>
+          <p:cNvSpPr txBox="1"/>
+          <p:nvPr/>
+        </p:nvSpPr>
+        <p:spPr>
+          <a:xfrm>
+            <a:off x="10515600" y="6446520"/>
+            <a:ext cx="1097280" cy="274320"/>
+          </a:xfrm>
+          <a:prstGeom prst="rect">
+            <a:avLst/>
+          </a:prstGeom>
+          <a:noFill/>
+        </p:spPr>
+        <p:txBody>
+          <a:bodyPr wrap="square" anchor="t"/>
+          <a:lstStyle/>
+          <a:p>
+            <a:pPr algn="r"/>
+            <a:r>
+              <a:rPr sz="1100" b="0">
+                <a:solidFill>
+                  <a:srgbClr val="9AA4B2"/>
+                </a:solidFill>
+                <a:latin typeface="Calibri"/>
+                <a:ea typeface="Calibri"/>
+              </a:rPr>
+              <a:t>7/10</a:t>
             </a:r>
           </a:p>
         </p:txBody>
@@ -7713,16 +9913,84 @@
       </p:sp>
       <p:sp>
         <p:nvSpPr>
-          <p:cNvPr id="3" name="Rounded Rectangle 2"/>
+          <p:cNvPr id="3" name="TextBox 2"/>
+          <p:cNvSpPr txBox="1"/>
+          <p:nvPr/>
+        </p:nvSpPr>
+        <p:spPr>
+          <a:xfrm>
+            <a:off x="640080" y="365760"/>
+            <a:ext cx="10972800" cy="320040"/>
+          </a:xfrm>
+          <a:prstGeom prst="rect">
+            <a:avLst/>
+          </a:prstGeom>
+          <a:noFill/>
+        </p:spPr>
+        <p:txBody>
+          <a:bodyPr wrap="square" anchor="t"/>
+          <a:lstStyle/>
+          <a:p>
+            <a:pPr algn="l"/>
+            <a:r>
+              <a:rPr sz="1200" b="1">
+                <a:solidFill>
+                  <a:srgbClr val="00F0FF"/>
+                </a:solidFill>
+                <a:latin typeface="Calibri"/>
+                <a:ea typeface="Calibri"/>
+              </a:rPr>
+              <a:t>BUSINESS</a:t>
+            </a:r>
+          </a:p>
+        </p:txBody>
+      </p:sp>
+      <p:sp>
+        <p:nvSpPr>
+          <p:cNvPr id="4" name="TextBox 3"/>
+          <p:cNvSpPr txBox="1"/>
+          <p:nvPr/>
+        </p:nvSpPr>
+        <p:spPr>
+          <a:xfrm>
+            <a:off x="640080" y="685800"/>
+            <a:ext cx="10972800" cy="640080"/>
+          </a:xfrm>
+          <a:prstGeom prst="rect">
+            <a:avLst/>
+          </a:prstGeom>
+          <a:noFill/>
+        </p:spPr>
+        <p:txBody>
+          <a:bodyPr wrap="square" anchor="t"/>
+          <a:lstStyle/>
+          <a:p>
+            <a:pPr algn="l"/>
+            <a:r>
+              <a:rPr sz="3200" b="1">
+                <a:solidFill>
+                  <a:srgbClr val="F5F7FA"/>
+                </a:solidFill>
+                <a:latin typeface="Calibri"/>
+                <a:ea typeface="Calibri"/>
+              </a:rPr>
+              <a:t>Who pays, why now, how we charge</a:t>
+            </a:r>
+          </a:p>
+        </p:txBody>
+      </p:sp>
+      <p:sp>
+        <p:nvSpPr>
+          <p:cNvPr id="5" name="Rectangle 4"/>
           <p:cNvSpPr/>
           <p:nvPr/>
         </p:nvSpPr>
         <p:spPr>
           <a:xfrm>
-            <a:off x="457200" y="320040"/>
-            <a:ext cx="109728" cy="640080"/>
-          </a:xfrm>
-          <a:prstGeom prst="roundRect">
+            <a:off x="640080" y="1325880"/>
+            <a:ext cx="1097280" cy="45720"/>
+          </a:xfrm>
+          <a:prstGeom prst="rect">
             <a:avLst/>
           </a:prstGeom>
           <a:solidFill>
@@ -7756,14 +10024,14 @@
       </p:sp>
       <p:sp>
         <p:nvSpPr>
-          <p:cNvPr id="4" name="TextBox 3"/>
+          <p:cNvPr id="6" name="TextBox 5"/>
           <p:cNvSpPr txBox="1"/>
           <p:nvPr/>
         </p:nvSpPr>
         <p:spPr>
           <a:xfrm>
-            <a:off x="822960" y="411480"/>
-            <a:ext cx="10972800" cy="640080"/>
+            <a:off x="640080" y="1645920"/>
+            <a:ext cx="5669280" cy="3657600"/>
           </a:xfrm>
           <a:prstGeom prst="rect">
             <a:avLst/>
@@ -7776,37 +10044,135 @@
           </a:bodyPr>
           <a:lstStyle/>
           <a:p>
-            <a:pPr algn="l"/>
-            <a:r>
-              <a:rPr sz="3600" b="1">
-                <a:solidFill>
-                  <a:srgbClr val="FFFFFF"/>
-                </a:solidFill>
-                <a:latin typeface="Calibri"/>
-              </a:rPr>
-              <a:t>Simple SaaS, AssemblyAI-metered cost</a:t>
-            </a:r>
-          </a:p>
-        </p:txBody>
-      </p:sp>
-      <p:sp>
-        <p:nvSpPr>
-          <p:cNvPr id="5" name="Rounded Rectangle 4"/>
+            <a:pPr algn="l">
+              <a:spcAft>
+                <a:spcPts val="1000"/>
+              </a:spcAft>
+            </a:pPr>
+            <a:r>
+              <a:rPr sz="1600" b="1">
+                <a:solidFill>
+                  <a:srgbClr val="00F0FF"/>
+                </a:solidFill>
+                <a:latin typeface="Calibri"/>
+                <a:ea typeface="Calibri"/>
+              </a:rPr>
+              <a:t>▸  </a:t>
+            </a:r>
+            <a:r>
+              <a:rPr sz="1600" b="0">
+                <a:solidFill>
+                  <a:srgbClr val="F5F7FA"/>
+                </a:solidFill>
+                <a:latin typeface="Calibri"/>
+                <a:ea typeface="Calibri"/>
+              </a:rPr>
+              <a:t>Primary: blind / low-vision / motor-impaired users</a:t>
+            </a:r>
+          </a:p>
+          <a:p>
+            <a:pPr algn="l">
+              <a:spcAft>
+                <a:spcPts val="1000"/>
+              </a:spcAft>
+            </a:pPr>
+            <a:r>
+              <a:rPr sz="1600" b="1">
+                <a:solidFill>
+                  <a:srgbClr val="00F0FF"/>
+                </a:solidFill>
+                <a:latin typeface="Calibri"/>
+                <a:ea typeface="Calibri"/>
+              </a:rPr>
+              <a:t>▸  </a:t>
+            </a:r>
+            <a:r>
+              <a:rPr sz="1600" b="0">
+                <a:solidFill>
+                  <a:srgbClr val="F5F7FA"/>
+                </a:solidFill>
+                <a:latin typeface="Calibri"/>
+                <a:ea typeface="Calibri"/>
+              </a:rPr>
+              <a:t>Buyer: enterprise a11y &amp; digital workplace teams</a:t>
+            </a:r>
+          </a:p>
+          <a:p>
+            <a:pPr algn="l">
+              <a:spcAft>
+                <a:spcPts val="1000"/>
+              </a:spcAft>
+            </a:pPr>
+            <a:r>
+              <a:rPr sz="1600" b="1">
+                <a:solidFill>
+                  <a:srgbClr val="00F0FF"/>
+                </a:solidFill>
+                <a:latin typeface="Calibri"/>
+                <a:ea typeface="Calibri"/>
+              </a:rPr>
+              <a:t>▸  </a:t>
+            </a:r>
+            <a:r>
+              <a:rPr sz="1600" b="0">
+                <a:solidFill>
+                  <a:srgbClr val="F5F7FA"/>
+                </a:solidFill>
+                <a:latin typeface="Calibri"/>
+                <a:ea typeface="Calibri"/>
+              </a:rPr>
+              <a:t>Why now: WCAG + EN 301 549 enforcement expanding</a:t>
+            </a:r>
+          </a:p>
+          <a:p>
+            <a:pPr algn="l">
+              <a:spcAft>
+                <a:spcPts val="1000"/>
+              </a:spcAft>
+            </a:pPr>
+            <a:r>
+              <a:rPr sz="1600" b="1">
+                <a:solidFill>
+                  <a:srgbClr val="00F0FF"/>
+                </a:solidFill>
+                <a:latin typeface="Calibri"/>
+                <a:ea typeface="Calibri"/>
+              </a:rPr>
+              <a:t>▸  </a:t>
+            </a:r>
+            <a:r>
+              <a:rPr sz="1600" b="0">
+                <a:solidFill>
+                  <a:srgbClr val="F5F7FA"/>
+                </a:solidFill>
+                <a:latin typeface="Calibri"/>
+                <a:ea typeface="Calibri"/>
+              </a:rPr>
+              <a:t>Why AI: only a realtime voice agent with tools can understand free speech and write product state in one turn</a:t>
+            </a:r>
+          </a:p>
+        </p:txBody>
+      </p:sp>
+      <p:sp>
+        <p:nvSpPr>
+          <p:cNvPr id="7" name="Rounded Rectangle 6"/>
           <p:cNvSpPr/>
           <p:nvPr/>
         </p:nvSpPr>
         <p:spPr>
           <a:xfrm>
-            <a:off x="822960" y="1371600"/>
-            <a:ext cx="3200400" cy="3840480"/>
+            <a:off x="6675120" y="1645920"/>
+            <a:ext cx="4846320" cy="1143000"/>
           </a:xfrm>
           <a:prstGeom prst="roundRect">
-            <a:avLst/>
+            <a:avLst>
+              <a:gd name="adj" fmla="val 8000"/>
+            </a:avLst>
           </a:prstGeom>
           <a:solidFill>
-            <a:srgbClr val="0D1117"/>
+            <a:srgbClr val="111827"/>
           </a:solidFill>
-          <a:ln>
+          <a:ln w="12700">
             <a:solidFill>
               <a:srgbClr val="00F0FF"/>
             </a:solidFill>
@@ -7836,84 +10202,14 @@
       </p:sp>
       <p:sp>
         <p:nvSpPr>
-          <p:cNvPr id="6" name="TextBox 5"/>
-          <p:cNvSpPr txBox="1"/>
-          <p:nvPr/>
-        </p:nvSpPr>
-        <p:spPr>
-          <a:xfrm>
-            <a:off x="1097280" y="1600200"/>
-            <a:ext cx="2743200" cy="365760"/>
-          </a:xfrm>
-          <a:prstGeom prst="rect">
-            <a:avLst/>
-          </a:prstGeom>
-          <a:noFill/>
-        </p:spPr>
-        <p:txBody>
-          <a:bodyPr wrap="square">
-            <a:spAutoFit/>
-          </a:bodyPr>
-          <a:lstStyle/>
-          <a:p>
-            <a:pPr algn="l"/>
-            <a:r>
-              <a:rPr sz="1800" b="1">
-                <a:solidFill>
-                  <a:srgbClr val="00F0FF"/>
-                </a:solidFill>
-                <a:latin typeface="Calibri"/>
-              </a:rPr>
-              <a:t>Personal</a:t>
-            </a:r>
-          </a:p>
-        </p:txBody>
-      </p:sp>
-      <p:sp>
-        <p:nvSpPr>
-          <p:cNvPr id="7" name="TextBox 6"/>
-          <p:cNvSpPr txBox="1"/>
-          <p:nvPr/>
-        </p:nvSpPr>
-        <p:spPr>
-          <a:xfrm>
-            <a:off x="1097280" y="2103120"/>
-            <a:ext cx="2743200" cy="640080"/>
-          </a:xfrm>
-          <a:prstGeom prst="rect">
-            <a:avLst/>
-          </a:prstGeom>
-          <a:noFill/>
-        </p:spPr>
-        <p:txBody>
-          <a:bodyPr wrap="square">
-            <a:spAutoFit/>
-          </a:bodyPr>
-          <a:lstStyle/>
-          <a:p>
-            <a:pPr algn="l"/>
-            <a:r>
-              <a:rPr sz="3600" b="1">
-                <a:solidFill>
-                  <a:srgbClr val="FFFFFF"/>
-                </a:solidFill>
-                <a:latin typeface="Calibri"/>
-              </a:rPr>
-              <a:t>$12/mo</a:t>
-            </a:r>
-          </a:p>
-        </p:txBody>
-      </p:sp>
-      <p:sp>
-        <p:nvSpPr>
           <p:cNvPr id="8" name="TextBox 7"/>
           <p:cNvSpPr txBox="1"/>
           <p:nvPr/>
         </p:nvSpPr>
         <p:spPr>
           <a:xfrm>
-            <a:off x="1097280" y="2926080"/>
-            <a:ext cx="2743200" cy="2011680"/>
+            <a:off x="6903720" y="1783080"/>
+            <a:ext cx="2286000" cy="365760"/>
           </a:xfrm>
           <a:prstGeom prst="rect">
             <a:avLst/>
@@ -7921,52 +10217,113 @@
           <a:noFill/>
         </p:spPr>
         <p:txBody>
-          <a:bodyPr wrap="square">
-            <a:spAutoFit/>
-          </a:bodyPr>
+          <a:bodyPr wrap="square" anchor="t"/>
           <a:lstStyle/>
           <a:p>
             <a:pPr algn="l"/>
             <a:r>
-              <a:rPr sz="1600" b="0">
+              <a:rPr sz="1600" b="1">
+                <a:solidFill>
+                  <a:srgbClr val="F5F7FA"/>
+                </a:solidFill>
+                <a:latin typeface="Calibri"/>
+                <a:ea typeface="Calibri"/>
+              </a:rPr>
+              <a:t>Personal</a:t>
+            </a:r>
+          </a:p>
+        </p:txBody>
+      </p:sp>
+      <p:sp>
+        <p:nvSpPr>
+          <p:cNvPr id="9" name="TextBox 8"/>
+          <p:cNvSpPr txBox="1"/>
+          <p:nvPr/>
+        </p:nvSpPr>
+        <p:spPr>
+          <a:xfrm>
+            <a:off x="9418320" y="1783080"/>
+            <a:ext cx="1828800" cy="365760"/>
+          </a:xfrm>
+          <a:prstGeom prst="rect">
+            <a:avLst/>
+          </a:prstGeom>
+          <a:noFill/>
+        </p:spPr>
+        <p:txBody>
+          <a:bodyPr wrap="square" anchor="t"/>
+          <a:lstStyle/>
+          <a:p>
+            <a:pPr algn="r"/>
+            <a:r>
+              <a:rPr sz="1600" b="1">
+                <a:solidFill>
+                  <a:srgbClr val="00F0FF"/>
+                </a:solidFill>
+                <a:latin typeface="Calibri"/>
+                <a:ea typeface="Calibri"/>
+              </a:rPr>
+              <a:t>$12/mo</a:t>
+            </a:r>
+          </a:p>
+        </p:txBody>
+      </p:sp>
+      <p:sp>
+        <p:nvSpPr>
+          <p:cNvPr id="10" name="TextBox 9"/>
+          <p:cNvSpPr txBox="1"/>
+          <p:nvPr/>
+        </p:nvSpPr>
+        <p:spPr>
+          <a:xfrm>
+            <a:off x="6903720" y="2240280"/>
+            <a:ext cx="4389120" cy="365760"/>
+          </a:xfrm>
+          <a:prstGeom prst="rect">
+            <a:avLst/>
+          </a:prstGeom>
+          <a:noFill/>
+        </p:spPr>
+        <p:txBody>
+          <a:bodyPr wrap="square" anchor="t"/>
+          <a:lstStyle/>
+          <a:p>
+            <a:pPr algn="l"/>
+            <a:r>
+              <a:rPr sz="1300" b="0">
                 <a:solidFill>
                   <a:srgbClr val="9AA4B2"/>
                 </a:solidFill>
                 <a:latin typeface="Calibri"/>
-              </a:rPr>
-              <a:t>Browser agent</a:t>
-            </a:r>
-            <a:br/>
-            <a:r>
-              <a:t>Fallback engines</a:t>
-            </a:r>
-            <a:br/>
-            <a:r>
-              <a:t>Transcript export</a:t>
-            </a:r>
-          </a:p>
-        </p:txBody>
-      </p:sp>
-      <p:sp>
-        <p:nvSpPr>
-          <p:cNvPr id="9" name="Rounded Rectangle 8"/>
+                <a:ea typeface="Calibri"/>
+              </a:rPr>
+              <a:t>Browser agent, fallback, export</a:t>
+            </a:r>
+          </a:p>
+        </p:txBody>
+      </p:sp>
+      <p:sp>
+        <p:nvSpPr>
+          <p:cNvPr id="11" name="Rounded Rectangle 10"/>
           <p:cNvSpPr/>
           <p:nvPr/>
         </p:nvSpPr>
         <p:spPr>
           <a:xfrm>
-            <a:off x="4297680" y="1371600"/>
-            <a:ext cx="3200400" cy="3840480"/>
+            <a:off x="6675120" y="2926080"/>
+            <a:ext cx="4846320" cy="1143000"/>
           </a:xfrm>
           <a:prstGeom prst="roundRect">
-            <a:avLst/>
+            <a:avLst>
+              <a:gd name="adj" fmla="val 8000"/>
+            </a:avLst>
           </a:prstGeom>
           <a:solidFill>
-            <a:srgbClr val="0D1117"/>
+            <a:srgbClr val="111827"/>
           </a:solidFill>
-          <a:ln>
+          <a:ln w="12700">
             <a:solidFill>
-              <a:srgbClr val="5CE0D8"/>
+              <a:srgbClr val="00F0FF"/>
             </a:solidFill>
           </a:ln>
         </p:spPr>
@@ -7994,84 +10351,14 @@
       </p:sp>
       <p:sp>
         <p:nvSpPr>
-          <p:cNvPr id="10" name="TextBox 9"/>
-          <p:cNvSpPr txBox="1"/>
-          <p:nvPr/>
-        </p:nvSpPr>
-        <p:spPr>
-          <a:xfrm>
-            <a:off x="4572000" y="1600200"/>
-            <a:ext cx="2743200" cy="365760"/>
-          </a:xfrm>
-          <a:prstGeom prst="rect">
-            <a:avLst/>
-          </a:prstGeom>
-          <a:noFill/>
-        </p:spPr>
-        <p:txBody>
-          <a:bodyPr wrap="square">
-            <a:spAutoFit/>
-          </a:bodyPr>
-          <a:lstStyle/>
-          <a:p>
-            <a:pPr algn="l"/>
-            <a:r>
-              <a:rPr sz="1800" b="1">
-                <a:solidFill>
-                  <a:srgbClr val="5CE0D8"/>
-                </a:solidFill>
-                <a:latin typeface="Calibri"/>
-              </a:rPr>
-              <a:t>Team</a:t>
-            </a:r>
-          </a:p>
-        </p:txBody>
-      </p:sp>
-      <p:sp>
-        <p:nvSpPr>
-          <p:cNvPr id="11" name="TextBox 10"/>
-          <p:cNvSpPr txBox="1"/>
-          <p:nvPr/>
-        </p:nvSpPr>
-        <p:spPr>
-          <a:xfrm>
-            <a:off x="4572000" y="2103120"/>
-            <a:ext cx="2743200" cy="640080"/>
-          </a:xfrm>
-          <a:prstGeom prst="rect">
-            <a:avLst/>
-          </a:prstGeom>
-          <a:noFill/>
-        </p:spPr>
-        <p:txBody>
-          <a:bodyPr wrap="square">
-            <a:spAutoFit/>
-          </a:bodyPr>
-          <a:lstStyle/>
-          <a:p>
-            <a:pPr algn="l"/>
-            <a:r>
-              <a:rPr sz="3600" b="1">
-                <a:solidFill>
-                  <a:srgbClr val="FFFFFF"/>
-                </a:solidFill>
-                <a:latin typeface="Calibri"/>
-              </a:rPr>
-              <a:t>$49/seat</a:t>
-            </a:r>
-          </a:p>
-        </p:txBody>
-      </p:sp>
-      <p:sp>
-        <p:nvSpPr>
           <p:cNvPr id="12" name="TextBox 11"/>
           <p:cNvSpPr txBox="1"/>
           <p:nvPr/>
         </p:nvSpPr>
         <p:spPr>
           <a:xfrm>
-            <a:off x="4572000" y="2926080"/>
-            <a:ext cx="2743200" cy="2011680"/>
+            <a:off x="6903720" y="3063240"/>
+            <a:ext cx="2286000" cy="365760"/>
           </a:xfrm>
           <a:prstGeom prst="rect">
             <a:avLst/>
@@ -8079,52 +10366,113 @@
           <a:noFill/>
         </p:spPr>
         <p:txBody>
-          <a:bodyPr wrap="square">
-            <a:spAutoFit/>
-          </a:bodyPr>
+          <a:bodyPr wrap="square" anchor="t"/>
           <a:lstStyle/>
           <a:p>
             <a:pPr algn="l"/>
             <a:r>
-              <a:rPr sz="1600" b="0">
+              <a:rPr sz="1600" b="1">
+                <a:solidFill>
+                  <a:srgbClr val="F5F7FA"/>
+                </a:solidFill>
+                <a:latin typeface="Calibri"/>
+                <a:ea typeface="Calibri"/>
+              </a:rPr>
+              <a:t>Team</a:t>
+            </a:r>
+          </a:p>
+        </p:txBody>
+      </p:sp>
+      <p:sp>
+        <p:nvSpPr>
+          <p:cNvPr id="13" name="TextBox 12"/>
+          <p:cNvSpPr txBox="1"/>
+          <p:nvPr/>
+        </p:nvSpPr>
+        <p:spPr>
+          <a:xfrm>
+            <a:off x="9418320" y="3063240"/>
+            <a:ext cx="1828800" cy="365760"/>
+          </a:xfrm>
+          <a:prstGeom prst="rect">
+            <a:avLst/>
+          </a:prstGeom>
+          <a:noFill/>
+        </p:spPr>
+        <p:txBody>
+          <a:bodyPr wrap="square" anchor="t"/>
+          <a:lstStyle/>
+          <a:p>
+            <a:pPr algn="r"/>
+            <a:r>
+              <a:rPr sz="1600" b="1">
+                <a:solidFill>
+                  <a:srgbClr val="00F0FF"/>
+                </a:solidFill>
+                <a:latin typeface="Calibri"/>
+                <a:ea typeface="Calibri"/>
+              </a:rPr>
+              <a:t>$49/seat</a:t>
+            </a:r>
+          </a:p>
+        </p:txBody>
+      </p:sp>
+      <p:sp>
+        <p:nvSpPr>
+          <p:cNvPr id="14" name="TextBox 13"/>
+          <p:cNvSpPr txBox="1"/>
+          <p:nvPr/>
+        </p:nvSpPr>
+        <p:spPr>
+          <a:xfrm>
+            <a:off x="6903720" y="3520440"/>
+            <a:ext cx="4389120" cy="365760"/>
+          </a:xfrm>
+          <a:prstGeom prst="rect">
+            <a:avLst/>
+          </a:prstGeom>
+          <a:noFill/>
+        </p:spPr>
+        <p:txBody>
+          <a:bodyPr wrap="square" anchor="t"/>
+          <a:lstStyle/>
+          <a:p>
+            <a:pPr algn="l"/>
+            <a:r>
+              <a:rPr sz="1300" b="0">
                 <a:solidFill>
                   <a:srgbClr val="9AA4B2"/>
                 </a:solidFill>
                 <a:latin typeface="Calibri"/>
-              </a:rPr>
-              <a:t>Shared prefs</a:t>
-            </a:r>
-            <a:br/>
-            <a:r>
-              <a:t>Session history</a:t>
-            </a:r>
-            <a:br/>
-            <a:r>
-              <a:t>Admin audit</a:t>
-            </a:r>
-          </a:p>
-        </p:txBody>
-      </p:sp>
-      <p:sp>
-        <p:nvSpPr>
-          <p:cNvPr id="13" name="Rounded Rectangle 12"/>
+                <a:ea typeface="Calibri"/>
+              </a:rPr>
+              <a:t>Shared prefs, history, audit</a:t>
+            </a:r>
+          </a:p>
+        </p:txBody>
+      </p:sp>
+      <p:sp>
+        <p:nvSpPr>
+          <p:cNvPr id="15" name="Rounded Rectangle 14"/>
           <p:cNvSpPr/>
           <p:nvPr/>
         </p:nvSpPr>
         <p:spPr>
           <a:xfrm>
-            <a:off x="7772400" y="1371600"/>
-            <a:ext cx="3200400" cy="3840480"/>
+            <a:off x="6675120" y="4206240"/>
+            <a:ext cx="4846320" cy="1143000"/>
           </a:xfrm>
           <a:prstGeom prst="roundRect">
-            <a:avLst/>
+            <a:avLst>
+              <a:gd name="adj" fmla="val 8000"/>
+            </a:avLst>
           </a:prstGeom>
           <a:solidFill>
-            <a:srgbClr val="0D1117"/>
+            <a:srgbClr val="111827"/>
           </a:solidFill>
-          <a:ln>
+          <a:ln w="12700">
             <a:solidFill>
-              <a:srgbClr val="FFB627"/>
+              <a:srgbClr val="00F0FF"/>
             </a:solidFill>
           </a:ln>
         </p:spPr>
@@ -8152,84 +10500,14 @@
       </p:sp>
       <p:sp>
         <p:nvSpPr>
-          <p:cNvPr id="14" name="TextBox 13"/>
-          <p:cNvSpPr txBox="1"/>
-          <p:nvPr/>
-        </p:nvSpPr>
-        <p:spPr>
-          <a:xfrm>
-            <a:off x="8046720" y="1600200"/>
-            <a:ext cx="2743200" cy="365760"/>
-          </a:xfrm>
-          <a:prstGeom prst="rect">
-            <a:avLst/>
-          </a:prstGeom>
-          <a:noFill/>
-        </p:spPr>
-        <p:txBody>
-          <a:bodyPr wrap="square">
-            <a:spAutoFit/>
-          </a:bodyPr>
-          <a:lstStyle/>
-          <a:p>
-            <a:pPr algn="l"/>
-            <a:r>
-              <a:rPr sz="1800" b="1">
-                <a:solidFill>
-                  <a:srgbClr val="FFB627"/>
-                </a:solidFill>
-                <a:latin typeface="Calibri"/>
-              </a:rPr>
-              <a:t>Enterprise</a:t>
-            </a:r>
-          </a:p>
-        </p:txBody>
-      </p:sp>
-      <p:sp>
-        <p:nvSpPr>
-          <p:cNvPr id="15" name="TextBox 14"/>
-          <p:cNvSpPr txBox="1"/>
-          <p:nvPr/>
-        </p:nvSpPr>
-        <p:spPr>
-          <a:xfrm>
-            <a:off x="8046720" y="2103120"/>
-            <a:ext cx="2743200" cy="640080"/>
-          </a:xfrm>
-          <a:prstGeom prst="rect">
-            <a:avLst/>
-          </a:prstGeom>
-          <a:noFill/>
-        </p:spPr>
-        <p:txBody>
-          <a:bodyPr wrap="square">
-            <a:spAutoFit/>
-          </a:bodyPr>
-          <a:lstStyle/>
-          <a:p>
-            <a:pPr algn="l"/>
-            <a:r>
-              <a:rPr sz="3600" b="1">
-                <a:solidFill>
-                  <a:srgbClr val="FFFFFF"/>
-                </a:solidFill>
-                <a:latin typeface="Calibri"/>
-              </a:rPr>
-              <a:t>Custom</a:t>
-            </a:r>
-          </a:p>
-        </p:txBody>
-      </p:sp>
-      <p:sp>
-        <p:nvSpPr>
           <p:cNvPr id="16" name="TextBox 15"/>
           <p:cNvSpPr txBox="1"/>
           <p:nvPr/>
         </p:nvSpPr>
         <p:spPr>
           <a:xfrm>
-            <a:off x="8046720" y="2926080"/>
-            <a:ext cx="2743200" cy="2011680"/>
+            <a:off x="6903720" y="4343400"/>
+            <a:ext cx="2286000" cy="365760"/>
           </a:xfrm>
           <a:prstGeom prst="rect">
             <a:avLst/>
@@ -8237,28 +10515,19 @@
           <a:noFill/>
         </p:spPr>
         <p:txBody>
-          <a:bodyPr wrap="square">
-            <a:spAutoFit/>
-          </a:bodyPr>
+          <a:bodyPr wrap="square" anchor="t"/>
           <a:lstStyle/>
           <a:p>
             <a:pPr algn="l"/>
             <a:r>
-              <a:rPr sz="1600" b="0">
-                <a:solidFill>
-                  <a:srgbClr val="9AA4B2"/>
-                </a:solidFill>
-                <a:latin typeface="Calibri"/>
-              </a:rPr>
-              <a:t>SSO + private deploy</a:t>
-            </a:r>
-            <a:br/>
-            <a:r>
-              <a:t>Twilio phone</a:t>
-            </a:r>
-            <a:br/>
-            <a:r>
-              <a:t>SLA + support</a:t>
+              <a:rPr sz="1600" b="1">
+                <a:solidFill>
+                  <a:srgbClr val="F5F7FA"/>
+                </a:solidFill>
+                <a:latin typeface="Calibri"/>
+                <a:ea typeface="Calibri"/>
+              </a:rPr>
+              <a:t>Enterprise</a:t>
             </a:r>
           </a:p>
         </p:txBody>
@@ -8271,8 +10540,8 @@
         </p:nvSpPr>
         <p:spPr>
           <a:xfrm>
-            <a:off x="822960" y="5577840"/>
-            <a:ext cx="10515600" cy="548640"/>
+            <a:off x="9418320" y="4343400"/>
+            <a:ext cx="1828800" cy="365760"/>
           </a:xfrm>
           <a:prstGeom prst="rect">
             <a:avLst/>
@@ -8280,20 +10549,121 @@
           <a:noFill/>
         </p:spPr>
         <p:txBody>
-          <a:bodyPr wrap="square">
-            <a:spAutoFit/>
-          </a:bodyPr>
+          <a:bodyPr wrap="square" anchor="t"/>
+          <a:lstStyle/>
+          <a:p>
+            <a:pPr algn="r"/>
+            <a:r>
+              <a:rPr sz="1600" b="1">
+                <a:solidFill>
+                  <a:srgbClr val="00F0FF"/>
+                </a:solidFill>
+                <a:latin typeface="Calibri"/>
+                <a:ea typeface="Calibri"/>
+              </a:rPr>
+              <a:t>Custom</a:t>
+            </a:r>
+          </a:p>
+        </p:txBody>
+      </p:sp>
+      <p:sp>
+        <p:nvSpPr>
+          <p:cNvPr id="18" name="TextBox 17"/>
+          <p:cNvSpPr txBox="1"/>
+          <p:nvPr/>
+        </p:nvSpPr>
+        <p:spPr>
+          <a:xfrm>
+            <a:off x="6903720" y="4800600"/>
+            <a:ext cx="4389120" cy="365760"/>
+          </a:xfrm>
+          <a:prstGeom prst="rect">
+            <a:avLst/>
+          </a:prstGeom>
+          <a:noFill/>
+        </p:spPr>
+        <p:txBody>
+          <a:bodyPr wrap="square" anchor="t"/>
           <a:lstStyle/>
           <a:p>
             <a:pPr algn="l"/>
             <a:r>
-              <a:rPr sz="1400" b="0">
+              <a:rPr sz="1300" b="0">
                 <a:solidFill>
                   <a:srgbClr val="9AA4B2"/>
                 </a:solidFill>
                 <a:latin typeface="Calibri"/>
-              </a:rPr>
-              <a:t>Unit economics: AssemblyAI Voice Agent minutes are the COGS. Offline fallback lowers billable cloud minutes.</a:t>
+                <a:ea typeface="Calibri"/>
+              </a:rPr>
+              <a:t>SSO, private deploy, Twilio phone</a:t>
+            </a:r>
+          </a:p>
+        </p:txBody>
+      </p:sp>
+      <p:sp>
+        <p:nvSpPr>
+          <p:cNvPr id="19" name="TextBox 18"/>
+          <p:cNvSpPr txBox="1"/>
+          <p:nvPr/>
+        </p:nvSpPr>
+        <p:spPr>
+          <a:xfrm>
+            <a:off x="640080" y="6446520"/>
+            <a:ext cx="7315200" cy="274320"/>
+          </a:xfrm>
+          <a:prstGeom prst="rect">
+            <a:avLst/>
+          </a:prstGeom>
+          <a:noFill/>
+        </p:spPr>
+        <p:txBody>
+          <a:bodyPr wrap="square" anchor="t"/>
+          <a:lstStyle/>
+          <a:p>
+            <a:pPr algn="l"/>
+            <a:r>
+              <a:rPr sz="1100" b="0">
+                <a:solidFill>
+                  <a:srgbClr val="9AA4B2"/>
+                </a:solidFill>
+                <a:latin typeface="Calibri"/>
+                <a:ea typeface="Calibri"/>
+              </a:rPr>
+              <a:t>VoiceBridge AI  ·  AssemblyAI Voice Agent Hackathon 2026</a:t>
+            </a:r>
+          </a:p>
+        </p:txBody>
+      </p:sp>
+      <p:sp>
+        <p:nvSpPr>
+          <p:cNvPr id="20" name="TextBox 19"/>
+          <p:cNvSpPr txBox="1"/>
+          <p:nvPr/>
+        </p:nvSpPr>
+        <p:spPr>
+          <a:xfrm>
+            <a:off x="10515600" y="6446520"/>
+            <a:ext cx="1097280" cy="274320"/>
+          </a:xfrm>
+          <a:prstGeom prst="rect">
+            <a:avLst/>
+          </a:prstGeom>
+          <a:noFill/>
+        </p:spPr>
+        <p:txBody>
+          <a:bodyPr wrap="square" anchor="t"/>
+          <a:lstStyle/>
+          <a:p>
+            <a:pPr algn="r"/>
+            <a:r>
+              <a:rPr sz="1100" b="0">
+                <a:solidFill>
+                  <a:srgbClr val="9AA4B2"/>
+                </a:solidFill>
+                <a:latin typeface="Calibri"/>
+                <a:ea typeface="Calibri"/>
+              </a:rPr>
+              <a:t>8/10</a:t>
             </a:r>
           </a:p>
         </p:txBody>
@@ -8361,16 +10731,84 @@
       </p:sp>
       <p:sp>
         <p:nvSpPr>
-          <p:cNvPr id="3" name="Rounded Rectangle 2"/>
+          <p:cNvPr id="3" name="TextBox 2"/>
+          <p:cNvSpPr txBox="1"/>
+          <p:nvPr/>
+        </p:nvSpPr>
+        <p:spPr>
+          <a:xfrm>
+            <a:off x="640080" y="365760"/>
+            <a:ext cx="10972800" cy="320040"/>
+          </a:xfrm>
+          <a:prstGeom prst="rect">
+            <a:avLst/>
+          </a:prstGeom>
+          <a:noFill/>
+        </p:spPr>
+        <p:txBody>
+          <a:bodyPr wrap="square" anchor="t"/>
+          <a:lstStyle/>
+          <a:p>
+            <a:pPr algn="l"/>
+            <a:r>
+              <a:rPr sz="1200" b="1">
+                <a:solidFill>
+                  <a:srgbClr val="00F0FF"/>
+                </a:solidFill>
+                <a:latin typeface="Calibri"/>
+                <a:ea typeface="Calibri"/>
+              </a:rPr>
+              <a:t>BUILD STATUS</a:t>
+            </a:r>
+          </a:p>
+        </p:txBody>
+      </p:sp>
+      <p:sp>
+        <p:nvSpPr>
+          <p:cNvPr id="4" name="TextBox 3"/>
+          <p:cNvSpPr txBox="1"/>
+          <p:nvPr/>
+        </p:nvSpPr>
+        <p:spPr>
+          <a:xfrm>
+            <a:off x="640080" y="685800"/>
+            <a:ext cx="10972800" cy="640080"/>
+          </a:xfrm>
+          <a:prstGeom prst="rect">
+            <a:avLst/>
+          </a:prstGeom>
+          <a:noFill/>
+        </p:spPr>
+        <p:txBody>
+          <a:bodyPr wrap="square" anchor="t"/>
+          <a:lstStyle/>
+          <a:p>
+            <a:pPr algn="l"/>
+            <a:r>
+              <a:rPr sz="3200" b="1">
+                <a:solidFill>
+                  <a:srgbClr val="F5F7FA"/>
+                </a:solidFill>
+                <a:latin typeface="Calibri"/>
+                <a:ea typeface="Calibri"/>
+              </a:rPr>
+              <a:t>Production-shaped, not a weekend spike</a:t>
+            </a:r>
+          </a:p>
+        </p:txBody>
+      </p:sp>
+      <p:sp>
+        <p:nvSpPr>
+          <p:cNvPr id="5" name="Rectangle 4"/>
           <p:cNvSpPr/>
           <p:nvPr/>
         </p:nvSpPr>
         <p:spPr>
           <a:xfrm>
-            <a:off x="457200" y="320040"/>
-            <a:ext cx="109728" cy="640080"/>
-          </a:xfrm>
-          <a:prstGeom prst="roundRect">
+            <a:off x="640080" y="1325880"/>
+            <a:ext cx="1097280" cy="45720"/>
+          </a:xfrm>
+          <a:prstGeom prst="rect">
             <a:avLst/>
           </a:prstGeom>
           <a:solidFill>
@@ -8404,14 +10842,474 @@
       </p:sp>
       <p:sp>
         <p:nvSpPr>
-          <p:cNvPr id="4" name="TextBox 3"/>
+          <p:cNvPr id="6" name="Rounded Rectangle 5"/>
+          <p:cNvSpPr/>
+          <p:nvPr/>
+        </p:nvSpPr>
+        <p:spPr>
+          <a:xfrm>
+            <a:off x="640080" y="1645920"/>
+            <a:ext cx="5486400" cy="1417320"/>
+          </a:xfrm>
+          <a:prstGeom prst="roundRect">
+            <a:avLst>
+              <a:gd name="adj" fmla="val 8000"/>
+            </a:avLst>
+          </a:prstGeom>
+          <a:solidFill>
+            <a:srgbClr val="111827"/>
+          </a:solidFill>
+          <a:ln w="12700">
+            <a:solidFill>
+              <a:srgbClr val="00F0FF"/>
+            </a:solidFill>
+          </a:ln>
+        </p:spPr>
+        <p:style>
+          <a:lnRef idx="1">
+            <a:schemeClr val="accent1"/>
+          </a:lnRef>
+          <a:fillRef idx="3">
+            <a:schemeClr val="accent1"/>
+          </a:fillRef>
+          <a:effectRef idx="2">
+            <a:schemeClr val="accent1"/>
+          </a:effectRef>
+          <a:fontRef idx="minor">
+            <a:schemeClr val="lt1"/>
+          </a:fontRef>
+        </p:style>
+        <p:txBody>
+          <a:bodyPr rtlCol="0" anchor="ctr"/>
+          <a:lstStyle/>
+          <a:p>
+            <a:pPr algn="ctr"/>
+          </a:p>
+        </p:txBody>
+      </p:sp>
+      <p:sp>
+        <p:nvSpPr>
+          <p:cNvPr id="7" name="TextBox 6"/>
           <p:cNvSpPr txBox="1"/>
           <p:nvPr/>
         </p:nvSpPr>
         <p:spPr>
           <a:xfrm>
-            <a:off x="822960" y="411480"/>
-            <a:ext cx="10972800" cy="640080"/>
+            <a:off x="914400" y="1874520"/>
+            <a:ext cx="4937760" cy="548640"/>
+          </a:xfrm>
+          <a:prstGeom prst="rect">
+            <a:avLst/>
+          </a:prstGeom>
+          <a:noFill/>
+        </p:spPr>
+        <p:txBody>
+          <a:bodyPr wrap="square" anchor="t"/>
+          <a:lstStyle/>
+          <a:p>
+            <a:pPr algn="l"/>
+            <a:r>
+              <a:rPr sz="3600" b="1">
+                <a:solidFill>
+                  <a:srgbClr val="00F0FF"/>
+                </a:solidFill>
+                <a:latin typeface="Calibri"/>
+                <a:ea typeface="Calibri"/>
+              </a:rPr>
+              <a:t>16</a:t>
+            </a:r>
+          </a:p>
+        </p:txBody>
+      </p:sp>
+      <p:sp>
+        <p:nvSpPr>
+          <p:cNvPr id="8" name="TextBox 7"/>
+          <p:cNvSpPr txBox="1"/>
+          <p:nvPr/>
+        </p:nvSpPr>
+        <p:spPr>
+          <a:xfrm>
+            <a:off x="914400" y="2514600"/>
+            <a:ext cx="4937760" cy="365760"/>
+          </a:xfrm>
+          <a:prstGeom prst="rect">
+            <a:avLst/>
+          </a:prstGeom>
+          <a:noFill/>
+        </p:spPr>
+        <p:txBody>
+          <a:bodyPr wrap="square" anchor="t"/>
+          <a:lstStyle/>
+          <a:p>
+            <a:pPr algn="l"/>
+            <a:r>
+              <a:rPr sz="1400" b="0">
+                <a:solidFill>
+                  <a:srgbClr val="9AA4B2"/>
+                </a:solidFill>
+                <a:latin typeface="Calibri"/>
+                <a:ea typeface="Calibri"/>
+              </a:rPr>
+              <a:t>API routes, auth-wrapped</a:t>
+            </a:r>
+          </a:p>
+        </p:txBody>
+      </p:sp>
+      <p:sp>
+        <p:nvSpPr>
+          <p:cNvPr id="9" name="Rounded Rectangle 8"/>
+          <p:cNvSpPr/>
+          <p:nvPr/>
+        </p:nvSpPr>
+        <p:spPr>
+          <a:xfrm>
+            <a:off x="6400800" y="1645920"/>
+            <a:ext cx="5486400" cy="1417320"/>
+          </a:xfrm>
+          <a:prstGeom prst="roundRect">
+            <a:avLst>
+              <a:gd name="adj" fmla="val 8000"/>
+            </a:avLst>
+          </a:prstGeom>
+          <a:solidFill>
+            <a:srgbClr val="111827"/>
+          </a:solidFill>
+          <a:ln w="12700">
+            <a:solidFill>
+              <a:srgbClr val="51CF66"/>
+            </a:solidFill>
+          </a:ln>
+        </p:spPr>
+        <p:style>
+          <a:lnRef idx="1">
+            <a:schemeClr val="accent1"/>
+          </a:lnRef>
+          <a:fillRef idx="3">
+            <a:schemeClr val="accent1"/>
+          </a:fillRef>
+          <a:effectRef idx="2">
+            <a:schemeClr val="accent1"/>
+          </a:effectRef>
+          <a:fontRef idx="minor">
+            <a:schemeClr val="lt1"/>
+          </a:fontRef>
+        </p:style>
+        <p:txBody>
+          <a:bodyPr rtlCol="0" anchor="ctr"/>
+          <a:lstStyle/>
+          <a:p>
+            <a:pPr algn="ctr"/>
+          </a:p>
+        </p:txBody>
+      </p:sp>
+      <p:sp>
+        <p:nvSpPr>
+          <p:cNvPr id="10" name="TextBox 9"/>
+          <p:cNvSpPr txBox="1"/>
+          <p:nvPr/>
+        </p:nvSpPr>
+        <p:spPr>
+          <a:xfrm>
+            <a:off x="6675120" y="1874520"/>
+            <a:ext cx="4937760" cy="548640"/>
+          </a:xfrm>
+          <a:prstGeom prst="rect">
+            <a:avLst/>
+          </a:prstGeom>
+          <a:noFill/>
+        </p:spPr>
+        <p:txBody>
+          <a:bodyPr wrap="square" anchor="t"/>
+          <a:lstStyle/>
+          <a:p>
+            <a:pPr algn="l"/>
+            <a:r>
+              <a:rPr sz="3600" b="1">
+                <a:solidFill>
+                  <a:srgbClr val="51CF66"/>
+                </a:solidFill>
+                <a:latin typeface="Calibri"/>
+                <a:ea typeface="Calibri"/>
+              </a:rPr>
+              <a:t>8/8</a:t>
+            </a:r>
+          </a:p>
+        </p:txBody>
+      </p:sp>
+      <p:sp>
+        <p:nvSpPr>
+          <p:cNvPr id="11" name="TextBox 10"/>
+          <p:cNvSpPr txBox="1"/>
+          <p:nvPr/>
+        </p:nvSpPr>
+        <p:spPr>
+          <a:xfrm>
+            <a:off x="6675120" y="2514600"/>
+            <a:ext cx="4937760" cy="365760"/>
+          </a:xfrm>
+          <a:prstGeom prst="rect">
+            <a:avLst/>
+          </a:prstGeom>
+          <a:noFill/>
+        </p:spPr>
+        <p:txBody>
+          <a:bodyPr wrap="square" anchor="t"/>
+          <a:lstStyle/>
+          <a:p>
+            <a:pPr algn="l"/>
+            <a:r>
+              <a:rPr sz="1400" b="0">
+                <a:solidFill>
+                  <a:srgbClr val="9AA4B2"/>
+                </a:solidFill>
+                <a:latin typeface="Calibri"/>
+                <a:ea typeface="Calibri"/>
+              </a:rPr>
+              <a:t>Orchestrator unit tests pass</a:t>
+            </a:r>
+          </a:p>
+        </p:txBody>
+      </p:sp>
+      <p:sp>
+        <p:nvSpPr>
+          <p:cNvPr id="12" name="Rounded Rectangle 11"/>
+          <p:cNvSpPr/>
+          <p:nvPr/>
+        </p:nvSpPr>
+        <p:spPr>
+          <a:xfrm>
+            <a:off x="640080" y="3291840"/>
+            <a:ext cx="5486400" cy="1417320"/>
+          </a:xfrm>
+          <a:prstGeom prst="roundRect">
+            <a:avLst>
+              <a:gd name="adj" fmla="val 8000"/>
+            </a:avLst>
+          </a:prstGeom>
+          <a:solidFill>
+            <a:srgbClr val="111827"/>
+          </a:solidFill>
+          <a:ln w="12700">
+            <a:solidFill>
+              <a:srgbClr val="51CF66"/>
+            </a:solidFill>
+          </a:ln>
+        </p:spPr>
+        <p:style>
+          <a:lnRef idx="1">
+            <a:schemeClr val="accent1"/>
+          </a:lnRef>
+          <a:fillRef idx="3">
+            <a:schemeClr val="accent1"/>
+          </a:fillRef>
+          <a:effectRef idx="2">
+            <a:schemeClr val="accent1"/>
+          </a:effectRef>
+          <a:fontRef idx="minor">
+            <a:schemeClr val="lt1"/>
+          </a:fontRef>
+        </p:style>
+        <p:txBody>
+          <a:bodyPr rtlCol="0" anchor="ctr"/>
+          <a:lstStyle/>
+          <a:p>
+            <a:pPr algn="ctr"/>
+          </a:p>
+        </p:txBody>
+      </p:sp>
+      <p:sp>
+        <p:nvSpPr>
+          <p:cNvPr id="13" name="TextBox 12"/>
+          <p:cNvSpPr txBox="1"/>
+          <p:nvPr/>
+        </p:nvSpPr>
+        <p:spPr>
+          <a:xfrm>
+            <a:off x="914400" y="3520440"/>
+            <a:ext cx="4937760" cy="548640"/>
+          </a:xfrm>
+          <a:prstGeom prst="rect">
+            <a:avLst/>
+          </a:prstGeom>
+          <a:noFill/>
+        </p:spPr>
+        <p:txBody>
+          <a:bodyPr wrap="square" anchor="t"/>
+          <a:lstStyle/>
+          <a:p>
+            <a:pPr algn="l"/>
+            <a:r>
+              <a:rPr sz="3600" b="1">
+                <a:solidFill>
+                  <a:srgbClr val="51CF66"/>
+                </a:solidFill>
+                <a:latin typeface="Calibri"/>
+                <a:ea typeface="Calibri"/>
+              </a:rPr>
+              <a:t>E2E</a:t>
+            </a:r>
+          </a:p>
+        </p:txBody>
+      </p:sp>
+      <p:sp>
+        <p:nvSpPr>
+          <p:cNvPr id="14" name="TextBox 13"/>
+          <p:cNvSpPr txBox="1"/>
+          <p:nvPr/>
+        </p:nvSpPr>
+        <p:spPr>
+          <a:xfrm>
+            <a:off x="914400" y="4160520"/>
+            <a:ext cx="4937760" cy="365760"/>
+          </a:xfrm>
+          <a:prstGeom prst="rect">
+            <a:avLst/>
+          </a:prstGeom>
+          <a:noFill/>
+        </p:spPr>
+        <p:txBody>
+          <a:bodyPr wrap="square" anchor="t"/>
+          <a:lstStyle/>
+          <a:p>
+            <a:pPr algn="l"/>
+            <a:r>
+              <a:rPr sz="1400" b="0">
+                <a:solidFill>
+                  <a:srgbClr val="9AA4B2"/>
+                </a:solidFill>
+                <a:latin typeface="Calibri"/>
+                <a:ea typeface="Calibri"/>
+              </a:rPr>
+              <a:t>Playwright golden-path flyover</a:t>
+            </a:r>
+          </a:p>
+        </p:txBody>
+      </p:sp>
+      <p:sp>
+        <p:nvSpPr>
+          <p:cNvPr id="15" name="Rounded Rectangle 14"/>
+          <p:cNvSpPr/>
+          <p:nvPr/>
+        </p:nvSpPr>
+        <p:spPr>
+          <a:xfrm>
+            <a:off x="6400800" y="3291840"/>
+            <a:ext cx="5486400" cy="1417320"/>
+          </a:xfrm>
+          <a:prstGeom prst="roundRect">
+            <a:avLst>
+              <a:gd name="adj" fmla="val 8000"/>
+            </a:avLst>
+          </a:prstGeom>
+          <a:solidFill>
+            <a:srgbClr val="111827"/>
+          </a:solidFill>
+          <a:ln w="12700">
+            <a:solidFill>
+              <a:srgbClr val="5CE0D8"/>
+            </a:solidFill>
+          </a:ln>
+        </p:spPr>
+        <p:style>
+          <a:lnRef idx="1">
+            <a:schemeClr val="accent1"/>
+          </a:lnRef>
+          <a:fillRef idx="3">
+            <a:schemeClr val="accent1"/>
+          </a:fillRef>
+          <a:effectRef idx="2">
+            <a:schemeClr val="accent1"/>
+          </a:effectRef>
+          <a:fontRef idx="minor">
+            <a:schemeClr val="lt1"/>
+          </a:fontRef>
+        </p:style>
+        <p:txBody>
+          <a:bodyPr rtlCol="0" anchor="ctr"/>
+          <a:lstStyle/>
+          <a:p>
+            <a:pPr algn="ctr"/>
+          </a:p>
+        </p:txBody>
+      </p:sp>
+      <p:sp>
+        <p:nvSpPr>
+          <p:cNvPr id="16" name="TextBox 15"/>
+          <p:cNvSpPr txBox="1"/>
+          <p:nvPr/>
+        </p:nvSpPr>
+        <p:spPr>
+          <a:xfrm>
+            <a:off x="6675120" y="3520440"/>
+            <a:ext cx="4937760" cy="548640"/>
+          </a:xfrm>
+          <a:prstGeom prst="rect">
+            <a:avLst/>
+          </a:prstGeom>
+          <a:noFill/>
+        </p:spPr>
+        <p:txBody>
+          <a:bodyPr wrap="square" anchor="t"/>
+          <a:lstStyle/>
+          <a:p>
+            <a:pPr algn="l"/>
+            <a:r>
+              <a:rPr sz="3600" b="1">
+                <a:solidFill>
+                  <a:srgbClr val="5CE0D8"/>
+                </a:solidFill>
+                <a:latin typeface="Calibri"/>
+                <a:ea typeface="Calibri"/>
+              </a:rPr>
+              <a:t>14</a:t>
+            </a:r>
+          </a:p>
+        </p:txBody>
+      </p:sp>
+      <p:sp>
+        <p:nvSpPr>
+          <p:cNvPr id="17" name="TextBox 16"/>
+          <p:cNvSpPr txBox="1"/>
+          <p:nvPr/>
+        </p:nvSpPr>
+        <p:spPr>
+          <a:xfrm>
+            <a:off x="6675120" y="4160520"/>
+            <a:ext cx="4937760" cy="365760"/>
+          </a:xfrm>
+          <a:prstGeom prst="rect">
+            <a:avLst/>
+          </a:prstGeom>
+          <a:noFill/>
+        </p:spPr>
+        <p:txBody>
+          <a:bodyPr wrap="square" anchor="t"/>
+          <a:lstStyle/>
+          <a:p>
+            <a:pPr algn="l"/>
+            <a:r>
+              <a:rPr sz="1400" b="0">
+                <a:solidFill>
+                  <a:srgbClr val="9AA4B2"/>
+                </a:solidFill>
+                <a:latin typeface="Calibri"/>
+                <a:ea typeface="Calibri"/>
+              </a:rPr>
+              <a:t>Security controls verified live</a:t>
+            </a:r>
+          </a:p>
+        </p:txBody>
+      </p:sp>
+      <p:sp>
+        <p:nvSpPr>
+          <p:cNvPr id="18" name="TextBox 17"/>
+          <p:cNvSpPr txBox="1"/>
+          <p:nvPr/>
+        </p:nvSpPr>
+        <p:spPr>
+          <a:xfrm>
+            <a:off x="640080" y="5029200"/>
+            <a:ext cx="10972800" cy="1097280"/>
           </a:xfrm>
           <a:prstGeom prst="rect">
             <a:avLst/>
@@ -8424,29 +11322,105 @@
           </a:bodyPr>
           <a:lstStyle/>
           <a:p>
+            <a:pPr algn="l">
+              <a:spcAft>
+                <a:spcPts val="1000"/>
+              </a:spcAft>
+            </a:pPr>
+            <a:r>
+              <a:rPr sz="1400" b="1">
+                <a:solidFill>
+                  <a:srgbClr val="51CF66"/>
+                </a:solidFill>
+                <a:latin typeface="Calibri"/>
+                <a:ea typeface="Calibri"/>
+              </a:rPr>
+              <a:t>▸  </a:t>
+            </a:r>
+            <a:r>
+              <a:rPr sz="1400" b="0">
+                <a:solidFill>
+                  <a:srgbClr val="F5F7FA"/>
+                </a:solidFill>
+                <a:latin typeface="Calibri"/>
+                <a:ea typeface="Calibri"/>
+              </a:rPr>
+              <a:t>Stored AssemblyAI agent published (agent_id connect path)</a:t>
+            </a:r>
+          </a:p>
+          <a:p>
+            <a:pPr algn="l">
+              <a:spcAft>
+                <a:spcPts val="1000"/>
+              </a:spcAft>
+            </a:pPr>
+            <a:r>
+              <a:rPr sz="1400" b="1">
+                <a:solidFill>
+                  <a:srgbClr val="51CF66"/>
+                </a:solidFill>
+                <a:latin typeface="Calibri"/>
+                <a:ea typeface="Calibri"/>
+              </a:rPr>
+              <a:t>▸  </a:t>
+            </a:r>
+            <a:r>
+              <a:rPr sz="1400" b="0">
+                <a:solidFill>
+                  <a:srgbClr val="F5F7FA"/>
+                </a:solidFill>
+                <a:latin typeface="Calibri"/>
+                <a:ea typeface="Calibri"/>
+              </a:rPr>
+              <a:t>Judge demo video + README + submission kit in repo</a:t>
+            </a:r>
+          </a:p>
+        </p:txBody>
+      </p:sp>
+      <p:sp>
+        <p:nvSpPr>
+          <p:cNvPr id="19" name="TextBox 18"/>
+          <p:cNvSpPr txBox="1"/>
+          <p:nvPr/>
+        </p:nvSpPr>
+        <p:spPr>
+          <a:xfrm>
+            <a:off x="640080" y="6446520"/>
+            <a:ext cx="7315200" cy="274320"/>
+          </a:xfrm>
+          <a:prstGeom prst="rect">
+            <a:avLst/>
+          </a:prstGeom>
+          <a:noFill/>
+        </p:spPr>
+        <p:txBody>
+          <a:bodyPr wrap="square" anchor="t"/>
+          <a:lstStyle/>
+          <a:p>
             <a:pPr algn="l"/>
             <a:r>
-              <a:rPr sz="3600" b="1">
-                <a:solidFill>
-                  <a:srgbClr val="FFFFFF"/>
-                </a:solidFill>
-                <a:latin typeface="Calibri"/>
-              </a:rPr>
-              <a:t>Shipped — not vapor</a:t>
-            </a:r>
-          </a:p>
-        </p:txBody>
-      </p:sp>
-      <p:sp>
-        <p:nvSpPr>
-          <p:cNvPr id="5" name="TextBox 4"/>
+              <a:rPr sz="1100" b="0">
+                <a:solidFill>
+                  <a:srgbClr val="9AA4B2"/>
+                </a:solidFill>
+                <a:latin typeface="Calibri"/>
+                <a:ea typeface="Calibri"/>
+              </a:rPr>
+              <a:t>VoiceBridge AI  ·  AssemblyAI Voice Agent Hackathon 2026</a:t>
+            </a:r>
+          </a:p>
+        </p:txBody>
+      </p:sp>
+      <p:sp>
+        <p:nvSpPr>
+          <p:cNvPr id="20" name="TextBox 19"/>
           <p:cNvSpPr txBox="1"/>
           <p:nvPr/>
         </p:nvSpPr>
         <p:spPr>
           <a:xfrm>
-            <a:off x="914400" y="1371600"/>
-            <a:ext cx="457200" cy="365760"/>
+            <a:off x="10515600" y="6446520"/>
+            <a:ext cx="1097280" cy="274320"/>
           </a:xfrm>
           <a:prstGeom prst="rect">
             <a:avLst/>
@@ -8454,405 +11428,19 @@
           <a:noFill/>
         </p:spPr>
         <p:txBody>
-          <a:bodyPr wrap="square">
-            <a:spAutoFit/>
-          </a:bodyPr>
-          <a:lstStyle/>
-          <a:p>
-            <a:pPr algn="l"/>
-            <a:r>
-              <a:rPr sz="2000" b="1">
-                <a:solidFill>
-                  <a:srgbClr val="51CF66"/>
-                </a:solidFill>
-                <a:latin typeface="Calibri"/>
-              </a:rPr>
-              <a:t>✓</a:t>
-            </a:r>
-          </a:p>
-        </p:txBody>
-      </p:sp>
-      <p:sp>
-        <p:nvSpPr>
-          <p:cNvPr id="6" name="TextBox 5"/>
-          <p:cNvSpPr txBox="1"/>
-          <p:nvPr/>
-        </p:nvSpPr>
-        <p:spPr>
-          <a:xfrm>
-            <a:off x="1463040" y="1371600"/>
-            <a:ext cx="9601200" cy="411480"/>
-          </a:xfrm>
-          <a:prstGeom prst="rect">
-            <a:avLst/>
-          </a:prstGeom>
-          <a:noFill/>
-        </p:spPr>
-        <p:txBody>
-          <a:bodyPr wrap="square">
-            <a:spAutoFit/>
-          </a:bodyPr>
-          <a:lstStyle/>
-          <a:p>
-            <a:pPr algn="l"/>
-            <a:r>
-              <a:rPr sz="1800" b="0">
-                <a:solidFill>
-                  <a:srgbClr val="FFFFFF"/>
-                </a:solidFill>
-                <a:latin typeface="Calibri"/>
-              </a:rPr>
-              <a:t>Stored AssemblyAI agent live (agent_id + dispatch_tool)</a:t>
-            </a:r>
-          </a:p>
-        </p:txBody>
-      </p:sp>
-      <p:sp>
-        <p:nvSpPr>
-          <p:cNvPr id="7" name="TextBox 6"/>
-          <p:cNvSpPr txBox="1"/>
-          <p:nvPr/>
-        </p:nvSpPr>
-        <p:spPr>
-          <a:xfrm>
-            <a:off x="914400" y="2057400"/>
-            <a:ext cx="457200" cy="365760"/>
-          </a:xfrm>
-          <a:prstGeom prst="rect">
-            <a:avLst/>
-          </a:prstGeom>
-          <a:noFill/>
-        </p:spPr>
-        <p:txBody>
-          <a:bodyPr wrap="square">
-            <a:spAutoFit/>
-          </a:bodyPr>
-          <a:lstStyle/>
-          <a:p>
-            <a:pPr algn="l"/>
-            <a:r>
-              <a:rPr sz="2000" b="1">
-                <a:solidFill>
-                  <a:srgbClr val="51CF66"/>
-                </a:solidFill>
-                <a:latin typeface="Calibri"/>
-              </a:rPr>
-              <a:t>✓</a:t>
-            </a:r>
-          </a:p>
-        </p:txBody>
-      </p:sp>
-      <p:sp>
-        <p:nvSpPr>
-          <p:cNvPr id="8" name="TextBox 7"/>
-          <p:cNvSpPr txBox="1"/>
-          <p:nvPr/>
-        </p:nvSpPr>
-        <p:spPr>
-          <a:xfrm>
-            <a:off x="1463040" y="2057400"/>
-            <a:ext cx="9601200" cy="411480"/>
-          </a:xfrm>
-          <a:prstGeom prst="rect">
-            <a:avLst/>
-          </a:prstGeom>
-          <a:noFill/>
-        </p:spPr>
-        <p:txBody>
-          <a:bodyPr wrap="square">
-            <a:spAutoFit/>
-          </a:bodyPr>
-          <a:lstStyle/>
-          <a:p>
-            <a:pPr algn="l"/>
-            <a:r>
-              <a:rPr sz="1800" b="0">
-                <a:solidFill>
-                  <a:srgbClr val="FFFFFF"/>
-                </a:solidFill>
-                <a:latin typeface="Calibri"/>
-              </a:rPr>
-              <a:t>Browser WS client: tokens, PCM16, tools, interrupt, resume</a:t>
-            </a:r>
-          </a:p>
-        </p:txBody>
-      </p:sp>
-      <p:sp>
-        <p:nvSpPr>
-          <p:cNvPr id="9" name="TextBox 8"/>
-          <p:cNvSpPr txBox="1"/>
-          <p:nvPr/>
-        </p:nvSpPr>
-        <p:spPr>
-          <a:xfrm>
-            <a:off x="914400" y="2743200"/>
-            <a:ext cx="457200" cy="365760"/>
-          </a:xfrm>
-          <a:prstGeom prst="rect">
-            <a:avLst/>
-          </a:prstGeom>
-          <a:noFill/>
-        </p:spPr>
-        <p:txBody>
-          <a:bodyPr wrap="square">
-            <a:spAutoFit/>
-          </a:bodyPr>
-          <a:lstStyle/>
-          <a:p>
-            <a:pPr algn="l"/>
-            <a:r>
-              <a:rPr sz="2000" b="1">
-                <a:solidFill>
-                  <a:srgbClr val="51CF66"/>
-                </a:solidFill>
-                <a:latin typeface="Calibri"/>
-              </a:rPr>
-              <a:t>✓</a:t>
-            </a:r>
-          </a:p>
-        </p:txBody>
-      </p:sp>
-      <p:sp>
-        <p:nvSpPr>
-          <p:cNvPr id="10" name="TextBox 9"/>
-          <p:cNvSpPr txBox="1"/>
-          <p:nvPr/>
-        </p:nvSpPr>
-        <p:spPr>
-          <a:xfrm>
-            <a:off x="1463040" y="2743200"/>
-            <a:ext cx="9601200" cy="411480"/>
-          </a:xfrm>
-          <a:prstGeom prst="rect">
-            <a:avLst/>
-          </a:prstGeom>
-          <a:noFill/>
-        </p:spPr>
-        <p:txBody>
-          <a:bodyPr wrap="square">
-            <a:spAutoFit/>
-          </a:bodyPr>
-          <a:lstStyle/>
-          <a:p>
-            <a:pPr algn="l"/>
-            <a:r>
-              <a:rPr sz="1800" b="0">
-                <a:solidFill>
-                  <a:srgbClr val="FFFFFF"/>
-                </a:solidFill>
-                <a:latin typeface="Calibri"/>
-              </a:rPr>
-              <a:t>Security stack: auth, CSRF, rate limit, AES-GCM, audit</a:t>
-            </a:r>
-          </a:p>
-        </p:txBody>
-      </p:sp>
-      <p:sp>
-        <p:nvSpPr>
-          <p:cNvPr id="11" name="TextBox 10"/>
-          <p:cNvSpPr txBox="1"/>
-          <p:nvPr/>
-        </p:nvSpPr>
-        <p:spPr>
-          <a:xfrm>
-            <a:off x="914400" y="3429000"/>
-            <a:ext cx="457200" cy="365760"/>
-          </a:xfrm>
-          <a:prstGeom prst="rect">
-            <a:avLst/>
-          </a:prstGeom>
-          <a:noFill/>
-        </p:spPr>
-        <p:txBody>
-          <a:bodyPr wrap="square">
-            <a:spAutoFit/>
-          </a:bodyPr>
-          <a:lstStyle/>
-          <a:p>
-            <a:pPr algn="l"/>
-            <a:r>
-              <a:rPr sz="2000" b="1">
-                <a:solidFill>
-                  <a:srgbClr val="51CF66"/>
-                </a:solidFill>
-                <a:latin typeface="Calibri"/>
-              </a:rPr>
-              <a:t>✓</a:t>
-            </a:r>
-          </a:p>
-        </p:txBody>
-      </p:sp>
-      <p:sp>
-        <p:nvSpPr>
-          <p:cNvPr id="12" name="TextBox 11"/>
-          <p:cNvSpPr txBox="1"/>
-          <p:nvPr/>
-        </p:nvSpPr>
-        <p:spPr>
-          <a:xfrm>
-            <a:off x="1463040" y="3429000"/>
-            <a:ext cx="9601200" cy="411480"/>
-          </a:xfrm>
-          <a:prstGeom prst="rect">
-            <a:avLst/>
-          </a:prstGeom>
-          <a:noFill/>
-        </p:spPr>
-        <p:txBody>
-          <a:bodyPr wrap="square">
-            <a:spAutoFit/>
-          </a:bodyPr>
-          <a:lstStyle/>
-          <a:p>
-            <a:pPr algn="l"/>
-            <a:r>
-              <a:rPr sz="1800" b="0">
-                <a:solidFill>
-                  <a:srgbClr val="FFFFFF"/>
-                </a:solidFill>
-                <a:latin typeface="Calibri"/>
-              </a:rPr>
-              <a:t>Typecheck clean  ·  lint clean  ·  8/8 unit tests  ·  prod build</a:t>
-            </a:r>
-          </a:p>
-        </p:txBody>
-      </p:sp>
-      <p:sp>
-        <p:nvSpPr>
-          <p:cNvPr id="13" name="TextBox 12"/>
-          <p:cNvSpPr txBox="1"/>
-          <p:nvPr/>
-        </p:nvSpPr>
-        <p:spPr>
-          <a:xfrm>
-            <a:off x="914400" y="4114800"/>
-            <a:ext cx="457200" cy="365760"/>
-          </a:xfrm>
-          <a:prstGeom prst="rect">
-            <a:avLst/>
-          </a:prstGeom>
-          <a:noFill/>
-        </p:spPr>
-        <p:txBody>
-          <a:bodyPr wrap="square">
-            <a:spAutoFit/>
-          </a:bodyPr>
-          <a:lstStyle/>
-          <a:p>
-            <a:pPr algn="l"/>
-            <a:r>
-              <a:rPr sz="2000" b="1">
-                <a:solidFill>
-                  <a:srgbClr val="51CF66"/>
-                </a:solidFill>
-                <a:latin typeface="Calibri"/>
-              </a:rPr>
-              <a:t>✓</a:t>
-            </a:r>
-          </a:p>
-        </p:txBody>
-      </p:sp>
-      <p:sp>
-        <p:nvSpPr>
-          <p:cNvPr id="14" name="TextBox 13"/>
-          <p:cNvSpPr txBox="1"/>
-          <p:nvPr/>
-        </p:nvSpPr>
-        <p:spPr>
-          <a:xfrm>
-            <a:off x="1463040" y="4114800"/>
-            <a:ext cx="9601200" cy="411480"/>
-          </a:xfrm>
-          <a:prstGeom prst="rect">
-            <a:avLst/>
-          </a:prstGeom>
-          <a:noFill/>
-        </p:spPr>
-        <p:txBody>
-          <a:bodyPr wrap="square">
-            <a:spAutoFit/>
-          </a:bodyPr>
-          <a:lstStyle/>
-          <a:p>
-            <a:pPr algn="l"/>
-            <a:r>
-              <a:rPr sz="1800" b="0">
-                <a:solidFill>
-                  <a:srgbClr val="FFFFFF"/>
-                </a:solidFill>
-                <a:latin typeface="Calibri"/>
-              </a:rPr>
-              <a:t>Playwright E2E: login, 8 panels, 5 tabs, Space, typed commands</a:t>
-            </a:r>
-          </a:p>
-        </p:txBody>
-      </p:sp>
-      <p:sp>
-        <p:nvSpPr>
-          <p:cNvPr id="15" name="TextBox 14"/>
-          <p:cNvSpPr txBox="1"/>
-          <p:nvPr/>
-        </p:nvSpPr>
-        <p:spPr>
-          <a:xfrm>
-            <a:off x="914400" y="4800600"/>
-            <a:ext cx="457200" cy="365760"/>
-          </a:xfrm>
-          <a:prstGeom prst="rect">
-            <a:avLst/>
-          </a:prstGeom>
-          <a:noFill/>
-        </p:spPr>
-        <p:txBody>
-          <a:bodyPr wrap="square">
-            <a:spAutoFit/>
-          </a:bodyPr>
-          <a:lstStyle/>
-          <a:p>
-            <a:pPr algn="l"/>
-            <a:r>
-              <a:rPr sz="2000" b="1">
-                <a:solidFill>
-                  <a:srgbClr val="51CF66"/>
-                </a:solidFill>
-                <a:latin typeface="Calibri"/>
-              </a:rPr>
-              <a:t>✓</a:t>
-            </a:r>
-          </a:p>
-        </p:txBody>
-      </p:sp>
-      <p:sp>
-        <p:nvSpPr>
-          <p:cNvPr id="16" name="TextBox 15"/>
-          <p:cNvSpPr txBox="1"/>
-          <p:nvPr/>
-        </p:nvSpPr>
-        <p:spPr>
-          <a:xfrm>
-            <a:off x="1463040" y="4800600"/>
-            <a:ext cx="9601200" cy="411480"/>
-          </a:xfrm>
-          <a:prstGeom prst="rect">
-            <a:avLst/>
-          </a:prstGeom>
-          <a:noFill/>
-        </p:spPr>
-        <p:txBody>
-          <a:bodyPr wrap="square">
-            <a:spAutoFit/>
-          </a:bodyPr>
-          <a:lstStyle/>
-          <a:p>
-            <a:pPr algn="l"/>
-            <a:r>
-              <a:rPr sz="1800" b="0">
-                <a:solidFill>
-                  <a:srgbClr val="FFFFFF"/>
-                </a:solidFill>
-                <a:latin typeface="Calibri"/>
-              </a:rPr>
-              <a:t>Frame-by-frame demo video + this deck</a:t>
+          <a:bodyPr wrap="square" anchor="t"/>
+          <a:lstStyle/>
+          <a:p>
+            <a:pPr algn="r"/>
+            <a:r>
+              <a:rPr sz="1100" b="0">
+                <a:solidFill>
+                  <a:srgbClr val="9AA4B2"/>
+                </a:solidFill>
+                <a:latin typeface="Calibri"/>
+                <a:ea typeface="Calibri"/>
+              </a:rPr>
+              <a:t>9/10</a:t>
             </a:r>
           </a:p>
         </p:txBody>
